--- a/RIMS_System_Specification.pptx
+++ b/RIMS_System_Specification.pptx
@@ -5949,7 +5949,7 @@
               </a:defRPr>
             </a:pPr>
             <a:r>
-              <a:t>12. Summary &amp; Key Prototype Benefits</a:t>
+              <a:t>12. Summary &amp; Live Prototype Deployment</a:t>
             </a:r>
           </a:p>
         </p:txBody>
@@ -5962,8 +5962,8 @@
         </p:nvSpPr>
         <p:spPr>
           <a:xfrm>
-            <a:off x="914400" y="1371600"/>
-            <a:ext cx="5029200" cy="2103120"/>
+            <a:off x="914400" y="1261872"/>
+            <a:ext cx="5029200" cy="1874519"/>
           </a:xfrm>
           <a:prstGeom prst="roundRect">
             <a:avLst/>
@@ -6007,7 +6007,7 @@
         </p:nvSpPr>
         <p:spPr>
           <a:xfrm>
-            <a:off x="914400" y="1371600"/>
+            <a:off x="914400" y="1261872"/>
             <a:ext cx="5029200" cy="384048"/>
           </a:xfrm>
           <a:prstGeom prst="rect">
@@ -6059,8 +6059,8 @@
         </p:nvSpPr>
         <p:spPr>
           <a:xfrm>
-            <a:off x="1097280" y="1920240"/>
-            <a:ext cx="4663440" cy="1371600"/>
+            <a:off x="1097280" y="1755648"/>
+            <a:ext cx="4663440" cy="1234440"/>
           </a:xfrm>
           <a:prstGeom prst="rect">
             <a:avLst/>
@@ -6075,9 +6075,9 @@
           <a:p>
             <a:pPr>
               <a:lnSpc>
-                <a:spcPct val="130000"/>
+                <a:spcPct val="125000"/>
               </a:lnSpc>
-              <a:defRPr sz="1200">
+              <a:defRPr sz="1100">
                 <a:solidFill>
                   <a:srgbClr val="0F172A"/>
                 </a:solidFill>
@@ -6097,8 +6097,8 @@
         </p:nvSpPr>
         <p:spPr>
           <a:xfrm>
-            <a:off x="6217920" y="1371600"/>
-            <a:ext cx="5029200" cy="2103120"/>
+            <a:off x="6217920" y="1261872"/>
+            <a:ext cx="5029200" cy="1874519"/>
           </a:xfrm>
           <a:prstGeom prst="roundRect">
             <a:avLst/>
@@ -6142,7 +6142,7 @@
         </p:nvSpPr>
         <p:spPr>
           <a:xfrm>
-            <a:off x="6217920" y="1371600"/>
+            <a:off x="6217920" y="1261872"/>
             <a:ext cx="5029200" cy="384048"/>
           </a:xfrm>
           <a:prstGeom prst="rect">
@@ -6194,8 +6194,8 @@
         </p:nvSpPr>
         <p:spPr>
           <a:xfrm>
-            <a:off x="6400800" y="1920240"/>
-            <a:ext cx="4663440" cy="1371600"/>
+            <a:off x="6400800" y="1755648"/>
+            <a:ext cx="4663440" cy="1234440"/>
           </a:xfrm>
           <a:prstGeom prst="rect">
             <a:avLst/>
@@ -6210,9 +6210,9 @@
           <a:p>
             <a:pPr>
               <a:lnSpc>
-                <a:spcPct val="130000"/>
+                <a:spcPct val="125000"/>
               </a:lnSpc>
-              <a:defRPr sz="1200">
+              <a:defRPr sz="1100">
                 <a:solidFill>
                   <a:srgbClr val="0F172A"/>
                 </a:solidFill>
@@ -6232,8 +6232,8 @@
         </p:nvSpPr>
         <p:spPr>
           <a:xfrm>
-            <a:off x="914400" y="3749039"/>
-            <a:ext cx="5029200" cy="2103120"/>
+            <a:off x="914400" y="3273552"/>
+            <a:ext cx="5029200" cy="1874519"/>
           </a:xfrm>
           <a:prstGeom prst="roundRect">
             <a:avLst/>
@@ -6277,7 +6277,7 @@
         </p:nvSpPr>
         <p:spPr>
           <a:xfrm>
-            <a:off x="914400" y="3749039"/>
+            <a:off x="914400" y="3273552"/>
             <a:ext cx="5029200" cy="384048"/>
           </a:xfrm>
           <a:prstGeom prst="rect">
@@ -6329,8 +6329,8 @@
         </p:nvSpPr>
         <p:spPr>
           <a:xfrm>
-            <a:off x="1097280" y="4297680"/>
-            <a:ext cx="4663440" cy="1371600"/>
+            <a:off x="1097280" y="3767328"/>
+            <a:ext cx="4663440" cy="1234440"/>
           </a:xfrm>
           <a:prstGeom prst="rect">
             <a:avLst/>
@@ -6345,9 +6345,9 @@
           <a:p>
             <a:pPr>
               <a:lnSpc>
-                <a:spcPct val="130000"/>
+                <a:spcPct val="125000"/>
               </a:lnSpc>
-              <a:defRPr sz="1200">
+              <a:defRPr sz="1100">
                 <a:solidFill>
                   <a:srgbClr val="0F172A"/>
                 </a:solidFill>
@@ -6367,8 +6367,8 @@
         </p:nvSpPr>
         <p:spPr>
           <a:xfrm>
-            <a:off x="6217920" y="3749039"/>
-            <a:ext cx="5029200" cy="2103120"/>
+            <a:off x="6217920" y="3273552"/>
+            <a:ext cx="5029200" cy="1874519"/>
           </a:xfrm>
           <a:prstGeom prst="roundRect">
             <a:avLst/>
@@ -6412,7 +6412,7 @@
         </p:nvSpPr>
         <p:spPr>
           <a:xfrm>
-            <a:off x="6217920" y="3749039"/>
+            <a:off x="6217920" y="3273552"/>
             <a:ext cx="5029200" cy="384048"/>
           </a:xfrm>
           <a:prstGeom prst="rect">
@@ -6464,8 +6464,8 @@
         </p:nvSpPr>
         <p:spPr>
           <a:xfrm>
-            <a:off x="6400800" y="4297680"/>
-            <a:ext cx="4663440" cy="1371600"/>
+            <a:off x="6400800" y="3767328"/>
+            <a:ext cx="4663440" cy="1234440"/>
           </a:xfrm>
           <a:prstGeom prst="rect">
             <a:avLst/>
@@ -6480,9 +6480,9 @@
           <a:p>
             <a:pPr>
               <a:lnSpc>
-                <a:spcPct val="130000"/>
+                <a:spcPct val="125000"/>
               </a:lnSpc>
-              <a:defRPr sz="1200">
+              <a:defRPr sz="1100">
                 <a:solidFill>
                   <a:srgbClr val="0F172A"/>
                 </a:solidFill>
@@ -6496,7 +6496,102 @@
       </p:sp>
       <p:sp>
         <p:nvSpPr>
-          <p:cNvPr id="18" name="TextBox 17"/>
+          <p:cNvPr id="18" name="Rounded Rectangle 17"/>
+          <p:cNvSpPr/>
+          <p:nvPr/>
+        </p:nvSpPr>
+        <p:spPr>
+          <a:xfrm>
+            <a:off x="914400" y="5440680"/>
+            <a:ext cx="10332720" cy="868680"/>
+          </a:xfrm>
+          <a:prstGeom prst="roundRect">
+            <a:avLst/>
+          </a:prstGeom>
+          <a:solidFill>
+            <a:srgbClr val="0F172A"/>
+          </a:solidFill>
+          <a:ln w="25400">
+            <a:solidFill>
+              <a:srgbClr val="10B981"/>
+            </a:solidFill>
+          </a:ln>
+        </p:spPr>
+        <p:style>
+          <a:lnRef idx="1">
+            <a:schemeClr val="accent1"/>
+          </a:lnRef>
+          <a:fillRef idx="3">
+            <a:schemeClr val="accent1"/>
+          </a:fillRef>
+          <a:effectRef idx="2">
+            <a:schemeClr val="accent1"/>
+          </a:effectRef>
+          <a:fontRef idx="minor">
+            <a:schemeClr val="lt1"/>
+          </a:fontRef>
+        </p:style>
+        <p:txBody>
+          <a:bodyPr rtlCol="0" anchor="ctr"/>
+          <a:lstStyle/>
+          <a:p>
+            <a:pPr algn="ctr"/>
+          </a:p>
+        </p:txBody>
+      </p:sp>
+      <p:sp>
+        <p:nvSpPr>
+          <p:cNvPr id="19" name="TextBox 18"/>
+          <p:cNvSpPr txBox="1"/>
+          <p:nvPr/>
+        </p:nvSpPr>
+        <p:spPr>
+          <a:xfrm>
+            <a:off x="1097280" y="5486400"/>
+            <a:ext cx="9966960" cy="777240"/>
+          </a:xfrm>
+          <a:prstGeom prst="rect">
+            <a:avLst/>
+          </a:prstGeom>
+          <a:noFill/>
+        </p:spPr>
+        <p:txBody>
+          <a:bodyPr wrap="square">
+            <a:spAutoFit/>
+          </a:bodyPr>
+          <a:lstStyle/>
+          <a:p>
+            <a:pPr>
+              <a:defRPr sz="1000" b="1">
+                <a:solidFill>
+                  <a:srgbClr val="0EA5E9"/>
+                </a:solidFill>
+              </a:defRPr>
+            </a:pPr>
+            <a:r>
+              <a:t>🌐 LIVE PRODUCTION DEPLOYMENT (VERCEL)</a:t>
+            </a:r>
+          </a:p>
+          <a:p>
+            <a:pPr>
+              <a:spcBef>
+                <a:spcPts val="200"/>
+              </a:spcBef>
+              <a:defRPr sz="1500" b="1">
+                <a:solidFill>
+                  <a:srgbClr val="10B981"/>
+                </a:solidFill>
+              </a:defRPr>
+            </a:pPr>
+            <a:r>
+              <a:t>https://refrigerator-inventory-system.vercel.app/</a:t>
+            </a:r>
+          </a:p>
+        </p:txBody>
+      </p:sp>
+      <p:sp>
+        <p:nvSpPr>
+          <p:cNvPr id="20" name="TextBox 19"/>
           <p:cNvSpPr txBox="1"/>
           <p:nvPr/>
         </p:nvSpPr>

--- a/RIMS_System_Specification.pptx
+++ b/RIMS_System_Specification.pptx
@@ -5,21 +5,19 @@
     <p:sldMasterId id="2147483648" r:id="rId1"/>
   </p:sldMasterIdLst>
   <p:sldIdLst>
-    <p:sldId id="256" r:id="rId7"/>
-    <p:sldId id="257" r:id="rId8"/>
-    <p:sldId id="258" r:id="rId9"/>
-    <p:sldId id="259" r:id="rId10"/>
-    <p:sldId id="260" r:id="rId11"/>
-    <p:sldId id="261" r:id="rId12"/>
-    <p:sldId id="262" r:id="rId13"/>
-    <p:sldId id="263" r:id="rId14"/>
-    <p:sldId id="264" r:id="rId15"/>
-    <p:sldId id="265" r:id="rId16"/>
-    <p:sldId id="266" r:id="rId17"/>
-    <p:sldId id="267" r:id="rId18"/>
-    <p:sldId id="268" r:id="rId19"/>
+    <p:sldId id="256" r:id="rId2"/>
+    <p:sldId id="257" r:id="rId3"/>
+    <p:sldId id="258" r:id="rId4"/>
+    <p:sldId id="261" r:id="rId5"/>
+    <p:sldId id="262" r:id="rId6"/>
+    <p:sldId id="263" r:id="rId7"/>
+    <p:sldId id="264" r:id="rId8"/>
+    <p:sldId id="265" r:id="rId9"/>
+    <p:sldId id="266" r:id="rId10"/>
+    <p:sldId id="267" r:id="rId11"/>
+    <p:sldId id="268" r:id="rId12"/>
   </p:sldIdLst>
-  <p:sldSz cx="12191695" cy="6858000" type="screen4x3"/>
+  <p:sldSz cx="12192000" cy="6858000"/>
   <p:notesSz cx="6858000" cy="9144000"/>
   <p:defaultTextStyle>
     <a:defPPr>
@@ -116,6 +114,22 @@
       </a:defRPr>
     </a:lvl9pPr>
   </p:defaultTextStyle>
+  <p:extLst>
+    <p:ext uri="{EFAFB233-063F-42B5-8137-9DF3F51BA10A}">
+      <p15:sldGuideLst xmlns:p15="http://schemas.microsoft.com/office/powerpoint/2012/main">
+        <p15:guide id="1" orient="horz" pos="2160">
+          <p15:clr>
+            <a:srgbClr val="A4A3A4"/>
+          </p15:clr>
+        </p15:guide>
+        <p15:guide id="2" pos="2880">
+          <p15:clr>
+            <a:srgbClr val="A4A3A4"/>
+          </p15:clr>
+        </p15:guide>
+      </p15:sldGuideLst>
+    </p:ext>
+  </p:extLst>
 </p:presentation>
 </file>
 
@@ -157,10 +171,9 @@
           <a:lstStyle/>
           <a:p>
             <a:r>
-              <a:rPr lang="en-US" smtClean="0"/>
+              <a:rPr lang="en-US"/>
               <a:t>Click to edit Master title style</a:t>
             </a:r>
-            <a:endParaRPr lang="en-US"/>
           </a:p>
         </p:txBody>
       </p:sp>
@@ -276,10 +289,9 @@
           </a:lstStyle>
           <a:p>
             <a:r>
-              <a:rPr lang="en-US" smtClean="0"/>
+              <a:rPr lang="en-US"/>
               <a:t>Click to edit Master subtitle style</a:t>
             </a:r>
-            <a:endParaRPr lang="en-US"/>
           </a:p>
         </p:txBody>
       </p:sp>
@@ -300,7 +312,7 @@
           <a:p>
             <a:fld id="{5BCAD085-E8A6-8845-BD4E-CB4CCA059FC4}" type="datetimeFigureOut">
               <a:rPr lang="en-US" smtClean="0"/>
-              <a:t>1/27/13</a:t>
+              <a:t>8/24/2026</a:t>
             </a:fld>
             <a:endParaRPr lang="en-US"/>
           </a:p>
@@ -394,10 +406,9 @@
           <a:lstStyle/>
           <a:p>
             <a:r>
-              <a:rPr lang="en-US" smtClean="0"/>
+              <a:rPr lang="en-US"/>
               <a:t>Click to edit Master title style</a:t>
             </a:r>
-            <a:endParaRPr lang="en-US"/>
           </a:p>
         </p:txBody>
       </p:sp>
@@ -418,38 +429,37 @@
           <a:p>
             <a:pPr lvl="0"/>
             <a:r>
-              <a:rPr lang="en-US" smtClean="0"/>
+              <a:rPr lang="en-US"/>
               <a:t>Click to edit Master text styles</a:t>
             </a:r>
           </a:p>
           <a:p>
             <a:pPr lvl="1"/>
             <a:r>
-              <a:rPr lang="en-US" smtClean="0"/>
+              <a:rPr lang="en-US"/>
               <a:t>Second level</a:t>
             </a:r>
           </a:p>
           <a:p>
             <a:pPr lvl="2"/>
             <a:r>
-              <a:rPr lang="en-US" smtClean="0"/>
+              <a:rPr lang="en-US"/>
               <a:t>Third level</a:t>
             </a:r>
           </a:p>
           <a:p>
             <a:pPr lvl="3"/>
             <a:r>
-              <a:rPr lang="en-US" smtClean="0"/>
+              <a:rPr lang="en-US"/>
               <a:t>Fourth level</a:t>
             </a:r>
           </a:p>
           <a:p>
             <a:pPr lvl="4"/>
             <a:r>
-              <a:rPr lang="en-US" smtClean="0"/>
+              <a:rPr lang="en-US"/>
               <a:t>Fifth level</a:t>
             </a:r>
-            <a:endParaRPr lang="en-US"/>
           </a:p>
         </p:txBody>
       </p:sp>
@@ -470,7 +480,7 @@
           <a:p>
             <a:fld id="{5BCAD085-E8A6-8845-BD4E-CB4CCA059FC4}" type="datetimeFigureOut">
               <a:rPr lang="en-US" smtClean="0"/>
-              <a:t>1/27/13</a:t>
+              <a:t>8/24/2026</a:t>
             </a:fld>
             <a:endParaRPr lang="en-US"/>
           </a:p>
@@ -569,10 +579,9 @@
           <a:lstStyle/>
           <a:p>
             <a:r>
-              <a:rPr lang="en-US" smtClean="0"/>
+              <a:rPr lang="en-US"/>
               <a:t>Click to edit Master title style</a:t>
             </a:r>
-            <a:endParaRPr lang="en-US"/>
           </a:p>
         </p:txBody>
       </p:sp>
@@ -598,38 +607,37 @@
           <a:p>
             <a:pPr lvl="0"/>
             <a:r>
-              <a:rPr lang="en-US" smtClean="0"/>
+              <a:rPr lang="en-US"/>
               <a:t>Click to edit Master text styles</a:t>
             </a:r>
           </a:p>
           <a:p>
             <a:pPr lvl="1"/>
             <a:r>
-              <a:rPr lang="en-US" smtClean="0"/>
+              <a:rPr lang="en-US"/>
               <a:t>Second level</a:t>
             </a:r>
           </a:p>
           <a:p>
             <a:pPr lvl="2"/>
             <a:r>
-              <a:rPr lang="en-US" smtClean="0"/>
+              <a:rPr lang="en-US"/>
               <a:t>Third level</a:t>
             </a:r>
           </a:p>
           <a:p>
             <a:pPr lvl="3"/>
             <a:r>
-              <a:rPr lang="en-US" smtClean="0"/>
+              <a:rPr lang="en-US"/>
               <a:t>Fourth level</a:t>
             </a:r>
           </a:p>
           <a:p>
             <a:pPr lvl="4"/>
             <a:r>
-              <a:rPr lang="en-US" smtClean="0"/>
+              <a:rPr lang="en-US"/>
               <a:t>Fifth level</a:t>
             </a:r>
-            <a:endParaRPr lang="en-US"/>
           </a:p>
         </p:txBody>
       </p:sp>
@@ -650,7 +658,7 @@
           <a:p>
             <a:fld id="{5BCAD085-E8A6-8845-BD4E-CB4CCA059FC4}" type="datetimeFigureOut">
               <a:rPr lang="en-US" smtClean="0"/>
-              <a:t>1/27/13</a:t>
+              <a:t>8/24/2026</a:t>
             </a:fld>
             <a:endParaRPr lang="en-US"/>
           </a:p>
@@ -744,10 +752,9 @@
           <a:lstStyle/>
           <a:p>
             <a:r>
-              <a:rPr lang="en-US" smtClean="0"/>
+              <a:rPr lang="en-US"/>
               <a:t>Click to edit Master title style</a:t>
             </a:r>
-            <a:endParaRPr lang="en-US"/>
           </a:p>
         </p:txBody>
       </p:sp>
@@ -768,38 +775,37 @@
           <a:p>
             <a:pPr lvl="0"/>
             <a:r>
-              <a:rPr lang="en-US" smtClean="0"/>
+              <a:rPr lang="en-US"/>
               <a:t>Click to edit Master text styles</a:t>
             </a:r>
           </a:p>
           <a:p>
             <a:pPr lvl="1"/>
             <a:r>
-              <a:rPr lang="en-US" smtClean="0"/>
+              <a:rPr lang="en-US"/>
               <a:t>Second level</a:t>
             </a:r>
           </a:p>
           <a:p>
             <a:pPr lvl="2"/>
             <a:r>
-              <a:rPr lang="en-US" smtClean="0"/>
+              <a:rPr lang="en-US"/>
               <a:t>Third level</a:t>
             </a:r>
           </a:p>
           <a:p>
             <a:pPr lvl="3"/>
             <a:r>
-              <a:rPr lang="en-US" smtClean="0"/>
+              <a:rPr lang="en-US"/>
               <a:t>Fourth level</a:t>
             </a:r>
           </a:p>
           <a:p>
             <a:pPr lvl="4"/>
             <a:r>
-              <a:rPr lang="en-US" smtClean="0"/>
+              <a:rPr lang="en-US"/>
               <a:t>Fifth level</a:t>
             </a:r>
-            <a:endParaRPr lang="en-US"/>
           </a:p>
         </p:txBody>
       </p:sp>
@@ -820,7 +826,7 @@
           <a:p>
             <a:fld id="{5BCAD085-E8A6-8845-BD4E-CB4CCA059FC4}" type="datetimeFigureOut">
               <a:rPr lang="en-US" smtClean="0"/>
-              <a:t>1/27/13</a:t>
+              <a:t>8/24/2026</a:t>
             </a:fld>
             <a:endParaRPr lang="en-US"/>
           </a:p>
@@ -923,10 +929,9 @@
           </a:lstStyle>
           <a:p>
             <a:r>
-              <a:rPr lang="en-US" smtClean="0"/>
+              <a:rPr lang="en-US"/>
               <a:t>Click to edit Master title style</a:t>
             </a:r>
-            <a:endParaRPr lang="en-US"/>
           </a:p>
         </p:txBody>
       </p:sp>
@@ -1043,7 +1048,7 @@
           <a:p>
             <a:pPr lvl="0"/>
             <a:r>
-              <a:rPr lang="en-US" smtClean="0"/>
+              <a:rPr lang="en-US"/>
               <a:t>Click to edit Master text styles</a:t>
             </a:r>
           </a:p>
@@ -1066,7 +1071,7 @@
           <a:p>
             <a:fld id="{5BCAD085-E8A6-8845-BD4E-CB4CCA059FC4}" type="datetimeFigureOut">
               <a:rPr lang="en-US" smtClean="0"/>
-              <a:t>1/27/13</a:t>
+              <a:t>8/24/2026</a:t>
             </a:fld>
             <a:endParaRPr lang="en-US"/>
           </a:p>
@@ -1160,10 +1165,9 @@
           <a:lstStyle/>
           <a:p>
             <a:r>
-              <a:rPr lang="en-US" smtClean="0"/>
+              <a:rPr lang="en-US"/>
               <a:t>Click to edit Master title style</a:t>
             </a:r>
-            <a:endParaRPr lang="en-US"/>
           </a:p>
         </p:txBody>
       </p:sp>
@@ -1217,38 +1221,37 @@
           <a:p>
             <a:pPr lvl="0"/>
             <a:r>
-              <a:rPr lang="en-US" smtClean="0"/>
+              <a:rPr lang="en-US"/>
               <a:t>Click to edit Master text styles</a:t>
             </a:r>
           </a:p>
           <a:p>
             <a:pPr lvl="1"/>
             <a:r>
-              <a:rPr lang="en-US" smtClean="0"/>
+              <a:rPr lang="en-US"/>
               <a:t>Second level</a:t>
             </a:r>
           </a:p>
           <a:p>
             <a:pPr lvl="2"/>
             <a:r>
-              <a:rPr lang="en-US" smtClean="0"/>
+              <a:rPr lang="en-US"/>
               <a:t>Third level</a:t>
             </a:r>
           </a:p>
           <a:p>
             <a:pPr lvl="3"/>
             <a:r>
-              <a:rPr lang="en-US" smtClean="0"/>
+              <a:rPr lang="en-US"/>
               <a:t>Fourth level</a:t>
             </a:r>
           </a:p>
           <a:p>
             <a:pPr lvl="4"/>
             <a:r>
-              <a:rPr lang="en-US" smtClean="0"/>
+              <a:rPr lang="en-US"/>
               <a:t>Fifth level</a:t>
             </a:r>
-            <a:endParaRPr lang="en-US"/>
           </a:p>
         </p:txBody>
       </p:sp>
@@ -1302,38 +1305,37 @@
           <a:p>
             <a:pPr lvl="0"/>
             <a:r>
-              <a:rPr lang="en-US" smtClean="0"/>
+              <a:rPr lang="en-US"/>
               <a:t>Click to edit Master text styles</a:t>
             </a:r>
           </a:p>
           <a:p>
             <a:pPr lvl="1"/>
             <a:r>
-              <a:rPr lang="en-US" smtClean="0"/>
+              <a:rPr lang="en-US"/>
               <a:t>Second level</a:t>
             </a:r>
           </a:p>
           <a:p>
             <a:pPr lvl="2"/>
             <a:r>
-              <a:rPr lang="en-US" smtClean="0"/>
+              <a:rPr lang="en-US"/>
               <a:t>Third level</a:t>
             </a:r>
           </a:p>
           <a:p>
             <a:pPr lvl="3"/>
             <a:r>
-              <a:rPr lang="en-US" smtClean="0"/>
+              <a:rPr lang="en-US"/>
               <a:t>Fourth level</a:t>
             </a:r>
           </a:p>
           <a:p>
             <a:pPr lvl="4"/>
             <a:r>
-              <a:rPr lang="en-US" smtClean="0"/>
+              <a:rPr lang="en-US"/>
               <a:t>Fifth level</a:t>
             </a:r>
-            <a:endParaRPr lang="en-US"/>
           </a:p>
         </p:txBody>
       </p:sp>
@@ -1354,7 +1356,7 @@
           <a:p>
             <a:fld id="{5BCAD085-E8A6-8845-BD4E-CB4CCA059FC4}" type="datetimeFigureOut">
               <a:rPr lang="en-US" smtClean="0"/>
-              <a:t>1/27/13</a:t>
+              <a:t>8/24/2026</a:t>
             </a:fld>
             <a:endParaRPr lang="en-US"/>
           </a:p>
@@ -1452,10 +1454,9 @@
           </a:lstStyle>
           <a:p>
             <a:r>
-              <a:rPr lang="en-US" smtClean="0"/>
+              <a:rPr lang="en-US"/>
               <a:t>Click to edit Master title style</a:t>
             </a:r>
-            <a:endParaRPr lang="en-US"/>
           </a:p>
         </p:txBody>
       </p:sp>
@@ -1518,7 +1519,7 @@
           <a:p>
             <a:pPr lvl="0"/>
             <a:r>
-              <a:rPr lang="en-US" smtClean="0"/>
+              <a:rPr lang="en-US"/>
               <a:t>Click to edit Master text styles</a:t>
             </a:r>
           </a:p>
@@ -1574,38 +1575,37 @@
           <a:p>
             <a:pPr lvl="0"/>
             <a:r>
-              <a:rPr lang="en-US" smtClean="0"/>
+              <a:rPr lang="en-US"/>
               <a:t>Click to edit Master text styles</a:t>
             </a:r>
           </a:p>
           <a:p>
             <a:pPr lvl="1"/>
             <a:r>
-              <a:rPr lang="en-US" smtClean="0"/>
+              <a:rPr lang="en-US"/>
               <a:t>Second level</a:t>
             </a:r>
           </a:p>
           <a:p>
             <a:pPr lvl="2"/>
             <a:r>
-              <a:rPr lang="en-US" smtClean="0"/>
+              <a:rPr lang="en-US"/>
               <a:t>Third level</a:t>
             </a:r>
           </a:p>
           <a:p>
             <a:pPr lvl="3"/>
             <a:r>
-              <a:rPr lang="en-US" smtClean="0"/>
+              <a:rPr lang="en-US"/>
               <a:t>Fourth level</a:t>
             </a:r>
           </a:p>
           <a:p>
             <a:pPr lvl="4"/>
             <a:r>
-              <a:rPr lang="en-US" smtClean="0"/>
+              <a:rPr lang="en-US"/>
               <a:t>Fifth level</a:t>
             </a:r>
-            <a:endParaRPr lang="en-US"/>
           </a:p>
         </p:txBody>
       </p:sp>
@@ -1668,7 +1668,7 @@
           <a:p>
             <a:pPr lvl="0"/>
             <a:r>
-              <a:rPr lang="en-US" smtClean="0"/>
+              <a:rPr lang="en-US"/>
               <a:t>Click to edit Master text styles</a:t>
             </a:r>
           </a:p>
@@ -1724,38 +1724,37 @@
           <a:p>
             <a:pPr lvl="0"/>
             <a:r>
-              <a:rPr lang="en-US" smtClean="0"/>
+              <a:rPr lang="en-US"/>
               <a:t>Click to edit Master text styles</a:t>
             </a:r>
           </a:p>
           <a:p>
             <a:pPr lvl="1"/>
             <a:r>
-              <a:rPr lang="en-US" smtClean="0"/>
+              <a:rPr lang="en-US"/>
               <a:t>Second level</a:t>
             </a:r>
           </a:p>
           <a:p>
             <a:pPr lvl="2"/>
             <a:r>
-              <a:rPr lang="en-US" smtClean="0"/>
+              <a:rPr lang="en-US"/>
               <a:t>Third level</a:t>
             </a:r>
           </a:p>
           <a:p>
             <a:pPr lvl="3"/>
             <a:r>
-              <a:rPr lang="en-US" smtClean="0"/>
+              <a:rPr lang="en-US"/>
               <a:t>Fourth level</a:t>
             </a:r>
           </a:p>
           <a:p>
             <a:pPr lvl="4"/>
             <a:r>
-              <a:rPr lang="en-US" smtClean="0"/>
+              <a:rPr lang="en-US"/>
               <a:t>Fifth level</a:t>
             </a:r>
-            <a:endParaRPr lang="en-US"/>
           </a:p>
         </p:txBody>
       </p:sp>
@@ -1776,7 +1775,7 @@
           <a:p>
             <a:fld id="{5BCAD085-E8A6-8845-BD4E-CB4CCA059FC4}" type="datetimeFigureOut">
               <a:rPr lang="en-US" smtClean="0"/>
-              <a:t>1/27/13</a:t>
+              <a:t>8/24/2026</a:t>
             </a:fld>
             <a:endParaRPr lang="en-US"/>
           </a:p>
@@ -1870,10 +1869,9 @@
           <a:lstStyle/>
           <a:p>
             <a:r>
-              <a:rPr lang="en-US" smtClean="0"/>
+              <a:rPr lang="en-US"/>
               <a:t>Click to edit Master title style</a:t>
             </a:r>
-            <a:endParaRPr lang="en-US"/>
           </a:p>
         </p:txBody>
       </p:sp>
@@ -1894,7 +1892,7 @@
           <a:p>
             <a:fld id="{5BCAD085-E8A6-8845-BD4E-CB4CCA059FC4}" type="datetimeFigureOut">
               <a:rPr lang="en-US" smtClean="0"/>
-              <a:t>1/27/13</a:t>
+              <a:t>8/24/2026</a:t>
             </a:fld>
             <a:endParaRPr lang="en-US"/>
           </a:p>
@@ -1989,7 +1987,7 @@
           <a:p>
             <a:fld id="{5BCAD085-E8A6-8845-BD4E-CB4CCA059FC4}" type="datetimeFigureOut">
               <a:rPr lang="en-US" smtClean="0"/>
-              <a:t>1/27/13</a:t>
+              <a:t>8/24/2026</a:t>
             </a:fld>
             <a:endParaRPr lang="en-US"/>
           </a:p>
@@ -2092,10 +2090,9 @@
           </a:lstStyle>
           <a:p>
             <a:r>
-              <a:rPr lang="en-US" smtClean="0"/>
+              <a:rPr lang="en-US"/>
               <a:t>Click to edit Master title style</a:t>
             </a:r>
-            <a:endParaRPr lang="en-US"/>
           </a:p>
         </p:txBody>
       </p:sp>
@@ -2149,38 +2146,37 @@
           <a:p>
             <a:pPr lvl="0"/>
             <a:r>
-              <a:rPr lang="en-US" smtClean="0"/>
+              <a:rPr lang="en-US"/>
               <a:t>Click to edit Master text styles</a:t>
             </a:r>
           </a:p>
           <a:p>
             <a:pPr lvl="1"/>
             <a:r>
-              <a:rPr lang="en-US" smtClean="0"/>
+              <a:rPr lang="en-US"/>
               <a:t>Second level</a:t>
             </a:r>
           </a:p>
           <a:p>
             <a:pPr lvl="2"/>
             <a:r>
-              <a:rPr lang="en-US" smtClean="0"/>
+              <a:rPr lang="en-US"/>
               <a:t>Third level</a:t>
             </a:r>
           </a:p>
           <a:p>
             <a:pPr lvl="3"/>
             <a:r>
-              <a:rPr lang="en-US" smtClean="0"/>
+              <a:rPr lang="en-US"/>
               <a:t>Fourth level</a:t>
             </a:r>
           </a:p>
           <a:p>
             <a:pPr lvl="4"/>
             <a:r>
-              <a:rPr lang="en-US" smtClean="0"/>
+              <a:rPr lang="en-US"/>
               <a:t>Fifth level</a:t>
             </a:r>
-            <a:endParaRPr lang="en-US"/>
           </a:p>
         </p:txBody>
       </p:sp>
@@ -2243,7 +2239,7 @@
           <a:p>
             <a:pPr lvl="0"/>
             <a:r>
-              <a:rPr lang="en-US" smtClean="0"/>
+              <a:rPr lang="en-US"/>
               <a:t>Click to edit Master text styles</a:t>
             </a:r>
           </a:p>
@@ -2266,7 +2262,7 @@
           <a:p>
             <a:fld id="{5BCAD085-E8A6-8845-BD4E-CB4CCA059FC4}" type="datetimeFigureOut">
               <a:rPr lang="en-US" smtClean="0"/>
-              <a:t>1/27/13</a:t>
+              <a:t>8/24/2026</a:t>
             </a:fld>
             <a:endParaRPr lang="en-US"/>
           </a:p>
@@ -2369,10 +2365,9 @@
           </a:lstStyle>
           <a:p>
             <a:r>
-              <a:rPr lang="en-US" smtClean="0"/>
+              <a:rPr lang="en-US"/>
               <a:t>Click to edit Master title style</a:t>
             </a:r>
-            <a:endParaRPr lang="en-US"/>
           </a:p>
         </p:txBody>
       </p:sp>
@@ -2496,7 +2491,7 @@
           <a:p>
             <a:pPr lvl="0"/>
             <a:r>
-              <a:rPr lang="en-US" smtClean="0"/>
+              <a:rPr lang="en-US"/>
               <a:t>Click to edit Master text styles</a:t>
             </a:r>
           </a:p>
@@ -2519,7 +2514,7 @@
           <a:p>
             <a:fld id="{5BCAD085-E8A6-8845-BD4E-CB4CCA059FC4}" type="datetimeFigureOut">
               <a:rPr lang="en-US" smtClean="0"/>
-              <a:t>1/27/13</a:t>
+              <a:t>8/24/2026</a:t>
             </a:fld>
             <a:endParaRPr lang="en-US"/>
           </a:p>
@@ -2628,10 +2623,9 @@
           <a:lstStyle/>
           <a:p>
             <a:r>
-              <a:rPr lang="en-US" smtClean="0"/>
+              <a:rPr lang="en-US"/>
               <a:t>Click to edit Master title style</a:t>
             </a:r>
-            <a:endParaRPr lang="en-US"/>
           </a:p>
         </p:txBody>
       </p:sp>
@@ -2662,38 +2656,37 @@
           <a:p>
             <a:pPr lvl="0"/>
             <a:r>
-              <a:rPr lang="en-US" smtClean="0"/>
+              <a:rPr lang="en-US"/>
               <a:t>Click to edit Master text styles</a:t>
             </a:r>
           </a:p>
           <a:p>
             <a:pPr lvl="1"/>
             <a:r>
-              <a:rPr lang="en-US" smtClean="0"/>
+              <a:rPr lang="en-US"/>
               <a:t>Second level</a:t>
             </a:r>
           </a:p>
           <a:p>
             <a:pPr lvl="2"/>
             <a:r>
-              <a:rPr lang="en-US" smtClean="0"/>
+              <a:rPr lang="en-US"/>
               <a:t>Third level</a:t>
             </a:r>
           </a:p>
           <a:p>
             <a:pPr lvl="3"/>
             <a:r>
-              <a:rPr lang="en-US" smtClean="0"/>
+              <a:rPr lang="en-US"/>
               <a:t>Fourth level</a:t>
             </a:r>
           </a:p>
           <a:p>
             <a:pPr lvl="4"/>
             <a:r>
-              <a:rPr lang="en-US" smtClean="0"/>
+              <a:rPr lang="en-US"/>
               <a:t>Fifth level</a:t>
             </a:r>
-            <a:endParaRPr lang="en-US"/>
           </a:p>
         </p:txBody>
       </p:sp>
@@ -2732,7 +2725,7 @@
           <a:p>
             <a:fld id="{5BCAD085-E8A6-8845-BD4E-CB4CCA059FC4}" type="datetimeFigureOut">
               <a:rPr lang="en-US" smtClean="0"/>
-              <a:t>1/27/13</a:t>
+              <a:t>8/24/2026</a:t>
             </a:fld>
             <a:endParaRPr lang="en-US"/>
           </a:p>
@@ -3091,7 +3084,7 @@
 </file>
 
 <file path=ppt/slides/slide1.xml><?xml version="1.0" encoding="utf-8"?>
-<p:sld xmlns:a="http://schemas.openxmlformats.org/drawingml/2006/main" xmlns:p="http://schemas.openxmlformats.org/presentationml/2006/main" xmlns:r="http://schemas.openxmlformats.org/officeDocument/2006/relationships">
+<p:sld xmlns:a="http://schemas.openxmlformats.org/drawingml/2006/main" xmlns:r="http://schemas.openxmlformats.org/officeDocument/2006/relationships" xmlns:p="http://schemas.openxmlformats.org/presentationml/2006/main">
   <p:cSld>
     <p:spTree>
       <p:nvGrpSpPr>
@@ -3099,7 +3092,14 @@
         <p:cNvGrpSpPr/>
         <p:nvPr/>
       </p:nvGrpSpPr>
-      <p:grpSpPr/>
+      <p:grpSpPr>
+        <a:xfrm>
+          <a:off x="0" y="0"/>
+          <a:ext cx="0" cy="0"/>
+          <a:chOff x="0" y="0"/>
+          <a:chExt cx="0" cy="0"/>
+        </a:xfrm>
+      </p:grpSpPr>
       <p:sp>
         <p:nvSpPr>
           <p:cNvPr id="2" name="Rectangle 1"/>
@@ -3108,7 +3108,7 @@
         </p:nvSpPr>
         <p:spPr>
           <a:xfrm>
-            <a:off x="0" y="0"/>
+            <a:off x="305" y="18288"/>
             <a:ext cx="12191695" cy="6858000"/>
           </a:xfrm>
           <a:prstGeom prst="rect">
@@ -3140,6 +3140,7 @@
           <a:lstStyle/>
           <a:p>
             <a:pPr algn="ctr"/>
+            <a:endParaRPr/>
           </a:p>
         </p:txBody>
       </p:sp>
@@ -3295,24 +3296,7 @@
                 </a:solidFill>
               </a:defRPr>
             </a:pPr>
-            <a:r>
-              <a:t>CORE STACK</a:t>
-            </a:r>
-          </a:p>
-          <a:p>
-            <a:pPr>
-              <a:spcBef>
-                <a:spcPts val="400"/>
-              </a:spcBef>
-              <a:defRPr sz="1300" b="1">
-                <a:solidFill>
-                  <a:srgbClr val="FFFFFF"/>
-                </a:solidFill>
-              </a:defRPr>
-            </a:pPr>
-            <a:r>
-              <a:t>Node / Express / SQLite</a:t>
-            </a:r>
+            <a:endParaRPr dirty="0"/>
           </a:p>
         </p:txBody>
       </p:sp>
@@ -3364,24 +3348,7 @@
                 </a:solidFill>
               </a:defRPr>
             </a:pPr>
-            <a:r>
-              <a:t>FRONTEND</a:t>
-            </a:r>
-          </a:p>
-          <a:p>
-            <a:pPr>
-              <a:spcBef>
-                <a:spcPts val="400"/>
-              </a:spcBef>
-              <a:defRPr sz="1300" b="1">
-                <a:solidFill>
-                  <a:srgbClr val="FFFFFF"/>
-                </a:solidFill>
-              </a:defRPr>
-            </a:pPr>
-            <a:r>
-              <a:t>React 18 + Vite</a:t>
-            </a:r>
+            <a:endParaRPr dirty="0"/>
           </a:p>
         </p:txBody>
       </p:sp>
@@ -3433,24 +3400,7 @@
                 </a:solidFill>
               </a:defRPr>
             </a:pPr>
-            <a:r>
-              <a:t>CATEGORIES</a:t>
-            </a:r>
-          </a:p>
-          <a:p>
-            <a:pPr>
-              <a:spcBef>
-                <a:spcPts val="400"/>
-              </a:spcBef>
-              <a:defRPr sz="1300" b="1">
-                <a:solidFill>
-                  <a:srgbClr val="FFFFFF"/>
-                </a:solidFill>
-              </a:defRPr>
-            </a:pPr>
-            <a:r>
-              <a:t>6 Food Groups</a:t>
-            </a:r>
+            <a:endParaRPr dirty="0"/>
           </a:p>
         </p:txBody>
       </p:sp>
@@ -3502,24 +3452,7 @@
                 </a:solidFill>
               </a:defRPr>
             </a:pPr>
-            <a:r>
-              <a:t>STATUS</a:t>
-            </a:r>
-          </a:p>
-          <a:p>
-            <a:pPr>
-              <a:spcBef>
-                <a:spcPts val="400"/>
-              </a:spcBef>
-              <a:defRPr sz="1300" b="1">
-                <a:solidFill>
-                  <a:srgbClr val="FFFFFF"/>
-                </a:solidFill>
-              </a:defRPr>
-            </a:pPr>
-            <a:r>
-              <a:t>Fully Built &amp; Live</a:t>
-            </a:r>
+            <a:endParaRPr dirty="0"/>
           </a:p>
         </p:txBody>
       </p:sp>
@@ -3568,7 +3501,7 @@
 </file>
 
 <file path=ppt/slides/slide10.xml><?xml version="1.0" encoding="utf-8"?>
-<p:sld xmlns:a="http://schemas.openxmlformats.org/drawingml/2006/main" xmlns:p="http://schemas.openxmlformats.org/presentationml/2006/main" xmlns:r="http://schemas.openxmlformats.org/officeDocument/2006/relationships">
+<p:sld xmlns:a="http://schemas.openxmlformats.org/drawingml/2006/main" xmlns:r="http://schemas.openxmlformats.org/officeDocument/2006/relationships" xmlns:p="http://schemas.openxmlformats.org/presentationml/2006/main">
   <p:cSld>
     <p:spTree>
       <p:nvGrpSpPr>
@@ -3576,7 +3509,14 @@
         <p:cNvGrpSpPr/>
         <p:nvPr/>
       </p:nvGrpSpPr>
-      <p:grpSpPr/>
+      <p:grpSpPr>
+        <a:xfrm>
+          <a:off x="0" y="0"/>
+          <a:ext cx="0" cy="0"/>
+          <a:chOff x="0" y="0"/>
+          <a:chExt cx="0" cy="0"/>
+        </a:xfrm>
+      </p:grpSpPr>
       <p:sp>
         <p:nvSpPr>
           <p:cNvPr id="2" name="Rectangle 1"/>
@@ -3619,6 +3559,7 @@
           <a:lstStyle/>
           <a:p>
             <a:pPr algn="ctr"/>
+            <a:endParaRPr/>
           </a:p>
         </p:txBody>
       </p:sp>
@@ -3662,6 +3603,7 @@
           <a:lstStyle/>
           <a:p>
             <a:pPr algn="ctr"/>
+            <a:endParaRPr/>
           </a:p>
         </p:txBody>
       </p:sp>
@@ -3732,7 +3674,7 @@
               </a:defRPr>
             </a:pPr>
             <a:r>
-              <a:t>9. Real-Time Telemetry &amp; 5 Status Badges</a:t>
+              <a:t>11. Core Modules &amp; Code Implementation Breakdown</a:t>
             </a:r>
           </a:p>
         </p:txBody>
@@ -3745,8 +3687,8 @@
         </p:nvSpPr>
         <p:spPr>
           <a:xfrm>
-            <a:off x="914400" y="1280160"/>
-            <a:ext cx="10332720" cy="868680"/>
+            <a:off x="731520" y="1280160"/>
+            <a:ext cx="5212080" cy="4892040"/>
           </a:xfrm>
           <a:prstGeom prst="roundRect">
             <a:avLst/>
@@ -3754,9 +3696,9 @@
           <a:solidFill>
             <a:srgbClr val="FFFFFF"/>
           </a:solidFill>
-          <a:ln w="19050">
+          <a:ln w="12700">
             <a:solidFill>
-              <a:srgbClr val="10B981"/>
+              <a:srgbClr val="CBD5E1"/>
             </a:solidFill>
           </a:ln>
         </p:spPr>
@@ -3779,25 +3721,26 @@
           <a:lstStyle/>
           <a:p>
             <a:pPr algn="ctr"/>
-          </a:p>
-        </p:txBody>
-      </p:sp>
-      <p:sp>
-        <p:nvSpPr>
-          <p:cNvPr id="7" name="Rounded Rectangle 6"/>
+            <a:endParaRPr/>
+          </a:p>
+        </p:txBody>
+      </p:sp>
+      <p:sp>
+        <p:nvSpPr>
+          <p:cNvPr id="7" name="Rectangle 6"/>
           <p:cNvSpPr/>
           <p:nvPr/>
         </p:nvSpPr>
         <p:spPr>
           <a:xfrm>
-            <a:off x="1051560" y="1417320"/>
-            <a:ext cx="320040" cy="594360"/>
-          </a:xfrm>
-          <a:prstGeom prst="roundRect">
-            <a:avLst/>
-          </a:prstGeom>
-          <a:solidFill>
-            <a:srgbClr val="10B981"/>
+            <a:off x="731520" y="1280160"/>
+            <a:ext cx="5212080" cy="384048"/>
+          </a:xfrm>
+          <a:prstGeom prst="rect">
+            <a:avLst/>
+          </a:prstGeom>
+          <a:solidFill>
+            <a:srgbClr val="2563EB"/>
           </a:solidFill>
           <a:ln>
             <a:noFill/>
@@ -3821,7 +3764,16 @@
           <a:bodyPr rtlCol="0" anchor="ctr"/>
           <a:lstStyle/>
           <a:p>
-            <a:pPr algn="ctr"/>
+            <a:pPr algn="ctr">
+              <a:defRPr sz="1200" b="1">
+                <a:solidFill>
+                  <a:srgbClr val="FFFFFF"/>
+                </a:solidFill>
+              </a:defRPr>
+            </a:pPr>
+            <a:r>
+              <a:t>Backend Modules (Node / Express / SQLite)</a:t>
+            </a:r>
           </a:p>
         </p:txBody>
       </p:sp>
@@ -3833,8 +3785,8 @@
         </p:nvSpPr>
         <p:spPr>
           <a:xfrm>
-            <a:off x="1508760" y="1325880"/>
-            <a:ext cx="9601200" cy="777240"/>
+            <a:off x="868680" y="1783080"/>
+            <a:ext cx="4937760" cy="4206240"/>
           </a:xfrm>
           <a:prstGeom prst="rect">
             <a:avLst/>
@@ -3848,14 +3800,17 @@
           <a:lstStyle/>
           <a:p>
             <a:pPr>
-              <a:defRPr sz="1100" b="1">
-                <a:solidFill>
-                  <a:srgbClr val="10B981"/>
-                </a:solidFill>
-              </a:defRPr>
-            </a:pPr>
-            <a:r>
-              <a:t>SUFFICIENT (Green Badge)</a:t>
+              <a:spcBef>
+                <a:spcPts val="0"/>
+              </a:spcBef>
+              <a:defRPr sz="1050" b="1">
+                <a:solidFill>
+                  <a:srgbClr val="2563EB"/>
+                </a:solidFill>
+              </a:defRPr>
+            </a:pPr>
+            <a:r>
+              <a:t>• server.js</a:t>
             </a:r>
           </a:p>
           <a:p>
@@ -3870,7 +3825,67 @@
               </a:defRPr>
             </a:pPr>
             <a:r>
-              <a:t>Trigger: current_stock &gt;= min_threshold &amp; No Expiring Batches   •   Healthy stock level; no immediate action required.</a:t>
+              <a:t>Express REST server hosting /api/categories, /api/items, /api/transactions/in, /api/transactions/out, /api/dashboard/summary, and /api/alerts/*.</a:t>
+            </a:r>
+          </a:p>
+          <a:p>
+            <a:pPr>
+              <a:spcBef>
+                <a:spcPts val="600"/>
+              </a:spcBef>
+              <a:defRPr sz="1050" b="1">
+                <a:solidFill>
+                  <a:srgbClr val="2563EB"/>
+                </a:solidFill>
+              </a:defRPr>
+            </a:pPr>
+            <a:r>
+              <a:t>• db.js</a:t>
+            </a:r>
+          </a:p>
+          <a:p>
+            <a:pPr>
+              <a:spcBef>
+                <a:spcPts val="200"/>
+              </a:spcBef>
+              <a:defRPr sz="950">
+                <a:solidFill>
+                  <a:srgbClr val="0F172A"/>
+                </a:solidFill>
+              </a:defRPr>
+            </a:pPr>
+            <a:r>
+              <a:t>SQLite database connection manager with async run(), get(), all() helper wrappers and auto-initialization.</a:t>
+            </a:r>
+          </a:p>
+          <a:p>
+            <a:pPr>
+              <a:spcBef>
+                <a:spcPts val="600"/>
+              </a:spcBef>
+              <a:defRPr sz="1050" b="1">
+                <a:solidFill>
+                  <a:srgbClr val="2563EB"/>
+                </a:solidFill>
+              </a:defRPr>
+            </a:pPr>
+            <a:r>
+              <a:t>• schema.sql &amp; seed.sql</a:t>
+            </a:r>
+          </a:p>
+          <a:p>
+            <a:pPr>
+              <a:spcBef>
+                <a:spcPts val="200"/>
+              </a:spcBef>
+              <a:defRPr sz="950">
+                <a:solidFill>
+                  <a:srgbClr val="0F172A"/>
+                </a:solidFill>
+              </a:defRPr>
+            </a:pPr>
+            <a:r>
+              <a:t>DDL script defining categories, items, and inventory_transactions with realistic sample items.</a:t>
             </a:r>
           </a:p>
         </p:txBody>
@@ -3883,8 +3898,8 @@
         </p:nvSpPr>
         <p:spPr>
           <a:xfrm>
-            <a:off x="914400" y="2240280"/>
-            <a:ext cx="10332720" cy="868680"/>
+            <a:off x="6217920" y="1280160"/>
+            <a:ext cx="5212080" cy="4892040"/>
           </a:xfrm>
           <a:prstGeom prst="roundRect">
             <a:avLst/>
@@ -3892,9 +3907,9 @@
           <a:solidFill>
             <a:srgbClr val="FFFFFF"/>
           </a:solidFill>
-          <a:ln w="19050">
+          <a:ln w="12700">
             <a:solidFill>
-              <a:srgbClr val="EAB308"/>
+              <a:srgbClr val="CBD5E1"/>
             </a:solidFill>
           </a:ln>
         </p:spPr>
@@ -3917,25 +3932,26 @@
           <a:lstStyle/>
           <a:p>
             <a:pPr algn="ctr"/>
-          </a:p>
-        </p:txBody>
-      </p:sp>
-      <p:sp>
-        <p:nvSpPr>
-          <p:cNvPr id="10" name="Rounded Rectangle 9"/>
+            <a:endParaRPr/>
+          </a:p>
+        </p:txBody>
+      </p:sp>
+      <p:sp>
+        <p:nvSpPr>
+          <p:cNvPr id="10" name="Rectangle 9"/>
           <p:cNvSpPr/>
           <p:nvPr/>
         </p:nvSpPr>
         <p:spPr>
           <a:xfrm>
-            <a:off x="1051560" y="2377440"/>
-            <a:ext cx="320040" cy="594360"/>
-          </a:xfrm>
-          <a:prstGeom prst="roundRect">
-            <a:avLst/>
-          </a:prstGeom>
-          <a:solidFill>
-            <a:srgbClr val="EAB308"/>
+            <a:off x="6217920" y="1280160"/>
+            <a:ext cx="5212080" cy="384048"/>
+          </a:xfrm>
+          <a:prstGeom prst="rect">
+            <a:avLst/>
+          </a:prstGeom>
+          <a:solidFill>
+            <a:srgbClr val="1E40AF"/>
           </a:solidFill>
           <a:ln>
             <a:noFill/>
@@ -3959,7 +3975,16 @@
           <a:bodyPr rtlCol="0" anchor="ctr"/>
           <a:lstStyle/>
           <a:p>
-            <a:pPr algn="ctr"/>
+            <a:pPr algn="ctr">
+              <a:defRPr sz="1200" b="1">
+                <a:solidFill>
+                  <a:srgbClr val="FFFFFF"/>
+                </a:solidFill>
+              </a:defRPr>
+            </a:pPr>
+            <a:r>
+              <a:t>Frontend Modules (React 18 + Vite)</a:t>
+            </a:r>
           </a:p>
         </p:txBody>
       </p:sp>
@@ -3971,8 +3996,8 @@
         </p:nvSpPr>
         <p:spPr>
           <a:xfrm>
-            <a:off x="1508760" y="2286000"/>
-            <a:ext cx="9601200" cy="777240"/>
+            <a:off x="6355080" y="1783080"/>
+            <a:ext cx="4937760" cy="4206240"/>
           </a:xfrm>
           <a:prstGeom prst="rect">
             <a:avLst/>
@@ -3986,14 +4011,17 @@
           <a:lstStyle/>
           <a:p>
             <a:pPr>
-              <a:defRPr sz="1100" b="1">
-                <a:solidFill>
-                  <a:srgbClr val="EAB308"/>
-                </a:solidFill>
-              </a:defRPr>
-            </a:pPr>
-            <a:r>
-              <a:t>LOW_STOCK (Yellow Badge)</a:t>
+              <a:spcBef>
+                <a:spcPts val="0"/>
+              </a:spcBef>
+              <a:defRPr sz="1050" b="1">
+                <a:solidFill>
+                  <a:srgbClr val="1E40AF"/>
+                </a:solidFill>
+              </a:defRPr>
+            </a:pPr>
+            <a:r>
+              <a:t>• App.jsx</a:t>
             </a:r>
           </a:p>
           <a:p>
@@ -4008,130 +4036,22 @@
               </a:defRPr>
             </a:pPr>
             <a:r>
-              <a:t>Trigger: 0 &lt; current_stock &lt; min_threshold   •   Inventory running low; automatically added to Reorder Shopping List.</a:t>
-            </a:r>
-          </a:p>
-        </p:txBody>
-      </p:sp>
-      <p:sp>
-        <p:nvSpPr>
-          <p:cNvPr id="12" name="Rounded Rectangle 11"/>
-          <p:cNvSpPr/>
-          <p:nvPr/>
-        </p:nvSpPr>
-        <p:spPr>
-          <a:xfrm>
-            <a:off x="914400" y="3200400"/>
-            <a:ext cx="10332720" cy="868680"/>
-          </a:xfrm>
-          <a:prstGeom prst="roundRect">
-            <a:avLst/>
-          </a:prstGeom>
-          <a:solidFill>
-            <a:srgbClr val="FFFFFF"/>
-          </a:solidFill>
-          <a:ln w="19050">
-            <a:solidFill>
-              <a:srgbClr val="F59E0B"/>
-            </a:solidFill>
-          </a:ln>
-        </p:spPr>
-        <p:style>
-          <a:lnRef idx="1">
-            <a:schemeClr val="accent1"/>
-          </a:lnRef>
-          <a:fillRef idx="3">
-            <a:schemeClr val="accent1"/>
-          </a:fillRef>
-          <a:effectRef idx="2">
-            <a:schemeClr val="accent1"/>
-          </a:effectRef>
-          <a:fontRef idx="minor">
-            <a:schemeClr val="lt1"/>
-          </a:fontRef>
-        </p:style>
-        <p:txBody>
-          <a:bodyPr rtlCol="0" anchor="ctr"/>
-          <a:lstStyle/>
-          <a:p>
-            <a:pPr algn="ctr"/>
-          </a:p>
-        </p:txBody>
-      </p:sp>
-      <p:sp>
-        <p:nvSpPr>
-          <p:cNvPr id="13" name="Rounded Rectangle 12"/>
-          <p:cNvSpPr/>
-          <p:nvPr/>
-        </p:nvSpPr>
-        <p:spPr>
-          <a:xfrm>
-            <a:off x="1051560" y="3337560"/>
-            <a:ext cx="320040" cy="594360"/>
-          </a:xfrm>
-          <a:prstGeom prst="roundRect">
-            <a:avLst/>
-          </a:prstGeom>
-          <a:solidFill>
-            <a:srgbClr val="F59E0B"/>
-          </a:solidFill>
-          <a:ln>
-            <a:noFill/>
-          </a:ln>
-        </p:spPr>
-        <p:style>
-          <a:lnRef idx="1">
-            <a:schemeClr val="accent1"/>
-          </a:lnRef>
-          <a:fillRef idx="3">
-            <a:schemeClr val="accent1"/>
-          </a:fillRef>
-          <a:effectRef idx="2">
-            <a:schemeClr val="accent1"/>
-          </a:effectRef>
-          <a:fontRef idx="minor">
-            <a:schemeClr val="lt1"/>
-          </a:fontRef>
-        </p:style>
-        <p:txBody>
-          <a:bodyPr rtlCol="0" anchor="ctr"/>
-          <a:lstStyle/>
-          <a:p>
-            <a:pPr algn="ctr"/>
-          </a:p>
-        </p:txBody>
-      </p:sp>
-      <p:sp>
-        <p:nvSpPr>
-          <p:cNvPr id="14" name="TextBox 13"/>
-          <p:cNvSpPr txBox="1"/>
-          <p:nvPr/>
-        </p:nvSpPr>
-        <p:spPr>
-          <a:xfrm>
-            <a:off x="1508760" y="3246120"/>
-            <a:ext cx="9601200" cy="777240"/>
-          </a:xfrm>
-          <a:prstGeom prst="rect">
-            <a:avLst/>
-          </a:prstGeom>
-          <a:noFill/>
-        </p:spPr>
-        <p:txBody>
-          <a:bodyPr wrap="square">
-            <a:spAutoFit/>
-          </a:bodyPr>
-          <a:lstStyle/>
-          <a:p>
-            <a:pPr>
-              <a:defRPr sz="1100" b="1">
-                <a:solidFill>
-                  <a:srgbClr val="F59E0B"/>
-                </a:solidFill>
-              </a:defRPr>
-            </a:pPr>
-            <a:r>
-              <a:t>EXPIRING_SOON (Orange Badge)</a:t>
+              <a:t>Root orchestrator managing data fetch, search/category state, alert banners, and modal visibility.</a:t>
+            </a:r>
+          </a:p>
+          <a:p>
+            <a:pPr>
+              <a:spcBef>
+                <a:spcPts val="600"/>
+              </a:spcBef>
+              <a:defRPr sz="1050" b="1">
+                <a:solidFill>
+                  <a:srgbClr val="1E40AF"/>
+                </a:solidFill>
+              </a:defRPr>
+            </a:pPr>
+            <a:r>
+              <a:t>• StockInModal.jsx / StockOutModal.jsx</a:t>
             </a:r>
           </a:p>
           <a:p>
@@ -4146,130 +4066,22 @@
               </a:defRPr>
             </a:pPr>
             <a:r>
-              <a:t>Trigger: 0 &lt; (expiration_date - TODAY) &lt;= 3 Days   •   Batch near expiration; highlighted in top banner to prioritize usage.</a:t>
-            </a:r>
-          </a:p>
-        </p:txBody>
-      </p:sp>
-      <p:sp>
-        <p:nvSpPr>
-          <p:cNvPr id="15" name="Rounded Rectangle 14"/>
-          <p:cNvSpPr/>
-          <p:nvPr/>
-        </p:nvSpPr>
-        <p:spPr>
-          <a:xfrm>
-            <a:off x="914400" y="4160520"/>
-            <a:ext cx="10332720" cy="868680"/>
-          </a:xfrm>
-          <a:prstGeom prst="roundRect">
-            <a:avLst/>
-          </a:prstGeom>
-          <a:solidFill>
-            <a:srgbClr val="FFFFFF"/>
-          </a:solidFill>
-          <a:ln w="19050">
-            <a:solidFill>
-              <a:srgbClr val="EF4444"/>
-            </a:solidFill>
-          </a:ln>
-        </p:spPr>
-        <p:style>
-          <a:lnRef idx="1">
-            <a:schemeClr val="accent1"/>
-          </a:lnRef>
-          <a:fillRef idx="3">
-            <a:schemeClr val="accent1"/>
-          </a:fillRef>
-          <a:effectRef idx="2">
-            <a:schemeClr val="accent1"/>
-          </a:effectRef>
-          <a:fontRef idx="minor">
-            <a:schemeClr val="lt1"/>
-          </a:fontRef>
-        </p:style>
-        <p:txBody>
-          <a:bodyPr rtlCol="0" anchor="ctr"/>
-          <a:lstStyle/>
-          <a:p>
-            <a:pPr algn="ctr"/>
-          </a:p>
-        </p:txBody>
-      </p:sp>
-      <p:sp>
-        <p:nvSpPr>
-          <p:cNvPr id="16" name="Rounded Rectangle 15"/>
-          <p:cNvSpPr/>
-          <p:nvPr/>
-        </p:nvSpPr>
-        <p:spPr>
-          <a:xfrm>
-            <a:off x="1051560" y="4297680"/>
-            <a:ext cx="320040" cy="594360"/>
-          </a:xfrm>
-          <a:prstGeom prst="roundRect">
-            <a:avLst/>
-          </a:prstGeom>
-          <a:solidFill>
-            <a:srgbClr val="EF4444"/>
-          </a:solidFill>
-          <a:ln>
-            <a:noFill/>
-          </a:ln>
-        </p:spPr>
-        <p:style>
-          <a:lnRef idx="1">
-            <a:schemeClr val="accent1"/>
-          </a:lnRef>
-          <a:fillRef idx="3">
-            <a:schemeClr val="accent1"/>
-          </a:fillRef>
-          <a:effectRef idx="2">
-            <a:schemeClr val="accent1"/>
-          </a:effectRef>
-          <a:fontRef idx="minor">
-            <a:schemeClr val="lt1"/>
-          </a:fontRef>
-        </p:style>
-        <p:txBody>
-          <a:bodyPr rtlCol="0" anchor="ctr"/>
-          <a:lstStyle/>
-          <a:p>
-            <a:pPr algn="ctr"/>
-          </a:p>
-        </p:txBody>
-      </p:sp>
-      <p:sp>
-        <p:nvSpPr>
-          <p:cNvPr id="17" name="TextBox 16"/>
-          <p:cNvSpPr txBox="1"/>
-          <p:nvPr/>
-        </p:nvSpPr>
-        <p:spPr>
-          <a:xfrm>
-            <a:off x="1508760" y="4206240"/>
-            <a:ext cx="9601200" cy="777240"/>
-          </a:xfrm>
-          <a:prstGeom prst="rect">
-            <a:avLst/>
-          </a:prstGeom>
-          <a:noFill/>
-        </p:spPr>
-        <p:txBody>
-          <a:bodyPr wrap="square">
-            <a:spAutoFit/>
-          </a:bodyPr>
-          <a:lstStyle/>
-          <a:p>
-            <a:pPr>
-              <a:defRPr sz="1100" b="1">
-                <a:solidFill>
-                  <a:srgbClr val="EF4444"/>
-                </a:solidFill>
-              </a:defRPr>
-            </a:pPr>
-            <a:r>
-              <a:t>EXPIRED (Red Badge)</a:t>
+              <a:t>Enhanced modals featuring live category dropdown filtering and instant material search.</a:t>
+            </a:r>
+          </a:p>
+          <a:p>
+            <a:pPr>
+              <a:spcBef>
+                <a:spcPts val="600"/>
+              </a:spcBef>
+              <a:defRPr sz="1050" b="1">
+                <a:solidFill>
+                  <a:srgbClr val="1E40AF"/>
+                </a:solidFill>
+              </a:defRPr>
+            </a:pPr>
+            <a:r>
+              <a:t>• InventoryTable.jsx &amp; CategoryGrid.jsx</a:t>
             </a:r>
           </a:p>
           <a:p>
@@ -4284,130 +4096,22 @@
               </a:defRPr>
             </a:pPr>
             <a:r>
-              <a:t>Trigger: Positive batch with expiration_date &lt; TODAY   •   Batch past expiration; flagged for immediate inspection or discard.</a:t>
-            </a:r>
-          </a:p>
-        </p:txBody>
-      </p:sp>
-      <p:sp>
-        <p:nvSpPr>
-          <p:cNvPr id="18" name="Rounded Rectangle 17"/>
-          <p:cNvSpPr/>
-          <p:nvPr/>
-        </p:nvSpPr>
-        <p:spPr>
-          <a:xfrm>
-            <a:off x="914400" y="5120640"/>
-            <a:ext cx="10332720" cy="868680"/>
-          </a:xfrm>
-          <a:prstGeom prst="roundRect">
-            <a:avLst/>
-          </a:prstGeom>
-          <a:solidFill>
-            <a:srgbClr val="FFFFFF"/>
-          </a:solidFill>
-          <a:ln w="19050">
-            <a:solidFill>
-              <a:srgbClr val="0F172A"/>
-            </a:solidFill>
-          </a:ln>
-        </p:spPr>
-        <p:style>
-          <a:lnRef idx="1">
-            <a:schemeClr val="accent1"/>
-          </a:lnRef>
-          <a:fillRef idx="3">
-            <a:schemeClr val="accent1"/>
-          </a:fillRef>
-          <a:effectRef idx="2">
-            <a:schemeClr val="accent1"/>
-          </a:effectRef>
-          <a:fontRef idx="minor">
-            <a:schemeClr val="lt1"/>
-          </a:fontRef>
-        </p:style>
-        <p:txBody>
-          <a:bodyPr rtlCol="0" anchor="ctr"/>
-          <a:lstStyle/>
-          <a:p>
-            <a:pPr algn="ctr"/>
-          </a:p>
-        </p:txBody>
-      </p:sp>
-      <p:sp>
-        <p:nvSpPr>
-          <p:cNvPr id="19" name="Rounded Rectangle 18"/>
-          <p:cNvSpPr/>
-          <p:nvPr/>
-        </p:nvSpPr>
-        <p:spPr>
-          <a:xfrm>
-            <a:off x="1051560" y="5257800"/>
-            <a:ext cx="320040" cy="594360"/>
-          </a:xfrm>
-          <a:prstGeom prst="roundRect">
-            <a:avLst/>
-          </a:prstGeom>
-          <a:solidFill>
-            <a:srgbClr val="0F172A"/>
-          </a:solidFill>
-          <a:ln>
-            <a:noFill/>
-          </a:ln>
-        </p:spPr>
-        <p:style>
-          <a:lnRef idx="1">
-            <a:schemeClr val="accent1"/>
-          </a:lnRef>
-          <a:fillRef idx="3">
-            <a:schemeClr val="accent1"/>
-          </a:fillRef>
-          <a:effectRef idx="2">
-            <a:schemeClr val="accent1"/>
-          </a:effectRef>
-          <a:fontRef idx="minor">
-            <a:schemeClr val="lt1"/>
-          </a:fontRef>
-        </p:style>
-        <p:txBody>
-          <a:bodyPr rtlCol="0" anchor="ctr"/>
-          <a:lstStyle/>
-          <a:p>
-            <a:pPr algn="ctr"/>
-          </a:p>
-        </p:txBody>
-      </p:sp>
-      <p:sp>
-        <p:nvSpPr>
-          <p:cNvPr id="20" name="TextBox 19"/>
-          <p:cNvSpPr txBox="1"/>
-          <p:nvPr/>
-        </p:nvSpPr>
-        <p:spPr>
-          <a:xfrm>
-            <a:off x="1508760" y="5166360"/>
-            <a:ext cx="9601200" cy="777240"/>
-          </a:xfrm>
-          <a:prstGeom prst="rect">
-            <a:avLst/>
-          </a:prstGeom>
-          <a:noFill/>
-        </p:spPr>
-        <p:txBody>
-          <a:bodyPr wrap="square">
-            <a:spAutoFit/>
-          </a:bodyPr>
-          <a:lstStyle/>
-          <a:p>
-            <a:pPr>
-              <a:defRPr sz="1100" b="1">
-                <a:solidFill>
-                  <a:srgbClr val="0F172A"/>
-                </a:solidFill>
-              </a:defRPr>
-            </a:pPr>
-            <a:r>
-              <a:t>OUT_OF_STOCK (Red Badge)</a:t>
+              <a:t>Renderable interactive tables and cards with color-coded status badges.</a:t>
+            </a:r>
+          </a:p>
+          <a:p>
+            <a:pPr>
+              <a:spcBef>
+                <a:spcPts val="600"/>
+              </a:spcBef>
+              <a:defRPr sz="1050" b="1">
+                <a:solidFill>
+                  <a:srgbClr val="1E40AF"/>
+                </a:solidFill>
+              </a:defRPr>
+            </a:pPr>
+            <a:r>
+              <a:t>• ShoppingListModal.jsx</a:t>
             </a:r>
           </a:p>
           <a:p>
@@ -4422,43 +4126,7 @@
               </a:defRPr>
             </a:pPr>
             <a:r>
-              <a:t>Trigger: current_stock &lt;= 0   •   Completely depleted; urgent restock required.</a:t>
-            </a:r>
-          </a:p>
-        </p:txBody>
-      </p:sp>
-      <p:sp>
-        <p:nvSpPr>
-          <p:cNvPr id="21" name="TextBox 20"/>
-          <p:cNvSpPr txBox="1"/>
-          <p:nvPr/>
-        </p:nvSpPr>
-        <p:spPr>
-          <a:xfrm>
-            <a:off x="731520" y="6473952"/>
-            <a:ext cx="10728655" cy="274320"/>
-          </a:xfrm>
-          <a:prstGeom prst="rect">
-            <a:avLst/>
-          </a:prstGeom>
-          <a:noFill/>
-        </p:spPr>
-        <p:txBody>
-          <a:bodyPr wrap="none">
-            <a:spAutoFit/>
-          </a:bodyPr>
-          <a:lstStyle/>
-          <a:p>
-            <a:pPr>
-              <a:defRPr sz="900">
-                <a:solidFill>
-                  <a:srgbClr val="475569"/>
-                </a:solidFill>
-                <a:latin typeface="Arial"/>
-              </a:defRPr>
-            </a:pPr>
-            <a:r>
-              <a:t>Refrigerator &amp; Pantry Inventory System Prototype   •   Slide 10 of 13</a:t>
+              <a:t>Reorder modal displaying all low-stock items with suggested replenishment quantities.</a:t>
             </a:r>
           </a:p>
         </p:txBody>
@@ -4472,7 +4140,7 @@
 </file>
 
 <file path=ppt/slides/slide11.xml><?xml version="1.0" encoding="utf-8"?>
-<p:sld xmlns:a="http://schemas.openxmlformats.org/drawingml/2006/main" xmlns:p="http://schemas.openxmlformats.org/presentationml/2006/main" xmlns:r="http://schemas.openxmlformats.org/officeDocument/2006/relationships">
+<p:sld xmlns:a="http://schemas.openxmlformats.org/drawingml/2006/main" xmlns:r="http://schemas.openxmlformats.org/officeDocument/2006/relationships" xmlns:p="http://schemas.openxmlformats.org/presentationml/2006/main">
   <p:cSld>
     <p:spTree>
       <p:nvGrpSpPr>
@@ -4480,7 +4148,14 @@
         <p:cNvGrpSpPr/>
         <p:nvPr/>
       </p:nvGrpSpPr>
-      <p:grpSpPr/>
+      <p:grpSpPr>
+        <a:xfrm>
+          <a:off x="0" y="0"/>
+          <a:ext cx="0" cy="0"/>
+          <a:chOff x="0" y="0"/>
+          <a:chExt cx="0" cy="0"/>
+        </a:xfrm>
+      </p:grpSpPr>
       <p:sp>
         <p:nvSpPr>
           <p:cNvPr id="2" name="Rectangle 1"/>
@@ -4523,6 +4198,7 @@
           <a:lstStyle/>
           <a:p>
             <a:pPr algn="ctr"/>
+            <a:endParaRPr/>
           </a:p>
         </p:txBody>
       </p:sp>
@@ -4566,6 +4242,7 @@
           <a:lstStyle/>
           <a:p>
             <a:pPr algn="ctr"/>
+            <a:endParaRPr/>
           </a:p>
         </p:txBody>
       </p:sp>
@@ -4636,7 +4313,7 @@
               </a:defRPr>
             </a:pPr>
             <a:r>
-              <a:t>10. Automated Reorder Shopping List Engine</a:t>
+              <a:t>12. Summary &amp; Live Prototype Deployment</a:t>
             </a:r>
           </a:p>
         </p:txBody>
@@ -4649,8 +4326,8 @@
         </p:nvSpPr>
         <p:spPr>
           <a:xfrm>
-            <a:off x="731520" y="1280160"/>
-            <a:ext cx="5212080" cy="4892040"/>
+            <a:off x="914400" y="1261872"/>
+            <a:ext cx="5029200" cy="1874519"/>
           </a:xfrm>
           <a:prstGeom prst="roundRect">
             <a:avLst/>
@@ -4683,6 +4360,7 @@
           <a:lstStyle/>
           <a:p>
             <a:pPr algn="ctr"/>
+            <a:endParaRPr/>
           </a:p>
         </p:txBody>
       </p:sp>
@@ -4694,8 +4372,8 @@
         </p:nvSpPr>
         <p:spPr>
           <a:xfrm>
-            <a:off x="731520" y="1280160"/>
-            <a:ext cx="5212080" cy="384048"/>
+            <a:off x="914400" y="1261872"/>
+            <a:ext cx="5029200" cy="384048"/>
           </a:xfrm>
           <a:prstGeom prst="rect">
             <a:avLst/>
@@ -4733,7 +4411,7 @@
               </a:defRPr>
             </a:pPr>
             <a:r>
-              <a:t>Reorder Calculation Formula</a:t>
+              <a:t>1. Accurate Stock Tracking</a:t>
             </a:r>
           </a:p>
         </p:txBody>
@@ -4746,8 +4424,8 @@
         </p:nvSpPr>
         <p:spPr>
           <a:xfrm>
-            <a:off x="868680" y="1783080"/>
-            <a:ext cx="4937760" cy="4206240"/>
+            <a:off x="1097280" y="1755648"/>
+            <a:ext cx="4663440" cy="1234440"/>
           </a:xfrm>
           <a:prstGeom prst="rect">
             <a:avLst/>
@@ -4761,77 +4439,17 @@
           <a:lstStyle/>
           <a:p>
             <a:pPr>
-              <a:defRPr sz="1100" b="1">
+              <a:lnSpc>
+                <a:spcPct val="125000"/>
+              </a:lnSpc>
+              <a:defRPr sz="1100">
                 <a:solidFill>
                   <a:srgbClr val="0F172A"/>
                 </a:solidFill>
               </a:defRPr>
             </a:pPr>
             <a:r>
-              <a:t>Replenishment Target Formula:</a:t>
-            </a:r>
-          </a:p>
-          <a:p>
-            <a:pPr>
-              <a:spcBef>
-                <a:spcPts val="400"/>
-              </a:spcBef>
-              <a:defRPr sz="1000">
-                <a:solidFill>
-                  <a:srgbClr val="2563EB"/>
-                </a:solidFill>
-                <a:latin typeface="Courier New"/>
-              </a:defRPr>
-            </a:pPr>
-            <a:r>
-              <a:t>Target Stock = 2 × min_threshold</a:t>
-            </a:r>
-            <a:br/>
-            <a:r>
-              <a:t>Suggested Reorder = MAX(1, Target Stock - current_stock)</a:t>
-            </a:r>
-          </a:p>
-          <a:p>
-            <a:br/>
-            <a:pPr>
-              <a:spcBef>
-                <a:spcPts val="800"/>
-              </a:spcBef>
-              <a:defRPr sz="1100" b="1">
-                <a:solidFill>
-                  <a:srgbClr val="0F172A"/>
-                </a:solidFill>
-              </a:defRPr>
-            </a:pPr>
-            <a:r>
-              <a:t>Example Calculation (Lemons):</a:t>
-            </a:r>
-          </a:p>
-          <a:p>
-            <a:pPr>
-              <a:spcBef>
-                <a:spcPts val="200"/>
-              </a:spcBef>
-              <a:defRPr sz="950">
-                <a:solidFill>
-                  <a:srgbClr val="0F172A"/>
-                </a:solidFill>
-              </a:defRPr>
-            </a:pPr>
-            <a:r>
-              <a:t>• Min Threshold: 10.0 units</a:t>
-            </a:r>
-            <a:br/>
-            <a:r>
-              <a:t>• Current Stock: 2.0 units</a:t>
-            </a:r>
-            <a:br/>
-            <a:r>
-              <a:t>• Target Level: 20.0 units</a:t>
-            </a:r>
-            <a:br/>
-            <a:r>
-              <a:t>• Suggested Reorder: 18.0 units (Urgency: HIGH)</a:t>
+              <a:t>Maintains exact real-time quantities and batch expiration dates across all 6 food groups with zero data loss.</a:t>
             </a:r>
           </a:p>
         </p:txBody>
@@ -4844,8 +4462,8 @@
         </p:nvSpPr>
         <p:spPr>
           <a:xfrm>
-            <a:off x="6217920" y="1280160"/>
-            <a:ext cx="5212080" cy="4892040"/>
+            <a:off x="6217920" y="1261872"/>
+            <a:ext cx="5029200" cy="1874519"/>
           </a:xfrm>
           <a:prstGeom prst="roundRect">
             <a:avLst/>
@@ -4878,6 +4496,7 @@
           <a:lstStyle/>
           <a:p>
             <a:pPr algn="ctr"/>
+            <a:endParaRPr/>
           </a:p>
         </p:txBody>
       </p:sp>
@@ -4889,14 +4508,14 @@
         </p:nvSpPr>
         <p:spPr>
           <a:xfrm>
-            <a:off x="6217920" y="1280160"/>
-            <a:ext cx="5212080" cy="384048"/>
+            <a:off x="6217920" y="1261872"/>
+            <a:ext cx="5029200" cy="384048"/>
           </a:xfrm>
           <a:prstGeom prst="rect">
             <a:avLst/>
           </a:prstGeom>
           <a:solidFill>
-            <a:srgbClr val="1E40AF"/>
+            <a:srgbClr val="10B981"/>
           </a:solidFill>
           <a:ln>
             <a:noFill/>
@@ -4928,7 +4547,7 @@
               </a:defRPr>
             </a:pPr>
             <a:r>
-              <a:t>Shopping List Modal Features</a:t>
+              <a:t>2. Instant Material Discovery</a:t>
             </a:r>
           </a:p>
         </p:txBody>
@@ -4941,8 +4560,8 @@
         </p:nvSpPr>
         <p:spPr>
           <a:xfrm>
-            <a:off x="6355080" y="1783080"/>
-            <a:ext cx="4937760" cy="4206240"/>
+            <a:off x="6400800" y="1755648"/>
+            <a:ext cx="4663440" cy="1234440"/>
           </a:xfrm>
           <a:prstGeom prst="rect">
             <a:avLst/>
@@ -4956,200 +4575,41 @@
           <a:lstStyle/>
           <a:p>
             <a:pPr>
-              <a:spcBef>
-                <a:spcPts val="0"/>
-              </a:spcBef>
-              <a:defRPr sz="1100" b="1">
-                <a:solidFill>
-                  <a:srgbClr val="1E40AF"/>
-                </a:solidFill>
-              </a:defRPr>
-            </a:pPr>
-            <a:r>
-              <a:t>✔ Automated Compilation</a:t>
-            </a:r>
-          </a:p>
-          <a:p>
-            <a:pPr>
-              <a:spcBef>
-                <a:spcPts val="200"/>
-              </a:spcBef>
-              <a:defRPr sz="950">
+              <a:lnSpc>
+                <a:spcPct val="125000"/>
+              </a:lnSpc>
+              <a:defRPr sz="1100">
                 <a:solidFill>
                   <a:srgbClr val="0F172A"/>
                 </a:solidFill>
               </a:defRPr>
             </a:pPr>
             <a:r>
-              <a:t>GET /api/alerts/shopping-list dynamically gathers all depleted items below threshold.</a:t>
-            </a:r>
-          </a:p>
-          <a:p>
-            <a:pPr>
-              <a:spcBef>
-                <a:spcPts val="800"/>
-              </a:spcBef>
-              <a:defRPr sz="1100" b="1">
-                <a:solidFill>
-                  <a:srgbClr val="1E40AF"/>
-                </a:solidFill>
-              </a:defRPr>
-            </a:pPr>
-            <a:r>
-              <a:t>✔ One-Click Access</a:t>
-            </a:r>
-          </a:p>
-          <a:p>
-            <a:pPr>
-              <a:spcBef>
-                <a:spcPts val="200"/>
-              </a:spcBef>
-              <a:defRPr sz="950">
-                <a:solidFill>
-                  <a:srgbClr val="0F172A"/>
-                </a:solidFill>
-              </a:defRPr>
-            </a:pPr>
-            <a:r>
-              <a:t>Top header button displays a live red badge count with total deficit items.</a:t>
-            </a:r>
-          </a:p>
-          <a:p>
-            <a:pPr>
-              <a:spcBef>
-                <a:spcPts val="800"/>
-              </a:spcBef>
-              <a:defRPr sz="1100" b="1">
-                <a:solidFill>
-                  <a:srgbClr val="1E40AF"/>
-                </a:solidFill>
-              </a:defRPr>
-            </a:pPr>
-            <a:r>
-              <a:t>✔ Urgency Badges</a:t>
-            </a:r>
-          </a:p>
-          <a:p>
-            <a:pPr>
-              <a:spcBef>
-                <a:spcPts val="200"/>
-              </a:spcBef>
-              <a:defRPr sz="950">
-                <a:solidFill>
-                  <a:srgbClr val="0F172A"/>
-                </a:solidFill>
-              </a:defRPr>
-            </a:pPr>
-            <a:r>
-              <a:t>Tags depleted stock (&lt;= 0) as 'CRITICAL' and low stock as 'HIGH'.</a:t>
-            </a:r>
-          </a:p>
-          <a:p>
-            <a:pPr>
-              <a:spcBef>
-                <a:spcPts val="800"/>
-              </a:spcBef>
-              <a:defRPr sz="1100" b="1">
-                <a:solidFill>
-                  <a:srgbClr val="1E40AF"/>
-                </a:solidFill>
-              </a:defRPr>
-            </a:pPr>
-            <a:r>
-              <a:t>✔ Category Breakdown</a:t>
-            </a:r>
-          </a:p>
-          <a:p>
-            <a:pPr>
-              <a:spcBef>
-                <a:spcPts val="200"/>
-              </a:spcBef>
-              <a:defRPr sz="950">
-                <a:solidFill>
-                  <a:srgbClr val="0F172A"/>
-                </a:solidFill>
-              </a:defRPr>
-            </a:pPr>
-            <a:r>
-              <a:t>Organizes items by category with exact units for easy in-store or online grocery purchasing.</a:t>
-            </a:r>
-          </a:p>
-        </p:txBody>
-      </p:sp>
-      <p:sp>
-        <p:nvSpPr>
-          <p:cNvPr id="12" name="TextBox 11"/>
-          <p:cNvSpPr txBox="1"/>
-          <p:nvPr/>
-        </p:nvSpPr>
-        <p:spPr>
-          <a:xfrm>
-            <a:off x="731520" y="6473952"/>
-            <a:ext cx="10728655" cy="274320"/>
-          </a:xfrm>
-          <a:prstGeom prst="rect">
-            <a:avLst/>
-          </a:prstGeom>
-          <a:noFill/>
-        </p:spPr>
-        <p:txBody>
-          <a:bodyPr wrap="none">
-            <a:spAutoFit/>
-          </a:bodyPr>
-          <a:lstStyle/>
-          <a:p>
-            <a:pPr>
-              <a:defRPr sz="900">
-                <a:solidFill>
-                  <a:srgbClr val="475569"/>
-                </a:solidFill>
-                <a:latin typeface="Arial"/>
-              </a:defRPr>
-            </a:pPr>
-            <a:r>
-              <a:t>Refrigerator &amp; Pantry Inventory System Prototype   •   Slide 11 of 13</a:t>
-            </a:r>
-          </a:p>
-        </p:txBody>
-      </p:sp>
-    </p:spTree>
-  </p:cSld>
-  <p:clrMapOvr>
-    <a:masterClrMapping/>
-  </p:clrMapOvr>
-</p:sld>
-</file>
-
-<file path=ppt/slides/slide12.xml><?xml version="1.0" encoding="utf-8"?>
-<p:sld xmlns:a="http://schemas.openxmlformats.org/drawingml/2006/main" xmlns:p="http://schemas.openxmlformats.org/presentationml/2006/main" xmlns:r="http://schemas.openxmlformats.org/officeDocument/2006/relationships">
-  <p:cSld>
-    <p:spTree>
-      <p:nvGrpSpPr>
-        <p:cNvPr id="1" name=""/>
-        <p:cNvGrpSpPr/>
-        <p:nvPr/>
-      </p:nvGrpSpPr>
-      <p:grpSpPr/>
-      <p:sp>
-        <p:nvSpPr>
-          <p:cNvPr id="2" name="Rectangle 1"/>
+              <a:t>Category filter dropdowns and keyword search in Stock-In/Out modals allow users to find items in seconds.</a:t>
+            </a:r>
+          </a:p>
+        </p:txBody>
+      </p:sp>
+      <p:sp>
+        <p:nvSpPr>
+          <p:cNvPr id="12" name="Rounded Rectangle 11"/>
           <p:cNvSpPr/>
           <p:nvPr/>
         </p:nvSpPr>
         <p:spPr>
           <a:xfrm>
-            <a:off x="0" y="0"/>
-            <a:ext cx="12191695" cy="1051560"/>
-          </a:xfrm>
-          <a:prstGeom prst="rect">
-            <a:avLst/>
-          </a:prstGeom>
-          <a:solidFill>
-            <a:srgbClr val="0F172A"/>
-          </a:solidFill>
-          <a:ln>
+            <a:off x="914400" y="3273552"/>
+            <a:ext cx="5029200" cy="1874519"/>
+          </a:xfrm>
+          <a:prstGeom prst="roundRect">
+            <a:avLst/>
+          </a:prstGeom>
+          <a:solidFill>
+            <a:srgbClr val="FFFFFF"/>
+          </a:solidFill>
+          <a:ln w="12700">
             <a:solidFill>
-              <a:srgbClr val="2563EB"/>
+              <a:srgbClr val="CBD5E1"/>
             </a:solidFill>
           </a:ln>
         </p:spPr>
@@ -5172,25 +4632,26 @@
           <a:lstStyle/>
           <a:p>
             <a:pPr algn="ctr"/>
-          </a:p>
-        </p:txBody>
-      </p:sp>
-      <p:sp>
-        <p:nvSpPr>
-          <p:cNvPr id="3" name="Rectangle 2"/>
+            <a:endParaRPr/>
+          </a:p>
+        </p:txBody>
+      </p:sp>
+      <p:sp>
+        <p:nvSpPr>
+          <p:cNvPr id="13" name="Rectangle 12"/>
           <p:cNvSpPr/>
           <p:nvPr/>
         </p:nvSpPr>
         <p:spPr>
           <a:xfrm>
-            <a:off x="0" y="1033271"/>
-            <a:ext cx="12191695" cy="36576"/>
+            <a:off x="914400" y="3273552"/>
+            <a:ext cx="5029200" cy="384048"/>
           </a:xfrm>
           <a:prstGeom prst="rect">
             <a:avLst/>
           </a:prstGeom>
           <a:solidFill>
-            <a:srgbClr val="2563EB"/>
+            <a:srgbClr val="F59E0B"/>
           </a:solidFill>
           <a:ln>
             <a:noFill/>
@@ -5214,20 +4675,29 @@
           <a:bodyPr rtlCol="0" anchor="ctr"/>
           <a:lstStyle/>
           <a:p>
-            <a:pPr algn="ctr"/>
-          </a:p>
-        </p:txBody>
-      </p:sp>
-      <p:sp>
-        <p:nvSpPr>
-          <p:cNvPr id="4" name="TextBox 3"/>
+            <a:pPr algn="ctr">
+              <a:defRPr sz="1200" b="1">
+                <a:solidFill>
+                  <a:srgbClr val="FFFFFF"/>
+                </a:solidFill>
+              </a:defRPr>
+            </a:pPr>
+            <a:r>
+              <a:t>3. Proactive Spoilage Prevention</a:t>
+            </a:r>
+          </a:p>
+        </p:txBody>
+      </p:sp>
+      <p:sp>
+        <p:nvSpPr>
+          <p:cNvPr id="14" name="TextBox 13"/>
           <p:cNvSpPr txBox="1"/>
           <p:nvPr/>
         </p:nvSpPr>
         <p:spPr>
           <a:xfrm>
-            <a:off x="731520" y="109728"/>
-            <a:ext cx="10515600" cy="274320"/>
+            <a:off x="1097280" y="3767328"/>
+            <a:ext cx="4663440" cy="1234440"/>
           </a:xfrm>
           <a:prstGeom prst="rect">
             <a:avLst/>
@@ -5235,71 +4705,37 @@
           <a:noFill/>
         </p:spPr>
         <p:txBody>
-          <a:bodyPr wrap="none">
+          <a:bodyPr wrap="square">
             <a:spAutoFit/>
           </a:bodyPr>
           <a:lstStyle/>
           <a:p>
             <a:pPr>
-              <a:defRPr sz="1000" b="1">
-                <a:solidFill>
-                  <a:srgbClr val="0EA5E9"/>
-                </a:solidFill>
-                <a:latin typeface="Arial"/>
-              </a:defRPr>
-            </a:pPr>
-            <a:r>
-              <a:t>PROTOTYPE SYSTEM SPECIFICATION</a:t>
-            </a:r>
-          </a:p>
-        </p:txBody>
-      </p:sp>
-      <p:sp>
-        <p:nvSpPr>
-          <p:cNvPr id="5" name="TextBox 4"/>
-          <p:cNvSpPr txBox="1"/>
-          <p:nvPr/>
-        </p:nvSpPr>
-        <p:spPr>
-          <a:xfrm>
-            <a:off x="731520" y="347472"/>
-            <a:ext cx="10515600" cy="594360"/>
-          </a:xfrm>
-          <a:prstGeom prst="rect">
-            <a:avLst/>
-          </a:prstGeom>
-          <a:noFill/>
-        </p:spPr>
-        <p:txBody>
-          <a:bodyPr wrap="none">
-            <a:spAutoFit/>
-          </a:bodyPr>
-          <a:lstStyle/>
-          <a:p>
-            <a:pPr>
-              <a:defRPr sz="2200" b="1">
-                <a:solidFill>
-                  <a:srgbClr val="FFFFFF"/>
-                </a:solidFill>
-                <a:latin typeface="Arial"/>
-              </a:defRPr>
-            </a:pPr>
-            <a:r>
-              <a:t>11. Core Modules &amp; Code Implementation Breakdown</a:t>
-            </a:r>
-          </a:p>
-        </p:txBody>
-      </p:sp>
-      <p:sp>
-        <p:nvSpPr>
-          <p:cNvPr id="6" name="Rounded Rectangle 5"/>
+              <a:lnSpc>
+                <a:spcPct val="125000"/>
+              </a:lnSpc>
+              <a:defRPr sz="1100">
+                <a:solidFill>
+                  <a:srgbClr val="0F172A"/>
+                </a:solidFill>
+              </a:defRPr>
+            </a:pPr>
+            <a:r>
+              <a:t>3-day lookahead expiration warnings and nearest expiry tags ensure perishable ingredients are used before spoiling.</a:t>
+            </a:r>
+          </a:p>
+        </p:txBody>
+      </p:sp>
+      <p:sp>
+        <p:nvSpPr>
+          <p:cNvPr id="15" name="Rounded Rectangle 14"/>
           <p:cNvSpPr/>
           <p:nvPr/>
         </p:nvSpPr>
         <p:spPr>
           <a:xfrm>
-            <a:off x="731520" y="1280160"/>
-            <a:ext cx="5212080" cy="4892040"/>
+            <a:off x="6217920" y="3273552"/>
+            <a:ext cx="5029200" cy="1874519"/>
           </a:xfrm>
           <a:prstGeom prst="roundRect">
             <a:avLst/>
@@ -5332,25 +4768,26 @@
           <a:lstStyle/>
           <a:p>
             <a:pPr algn="ctr"/>
-          </a:p>
-        </p:txBody>
-      </p:sp>
-      <p:sp>
-        <p:nvSpPr>
-          <p:cNvPr id="7" name="Rectangle 6"/>
+            <a:endParaRPr/>
+          </a:p>
+        </p:txBody>
+      </p:sp>
+      <p:sp>
+        <p:nvSpPr>
+          <p:cNvPr id="16" name="Rectangle 15"/>
           <p:cNvSpPr/>
           <p:nvPr/>
         </p:nvSpPr>
         <p:spPr>
           <a:xfrm>
-            <a:off x="731520" y="1280160"/>
-            <a:ext cx="5212080" cy="384048"/>
+            <a:off x="6217920" y="3273552"/>
+            <a:ext cx="5029200" cy="384048"/>
           </a:xfrm>
           <a:prstGeom prst="rect">
             <a:avLst/>
           </a:prstGeom>
           <a:solidFill>
-            <a:srgbClr val="2563EB"/>
+            <a:srgbClr val="1E40AF"/>
           </a:solidFill>
           <a:ln>
             <a:noFill/>
@@ -5382,21 +4819,21 @@
               </a:defRPr>
             </a:pPr>
             <a:r>
-              <a:t>Backend Modules (Node / Express / SQLite)</a:t>
-            </a:r>
-          </a:p>
-        </p:txBody>
-      </p:sp>
-      <p:sp>
-        <p:nvSpPr>
-          <p:cNvPr id="8" name="TextBox 7"/>
+              <a:t>4. Automated Reordering</a:t>
+            </a:r>
+          </a:p>
+        </p:txBody>
+      </p:sp>
+      <p:sp>
+        <p:nvSpPr>
+          <p:cNvPr id="17" name="TextBox 16"/>
           <p:cNvSpPr txBox="1"/>
           <p:nvPr/>
         </p:nvSpPr>
         <p:spPr>
           <a:xfrm>
-            <a:off x="868680" y="1783080"/>
-            <a:ext cx="4937760" cy="4206240"/>
+            <a:off x="6400800" y="3767328"/>
+            <a:ext cx="4663440" cy="1234440"/>
           </a:xfrm>
           <a:prstGeom prst="rect">
             <a:avLst/>
@@ -5410,116 +4847,41 @@
           <a:lstStyle/>
           <a:p>
             <a:pPr>
-              <a:spcBef>
-                <a:spcPts val="0"/>
-              </a:spcBef>
-              <a:defRPr sz="1050" b="1">
-                <a:solidFill>
-                  <a:srgbClr val="2563EB"/>
-                </a:solidFill>
-              </a:defRPr>
-            </a:pPr>
-            <a:r>
-              <a:t>• server.js</a:t>
-            </a:r>
-          </a:p>
-          <a:p>
-            <a:pPr>
-              <a:spcBef>
-                <a:spcPts val="200"/>
-              </a:spcBef>
-              <a:defRPr sz="950">
+              <a:lnSpc>
+                <a:spcPct val="125000"/>
+              </a:lnSpc>
+              <a:defRPr sz="1100">
                 <a:solidFill>
                   <a:srgbClr val="0F172A"/>
                 </a:solidFill>
               </a:defRPr>
             </a:pPr>
             <a:r>
-              <a:t>Express REST server hosting /api/categories, /api/items, /api/transactions/in, /api/transactions/out, /api/dashboard/summary, and /api/alerts/*.</a:t>
-            </a:r>
-          </a:p>
-          <a:p>
-            <a:pPr>
-              <a:spcBef>
-                <a:spcPts val="600"/>
-              </a:spcBef>
-              <a:defRPr sz="1050" b="1">
-                <a:solidFill>
-                  <a:srgbClr val="2563EB"/>
-                </a:solidFill>
-              </a:defRPr>
-            </a:pPr>
-            <a:r>
-              <a:t>• db.js</a:t>
-            </a:r>
-          </a:p>
-          <a:p>
-            <a:pPr>
-              <a:spcBef>
-                <a:spcPts val="200"/>
-              </a:spcBef>
-              <a:defRPr sz="950">
-                <a:solidFill>
-                  <a:srgbClr val="0F172A"/>
-                </a:solidFill>
-              </a:defRPr>
-            </a:pPr>
-            <a:r>
-              <a:t>SQLite database connection manager with async run(), get(), all() helper wrappers and auto-initialization.</a:t>
-            </a:r>
-          </a:p>
-          <a:p>
-            <a:pPr>
-              <a:spcBef>
-                <a:spcPts val="600"/>
-              </a:spcBef>
-              <a:defRPr sz="1050" b="1">
-                <a:solidFill>
-                  <a:srgbClr val="2563EB"/>
-                </a:solidFill>
-              </a:defRPr>
-            </a:pPr>
-            <a:r>
-              <a:t>• schema.sql &amp; seed.sql</a:t>
-            </a:r>
-          </a:p>
-          <a:p>
-            <a:pPr>
-              <a:spcBef>
-                <a:spcPts val="200"/>
-              </a:spcBef>
-              <a:defRPr sz="950">
-                <a:solidFill>
-                  <a:srgbClr val="0F172A"/>
-                </a:solidFill>
-              </a:defRPr>
-            </a:pPr>
-            <a:r>
-              <a:t>DDL script defining categories, items, and inventory_transactions with realistic sample items.</a:t>
-            </a:r>
-          </a:p>
-        </p:txBody>
-      </p:sp>
-      <p:sp>
-        <p:nvSpPr>
-          <p:cNvPr id="9" name="Rounded Rectangle 8"/>
+              <a:t>Calculates required restock amounts automatically when stock falls below threshold, simplifying grocery planning.</a:t>
+            </a:r>
+          </a:p>
+        </p:txBody>
+      </p:sp>
+      <p:sp>
+        <p:nvSpPr>
+          <p:cNvPr id="18" name="Rounded Rectangle 17"/>
           <p:cNvSpPr/>
           <p:nvPr/>
         </p:nvSpPr>
         <p:spPr>
           <a:xfrm>
-            <a:off x="6217920" y="1280160"/>
-            <a:ext cx="5212080" cy="4892040"/>
+            <a:off x="914400" y="5440680"/>
+            <a:ext cx="10332720" cy="868680"/>
           </a:xfrm>
           <a:prstGeom prst="roundRect">
             <a:avLst/>
           </a:prstGeom>
           <a:solidFill>
-            <a:srgbClr val="FFFFFF"/>
-          </a:solidFill>
-          <a:ln w="12700">
+            <a:srgbClr val="0F172A"/>
+          </a:solidFill>
+          <a:ln w="25400">
             <a:solidFill>
-              <a:srgbClr val="CBD5E1"/>
+              <a:srgbClr val="10B981"/>
             </a:solidFill>
           </a:ln>
         </p:spPr>
@@ -5542,71 +4904,20 @@
           <a:lstStyle/>
           <a:p>
             <a:pPr algn="ctr"/>
-          </a:p>
-        </p:txBody>
-      </p:sp>
-      <p:sp>
-        <p:nvSpPr>
-          <p:cNvPr id="10" name="Rectangle 9"/>
-          <p:cNvSpPr/>
-          <p:nvPr/>
-        </p:nvSpPr>
-        <p:spPr>
-          <a:xfrm>
-            <a:off x="6217920" y="1280160"/>
-            <a:ext cx="5212080" cy="384048"/>
-          </a:xfrm>
-          <a:prstGeom prst="rect">
-            <a:avLst/>
-          </a:prstGeom>
-          <a:solidFill>
-            <a:srgbClr val="1E40AF"/>
-          </a:solidFill>
-          <a:ln>
-            <a:noFill/>
-          </a:ln>
-        </p:spPr>
-        <p:style>
-          <a:lnRef idx="1">
-            <a:schemeClr val="accent1"/>
-          </a:lnRef>
-          <a:fillRef idx="3">
-            <a:schemeClr val="accent1"/>
-          </a:fillRef>
-          <a:effectRef idx="2">
-            <a:schemeClr val="accent1"/>
-          </a:effectRef>
-          <a:fontRef idx="minor">
-            <a:schemeClr val="lt1"/>
-          </a:fontRef>
-        </p:style>
-        <p:txBody>
-          <a:bodyPr rtlCol="0" anchor="ctr"/>
-          <a:lstStyle/>
-          <a:p>
-            <a:pPr algn="ctr">
-              <a:defRPr sz="1200" b="1">
-                <a:solidFill>
-                  <a:srgbClr val="FFFFFF"/>
-                </a:solidFill>
-              </a:defRPr>
-            </a:pPr>
-            <a:r>
-              <a:t>Frontend Modules (React 18 + Vite)</a:t>
-            </a:r>
-          </a:p>
-        </p:txBody>
-      </p:sp>
-      <p:sp>
-        <p:nvSpPr>
-          <p:cNvPr id="11" name="TextBox 10"/>
+            <a:endParaRPr/>
+          </a:p>
+        </p:txBody>
+      </p:sp>
+      <p:sp>
+        <p:nvSpPr>
+          <p:cNvPr id="19" name="TextBox 18"/>
           <p:cNvSpPr txBox="1"/>
           <p:nvPr/>
         </p:nvSpPr>
         <p:spPr>
           <a:xfrm>
-            <a:off x="6355080" y="1783080"/>
-            <a:ext cx="4937760" cy="4206240"/>
+            <a:off x="1097280" y="5486400"/>
+            <a:ext cx="9966960" cy="777240"/>
           </a:xfrm>
           <a:prstGeom prst="rect">
             <a:avLst/>
@@ -5620,955 +4931,14 @@
           <a:lstStyle/>
           <a:p>
             <a:pPr>
-              <a:spcBef>
-                <a:spcPts val="0"/>
-              </a:spcBef>
-              <a:defRPr sz="1050" b="1">
-                <a:solidFill>
-                  <a:srgbClr val="1E40AF"/>
-                </a:solidFill>
-              </a:defRPr>
-            </a:pPr>
-            <a:r>
-              <a:t>• App.jsx</a:t>
-            </a:r>
-          </a:p>
-          <a:p>
-            <a:pPr>
-              <a:spcBef>
-                <a:spcPts val="200"/>
-              </a:spcBef>
-              <a:defRPr sz="950">
-                <a:solidFill>
-                  <a:srgbClr val="0F172A"/>
-                </a:solidFill>
-              </a:defRPr>
-            </a:pPr>
-            <a:r>
-              <a:t>Root orchestrator managing data fetch, search/category state, alert banners, and modal visibility.</a:t>
-            </a:r>
-          </a:p>
-          <a:p>
-            <a:pPr>
-              <a:spcBef>
-                <a:spcPts val="600"/>
-              </a:spcBef>
-              <a:defRPr sz="1050" b="1">
-                <a:solidFill>
-                  <a:srgbClr val="1E40AF"/>
-                </a:solidFill>
-              </a:defRPr>
-            </a:pPr>
-            <a:r>
-              <a:t>• StockInModal.jsx / StockOutModal.jsx</a:t>
-            </a:r>
-          </a:p>
-          <a:p>
-            <a:pPr>
-              <a:spcBef>
-                <a:spcPts val="200"/>
-              </a:spcBef>
-              <a:defRPr sz="950">
-                <a:solidFill>
-                  <a:srgbClr val="0F172A"/>
-                </a:solidFill>
-              </a:defRPr>
-            </a:pPr>
-            <a:r>
-              <a:t>Enhanced modals featuring live category dropdown filtering and instant material search.</a:t>
-            </a:r>
-          </a:p>
-          <a:p>
-            <a:pPr>
-              <a:spcBef>
-                <a:spcPts val="600"/>
-              </a:spcBef>
-              <a:defRPr sz="1050" b="1">
-                <a:solidFill>
-                  <a:srgbClr val="1E40AF"/>
-                </a:solidFill>
-              </a:defRPr>
-            </a:pPr>
-            <a:r>
-              <a:t>• InventoryTable.jsx &amp; CategoryGrid.jsx</a:t>
-            </a:r>
-          </a:p>
-          <a:p>
-            <a:pPr>
-              <a:spcBef>
-                <a:spcPts val="200"/>
-              </a:spcBef>
-              <a:defRPr sz="950">
-                <a:solidFill>
-                  <a:srgbClr val="0F172A"/>
-                </a:solidFill>
-              </a:defRPr>
-            </a:pPr>
-            <a:r>
-              <a:t>Renderable interactive tables and cards with color-coded status badges.</a:t>
-            </a:r>
-          </a:p>
-          <a:p>
-            <a:pPr>
-              <a:spcBef>
-                <a:spcPts val="600"/>
-              </a:spcBef>
-              <a:defRPr sz="1050" b="1">
-                <a:solidFill>
-                  <a:srgbClr val="1E40AF"/>
-                </a:solidFill>
-              </a:defRPr>
-            </a:pPr>
-            <a:r>
-              <a:t>• ShoppingListModal.jsx</a:t>
-            </a:r>
-          </a:p>
-          <a:p>
-            <a:pPr>
-              <a:spcBef>
-                <a:spcPts val="200"/>
-              </a:spcBef>
-              <a:defRPr sz="950">
-                <a:solidFill>
-                  <a:srgbClr val="0F172A"/>
-                </a:solidFill>
-              </a:defRPr>
-            </a:pPr>
-            <a:r>
-              <a:t>Reorder modal displaying all low-stock items with suggested replenishment quantities.</a:t>
-            </a:r>
-          </a:p>
-        </p:txBody>
-      </p:sp>
-      <p:sp>
-        <p:nvSpPr>
-          <p:cNvPr id="12" name="TextBox 11"/>
-          <p:cNvSpPr txBox="1"/>
-          <p:nvPr/>
-        </p:nvSpPr>
-        <p:spPr>
-          <a:xfrm>
-            <a:off x="731520" y="6473952"/>
-            <a:ext cx="10728655" cy="274320"/>
-          </a:xfrm>
-          <a:prstGeom prst="rect">
-            <a:avLst/>
-          </a:prstGeom>
-          <a:noFill/>
-        </p:spPr>
-        <p:txBody>
-          <a:bodyPr wrap="none">
-            <a:spAutoFit/>
-          </a:bodyPr>
-          <a:lstStyle/>
-          <a:p>
-            <a:pPr>
-              <a:defRPr sz="900">
-                <a:solidFill>
-                  <a:srgbClr val="475569"/>
-                </a:solidFill>
-                <a:latin typeface="Arial"/>
-              </a:defRPr>
-            </a:pPr>
-            <a:r>
-              <a:t>Refrigerator &amp; Pantry Inventory System Prototype   •   Slide 12 of 13</a:t>
-            </a:r>
-          </a:p>
-        </p:txBody>
-      </p:sp>
-    </p:spTree>
-  </p:cSld>
-  <p:clrMapOvr>
-    <a:masterClrMapping/>
-  </p:clrMapOvr>
-</p:sld>
-</file>
-
-<file path=ppt/slides/slide13.xml><?xml version="1.0" encoding="utf-8"?>
-<p:sld xmlns:a="http://schemas.openxmlformats.org/drawingml/2006/main" xmlns:p="http://schemas.openxmlformats.org/presentationml/2006/main" xmlns:r="http://schemas.openxmlformats.org/officeDocument/2006/relationships">
-  <p:cSld>
-    <p:spTree>
-      <p:nvGrpSpPr>
-        <p:cNvPr id="1" name=""/>
-        <p:cNvGrpSpPr/>
-        <p:nvPr/>
-      </p:nvGrpSpPr>
-      <p:grpSpPr/>
-      <p:sp>
-        <p:nvSpPr>
-          <p:cNvPr id="2" name="Rectangle 1"/>
-          <p:cNvSpPr/>
-          <p:nvPr/>
-        </p:nvSpPr>
-        <p:spPr>
-          <a:xfrm>
-            <a:off x="0" y="0"/>
-            <a:ext cx="12191695" cy="1051560"/>
-          </a:xfrm>
-          <a:prstGeom prst="rect">
-            <a:avLst/>
-          </a:prstGeom>
-          <a:solidFill>
-            <a:srgbClr val="0F172A"/>
-          </a:solidFill>
-          <a:ln>
-            <a:solidFill>
-              <a:srgbClr val="2563EB"/>
-            </a:solidFill>
-          </a:ln>
-        </p:spPr>
-        <p:style>
-          <a:lnRef idx="1">
-            <a:schemeClr val="accent1"/>
-          </a:lnRef>
-          <a:fillRef idx="3">
-            <a:schemeClr val="accent1"/>
-          </a:fillRef>
-          <a:effectRef idx="2">
-            <a:schemeClr val="accent1"/>
-          </a:effectRef>
-          <a:fontRef idx="minor">
-            <a:schemeClr val="lt1"/>
-          </a:fontRef>
-        </p:style>
-        <p:txBody>
-          <a:bodyPr rtlCol="0" anchor="ctr"/>
-          <a:lstStyle/>
-          <a:p>
-            <a:pPr algn="ctr"/>
-          </a:p>
-        </p:txBody>
-      </p:sp>
-      <p:sp>
-        <p:nvSpPr>
-          <p:cNvPr id="3" name="Rectangle 2"/>
-          <p:cNvSpPr/>
-          <p:nvPr/>
-        </p:nvSpPr>
-        <p:spPr>
-          <a:xfrm>
-            <a:off x="0" y="1033271"/>
-            <a:ext cx="12191695" cy="36576"/>
-          </a:xfrm>
-          <a:prstGeom prst="rect">
-            <a:avLst/>
-          </a:prstGeom>
-          <a:solidFill>
-            <a:srgbClr val="2563EB"/>
-          </a:solidFill>
-          <a:ln>
-            <a:noFill/>
-          </a:ln>
-        </p:spPr>
-        <p:style>
-          <a:lnRef idx="1">
-            <a:schemeClr val="accent1"/>
-          </a:lnRef>
-          <a:fillRef idx="3">
-            <a:schemeClr val="accent1"/>
-          </a:fillRef>
-          <a:effectRef idx="2">
-            <a:schemeClr val="accent1"/>
-          </a:effectRef>
-          <a:fontRef idx="minor">
-            <a:schemeClr val="lt1"/>
-          </a:fontRef>
-        </p:style>
-        <p:txBody>
-          <a:bodyPr rtlCol="0" anchor="ctr"/>
-          <a:lstStyle/>
-          <a:p>
-            <a:pPr algn="ctr"/>
-          </a:p>
-        </p:txBody>
-      </p:sp>
-      <p:sp>
-        <p:nvSpPr>
-          <p:cNvPr id="4" name="TextBox 3"/>
-          <p:cNvSpPr txBox="1"/>
-          <p:nvPr/>
-        </p:nvSpPr>
-        <p:spPr>
-          <a:xfrm>
-            <a:off x="731520" y="109728"/>
-            <a:ext cx="10515600" cy="274320"/>
-          </a:xfrm>
-          <a:prstGeom prst="rect">
-            <a:avLst/>
-          </a:prstGeom>
-          <a:noFill/>
-        </p:spPr>
-        <p:txBody>
-          <a:bodyPr wrap="none">
-            <a:spAutoFit/>
-          </a:bodyPr>
-          <a:lstStyle/>
-          <a:p>
-            <a:pPr>
               <a:defRPr sz="1000" b="1">
                 <a:solidFill>
                   <a:srgbClr val="0EA5E9"/>
                 </a:solidFill>
-                <a:latin typeface="Arial"/>
-              </a:defRPr>
-            </a:pPr>
-            <a:r>
-              <a:t>PROTOTYPE SYSTEM SPECIFICATION</a:t>
-            </a:r>
-          </a:p>
-        </p:txBody>
-      </p:sp>
-      <p:sp>
-        <p:nvSpPr>
-          <p:cNvPr id="5" name="TextBox 4"/>
-          <p:cNvSpPr txBox="1"/>
-          <p:nvPr/>
-        </p:nvSpPr>
-        <p:spPr>
-          <a:xfrm>
-            <a:off x="731520" y="347472"/>
-            <a:ext cx="10515600" cy="594360"/>
-          </a:xfrm>
-          <a:prstGeom prst="rect">
-            <a:avLst/>
-          </a:prstGeom>
-          <a:noFill/>
-        </p:spPr>
-        <p:txBody>
-          <a:bodyPr wrap="none">
-            <a:spAutoFit/>
-          </a:bodyPr>
-          <a:lstStyle/>
-          <a:p>
-            <a:pPr>
-              <a:defRPr sz="2200" b="1">
-                <a:solidFill>
-                  <a:srgbClr val="FFFFFF"/>
-                </a:solidFill>
-                <a:latin typeface="Arial"/>
-              </a:defRPr>
-            </a:pPr>
-            <a:r>
-              <a:t>12. Summary &amp; Live Prototype Deployment</a:t>
-            </a:r>
-          </a:p>
-        </p:txBody>
-      </p:sp>
-      <p:sp>
-        <p:nvSpPr>
-          <p:cNvPr id="6" name="Rounded Rectangle 5"/>
-          <p:cNvSpPr/>
-          <p:nvPr/>
-        </p:nvSpPr>
-        <p:spPr>
-          <a:xfrm>
-            <a:off x="914400" y="1261872"/>
-            <a:ext cx="5029200" cy="1874519"/>
-          </a:xfrm>
-          <a:prstGeom prst="roundRect">
-            <a:avLst/>
-          </a:prstGeom>
-          <a:solidFill>
-            <a:srgbClr val="FFFFFF"/>
-          </a:solidFill>
-          <a:ln w="12700">
-            <a:solidFill>
-              <a:srgbClr val="CBD5E1"/>
-            </a:solidFill>
-          </a:ln>
-        </p:spPr>
-        <p:style>
-          <a:lnRef idx="1">
-            <a:schemeClr val="accent1"/>
-          </a:lnRef>
-          <a:fillRef idx="3">
-            <a:schemeClr val="accent1"/>
-          </a:fillRef>
-          <a:effectRef idx="2">
-            <a:schemeClr val="accent1"/>
-          </a:effectRef>
-          <a:fontRef idx="minor">
-            <a:schemeClr val="lt1"/>
-          </a:fontRef>
-        </p:style>
-        <p:txBody>
-          <a:bodyPr rtlCol="0" anchor="ctr"/>
-          <a:lstStyle/>
-          <a:p>
-            <a:pPr algn="ctr"/>
-          </a:p>
-        </p:txBody>
-      </p:sp>
-      <p:sp>
-        <p:nvSpPr>
-          <p:cNvPr id="7" name="Rectangle 6"/>
-          <p:cNvSpPr/>
-          <p:nvPr/>
-        </p:nvSpPr>
-        <p:spPr>
-          <a:xfrm>
-            <a:off x="914400" y="1261872"/>
-            <a:ext cx="5029200" cy="384048"/>
-          </a:xfrm>
-          <a:prstGeom prst="rect">
-            <a:avLst/>
-          </a:prstGeom>
-          <a:solidFill>
-            <a:srgbClr val="2563EB"/>
-          </a:solidFill>
-          <a:ln>
-            <a:noFill/>
-          </a:ln>
-        </p:spPr>
-        <p:style>
-          <a:lnRef idx="1">
-            <a:schemeClr val="accent1"/>
-          </a:lnRef>
-          <a:fillRef idx="3">
-            <a:schemeClr val="accent1"/>
-          </a:fillRef>
-          <a:effectRef idx="2">
-            <a:schemeClr val="accent1"/>
-          </a:effectRef>
-          <a:fontRef idx="minor">
-            <a:schemeClr val="lt1"/>
-          </a:fontRef>
-        </p:style>
-        <p:txBody>
-          <a:bodyPr rtlCol="0" anchor="ctr"/>
-          <a:lstStyle/>
-          <a:p>
-            <a:pPr algn="ctr">
-              <a:defRPr sz="1200" b="1">
-                <a:solidFill>
-                  <a:srgbClr val="FFFFFF"/>
-                </a:solidFill>
-              </a:defRPr>
-            </a:pPr>
-            <a:r>
-              <a:t>1. Accurate Stock Tracking</a:t>
-            </a:r>
-          </a:p>
-        </p:txBody>
-      </p:sp>
-      <p:sp>
-        <p:nvSpPr>
-          <p:cNvPr id="8" name="TextBox 7"/>
-          <p:cNvSpPr txBox="1"/>
-          <p:nvPr/>
-        </p:nvSpPr>
-        <p:spPr>
-          <a:xfrm>
-            <a:off x="1097280" y="1755648"/>
-            <a:ext cx="4663440" cy="1234440"/>
-          </a:xfrm>
-          <a:prstGeom prst="rect">
-            <a:avLst/>
-          </a:prstGeom>
-          <a:noFill/>
-        </p:spPr>
-        <p:txBody>
-          <a:bodyPr wrap="square">
-            <a:spAutoFit/>
-          </a:bodyPr>
-          <a:lstStyle/>
-          <a:p>
-            <a:pPr>
-              <a:lnSpc>
-                <a:spcPct val="125000"/>
-              </a:lnSpc>
-              <a:defRPr sz="1100">
-                <a:solidFill>
-                  <a:srgbClr val="0F172A"/>
-                </a:solidFill>
-              </a:defRPr>
-            </a:pPr>
-            <a:r>
-              <a:t>Maintains exact real-time quantities and batch expiration dates across all 6 food groups with zero data loss.</a:t>
-            </a:r>
-          </a:p>
-        </p:txBody>
-      </p:sp>
-      <p:sp>
-        <p:nvSpPr>
-          <p:cNvPr id="9" name="Rounded Rectangle 8"/>
-          <p:cNvSpPr/>
-          <p:nvPr/>
-        </p:nvSpPr>
-        <p:spPr>
-          <a:xfrm>
-            <a:off x="6217920" y="1261872"/>
-            <a:ext cx="5029200" cy="1874519"/>
-          </a:xfrm>
-          <a:prstGeom prst="roundRect">
-            <a:avLst/>
-          </a:prstGeom>
-          <a:solidFill>
-            <a:srgbClr val="FFFFFF"/>
-          </a:solidFill>
-          <a:ln w="12700">
-            <a:solidFill>
-              <a:srgbClr val="CBD5E1"/>
-            </a:solidFill>
-          </a:ln>
-        </p:spPr>
-        <p:style>
-          <a:lnRef idx="1">
-            <a:schemeClr val="accent1"/>
-          </a:lnRef>
-          <a:fillRef idx="3">
-            <a:schemeClr val="accent1"/>
-          </a:fillRef>
-          <a:effectRef idx="2">
-            <a:schemeClr val="accent1"/>
-          </a:effectRef>
-          <a:fontRef idx="minor">
-            <a:schemeClr val="lt1"/>
-          </a:fontRef>
-        </p:style>
-        <p:txBody>
-          <a:bodyPr rtlCol="0" anchor="ctr"/>
-          <a:lstStyle/>
-          <a:p>
-            <a:pPr algn="ctr"/>
-          </a:p>
-        </p:txBody>
-      </p:sp>
-      <p:sp>
-        <p:nvSpPr>
-          <p:cNvPr id="10" name="Rectangle 9"/>
-          <p:cNvSpPr/>
-          <p:nvPr/>
-        </p:nvSpPr>
-        <p:spPr>
-          <a:xfrm>
-            <a:off x="6217920" y="1261872"/>
-            <a:ext cx="5029200" cy="384048"/>
-          </a:xfrm>
-          <a:prstGeom prst="rect">
-            <a:avLst/>
-          </a:prstGeom>
-          <a:solidFill>
-            <a:srgbClr val="10B981"/>
-          </a:solidFill>
-          <a:ln>
-            <a:noFill/>
-          </a:ln>
-        </p:spPr>
-        <p:style>
-          <a:lnRef idx="1">
-            <a:schemeClr val="accent1"/>
-          </a:lnRef>
-          <a:fillRef idx="3">
-            <a:schemeClr val="accent1"/>
-          </a:fillRef>
-          <a:effectRef idx="2">
-            <a:schemeClr val="accent1"/>
-          </a:effectRef>
-          <a:fontRef idx="minor">
-            <a:schemeClr val="lt1"/>
-          </a:fontRef>
-        </p:style>
-        <p:txBody>
-          <a:bodyPr rtlCol="0" anchor="ctr"/>
-          <a:lstStyle/>
-          <a:p>
-            <a:pPr algn="ctr">
-              <a:defRPr sz="1200" b="1">
-                <a:solidFill>
-                  <a:srgbClr val="FFFFFF"/>
-                </a:solidFill>
-              </a:defRPr>
-            </a:pPr>
-            <a:r>
-              <a:t>2. Instant Material Discovery</a:t>
-            </a:r>
-          </a:p>
-        </p:txBody>
-      </p:sp>
-      <p:sp>
-        <p:nvSpPr>
-          <p:cNvPr id="11" name="TextBox 10"/>
-          <p:cNvSpPr txBox="1"/>
-          <p:nvPr/>
-        </p:nvSpPr>
-        <p:spPr>
-          <a:xfrm>
-            <a:off x="6400800" y="1755648"/>
-            <a:ext cx="4663440" cy="1234440"/>
-          </a:xfrm>
-          <a:prstGeom prst="rect">
-            <a:avLst/>
-          </a:prstGeom>
-          <a:noFill/>
-        </p:spPr>
-        <p:txBody>
-          <a:bodyPr wrap="square">
-            <a:spAutoFit/>
-          </a:bodyPr>
-          <a:lstStyle/>
-          <a:p>
-            <a:pPr>
-              <a:lnSpc>
-                <a:spcPct val="125000"/>
-              </a:lnSpc>
-              <a:defRPr sz="1100">
-                <a:solidFill>
-                  <a:srgbClr val="0F172A"/>
-                </a:solidFill>
-              </a:defRPr>
-            </a:pPr>
-            <a:r>
-              <a:t>Category filter dropdowns and keyword search in Stock-In/Out modals allow users to find items in seconds.</a:t>
-            </a:r>
-          </a:p>
-        </p:txBody>
-      </p:sp>
-      <p:sp>
-        <p:nvSpPr>
-          <p:cNvPr id="12" name="Rounded Rectangle 11"/>
-          <p:cNvSpPr/>
-          <p:nvPr/>
-        </p:nvSpPr>
-        <p:spPr>
-          <a:xfrm>
-            <a:off x="914400" y="3273552"/>
-            <a:ext cx="5029200" cy="1874519"/>
-          </a:xfrm>
-          <a:prstGeom prst="roundRect">
-            <a:avLst/>
-          </a:prstGeom>
-          <a:solidFill>
-            <a:srgbClr val="FFFFFF"/>
-          </a:solidFill>
-          <a:ln w="12700">
-            <a:solidFill>
-              <a:srgbClr val="CBD5E1"/>
-            </a:solidFill>
-          </a:ln>
-        </p:spPr>
-        <p:style>
-          <a:lnRef idx="1">
-            <a:schemeClr val="accent1"/>
-          </a:lnRef>
-          <a:fillRef idx="3">
-            <a:schemeClr val="accent1"/>
-          </a:fillRef>
-          <a:effectRef idx="2">
-            <a:schemeClr val="accent1"/>
-          </a:effectRef>
-          <a:fontRef idx="minor">
-            <a:schemeClr val="lt1"/>
-          </a:fontRef>
-        </p:style>
-        <p:txBody>
-          <a:bodyPr rtlCol="0" anchor="ctr"/>
-          <a:lstStyle/>
-          <a:p>
-            <a:pPr algn="ctr"/>
-          </a:p>
-        </p:txBody>
-      </p:sp>
-      <p:sp>
-        <p:nvSpPr>
-          <p:cNvPr id="13" name="Rectangle 12"/>
-          <p:cNvSpPr/>
-          <p:nvPr/>
-        </p:nvSpPr>
-        <p:spPr>
-          <a:xfrm>
-            <a:off x="914400" y="3273552"/>
-            <a:ext cx="5029200" cy="384048"/>
-          </a:xfrm>
-          <a:prstGeom prst="rect">
-            <a:avLst/>
-          </a:prstGeom>
-          <a:solidFill>
-            <a:srgbClr val="F59E0B"/>
-          </a:solidFill>
-          <a:ln>
-            <a:noFill/>
-          </a:ln>
-        </p:spPr>
-        <p:style>
-          <a:lnRef idx="1">
-            <a:schemeClr val="accent1"/>
-          </a:lnRef>
-          <a:fillRef idx="3">
-            <a:schemeClr val="accent1"/>
-          </a:fillRef>
-          <a:effectRef idx="2">
-            <a:schemeClr val="accent1"/>
-          </a:effectRef>
-          <a:fontRef idx="minor">
-            <a:schemeClr val="lt1"/>
-          </a:fontRef>
-        </p:style>
-        <p:txBody>
-          <a:bodyPr rtlCol="0" anchor="ctr"/>
-          <a:lstStyle/>
-          <a:p>
-            <a:pPr algn="ctr">
-              <a:defRPr sz="1200" b="1">
-                <a:solidFill>
-                  <a:srgbClr val="FFFFFF"/>
-                </a:solidFill>
-              </a:defRPr>
-            </a:pPr>
-            <a:r>
-              <a:t>3. Proactive Spoilage Prevention</a:t>
-            </a:r>
-          </a:p>
-        </p:txBody>
-      </p:sp>
-      <p:sp>
-        <p:nvSpPr>
-          <p:cNvPr id="14" name="TextBox 13"/>
-          <p:cNvSpPr txBox="1"/>
-          <p:nvPr/>
-        </p:nvSpPr>
-        <p:spPr>
-          <a:xfrm>
-            <a:off x="1097280" y="3767328"/>
-            <a:ext cx="4663440" cy="1234440"/>
-          </a:xfrm>
-          <a:prstGeom prst="rect">
-            <a:avLst/>
-          </a:prstGeom>
-          <a:noFill/>
-        </p:spPr>
-        <p:txBody>
-          <a:bodyPr wrap="square">
-            <a:spAutoFit/>
-          </a:bodyPr>
-          <a:lstStyle/>
-          <a:p>
-            <a:pPr>
-              <a:lnSpc>
-                <a:spcPct val="125000"/>
-              </a:lnSpc>
-              <a:defRPr sz="1100">
-                <a:solidFill>
-                  <a:srgbClr val="0F172A"/>
-                </a:solidFill>
-              </a:defRPr>
-            </a:pPr>
-            <a:r>
-              <a:t>3-day lookahead expiration warnings and nearest expiry tags ensure perishable ingredients are used before spoiling.</a:t>
-            </a:r>
-          </a:p>
-        </p:txBody>
-      </p:sp>
-      <p:sp>
-        <p:nvSpPr>
-          <p:cNvPr id="15" name="Rounded Rectangle 14"/>
-          <p:cNvSpPr/>
-          <p:nvPr/>
-        </p:nvSpPr>
-        <p:spPr>
-          <a:xfrm>
-            <a:off x="6217920" y="3273552"/>
-            <a:ext cx="5029200" cy="1874519"/>
-          </a:xfrm>
-          <a:prstGeom prst="roundRect">
-            <a:avLst/>
-          </a:prstGeom>
-          <a:solidFill>
-            <a:srgbClr val="FFFFFF"/>
-          </a:solidFill>
-          <a:ln w="12700">
-            <a:solidFill>
-              <a:srgbClr val="CBD5E1"/>
-            </a:solidFill>
-          </a:ln>
-        </p:spPr>
-        <p:style>
-          <a:lnRef idx="1">
-            <a:schemeClr val="accent1"/>
-          </a:lnRef>
-          <a:fillRef idx="3">
-            <a:schemeClr val="accent1"/>
-          </a:fillRef>
-          <a:effectRef idx="2">
-            <a:schemeClr val="accent1"/>
-          </a:effectRef>
-          <a:fontRef idx="minor">
-            <a:schemeClr val="lt1"/>
-          </a:fontRef>
-        </p:style>
-        <p:txBody>
-          <a:bodyPr rtlCol="0" anchor="ctr"/>
-          <a:lstStyle/>
-          <a:p>
-            <a:pPr algn="ctr"/>
-          </a:p>
-        </p:txBody>
-      </p:sp>
-      <p:sp>
-        <p:nvSpPr>
-          <p:cNvPr id="16" name="Rectangle 15"/>
-          <p:cNvSpPr/>
-          <p:nvPr/>
-        </p:nvSpPr>
-        <p:spPr>
-          <a:xfrm>
-            <a:off x="6217920" y="3273552"/>
-            <a:ext cx="5029200" cy="384048"/>
-          </a:xfrm>
-          <a:prstGeom prst="rect">
-            <a:avLst/>
-          </a:prstGeom>
-          <a:solidFill>
-            <a:srgbClr val="1E40AF"/>
-          </a:solidFill>
-          <a:ln>
-            <a:noFill/>
-          </a:ln>
-        </p:spPr>
-        <p:style>
-          <a:lnRef idx="1">
-            <a:schemeClr val="accent1"/>
-          </a:lnRef>
-          <a:fillRef idx="3">
-            <a:schemeClr val="accent1"/>
-          </a:fillRef>
-          <a:effectRef idx="2">
-            <a:schemeClr val="accent1"/>
-          </a:effectRef>
-          <a:fontRef idx="minor">
-            <a:schemeClr val="lt1"/>
-          </a:fontRef>
-        </p:style>
-        <p:txBody>
-          <a:bodyPr rtlCol="0" anchor="ctr"/>
-          <a:lstStyle/>
-          <a:p>
-            <a:pPr algn="ctr">
-              <a:defRPr sz="1200" b="1">
-                <a:solidFill>
-                  <a:srgbClr val="FFFFFF"/>
-                </a:solidFill>
-              </a:defRPr>
-            </a:pPr>
-            <a:r>
-              <a:t>4. Automated Reordering</a:t>
-            </a:r>
-          </a:p>
-        </p:txBody>
-      </p:sp>
-      <p:sp>
-        <p:nvSpPr>
-          <p:cNvPr id="17" name="TextBox 16"/>
-          <p:cNvSpPr txBox="1"/>
-          <p:nvPr/>
-        </p:nvSpPr>
-        <p:spPr>
-          <a:xfrm>
-            <a:off x="6400800" y="3767328"/>
-            <a:ext cx="4663440" cy="1234440"/>
-          </a:xfrm>
-          <a:prstGeom prst="rect">
-            <a:avLst/>
-          </a:prstGeom>
-          <a:noFill/>
-        </p:spPr>
-        <p:txBody>
-          <a:bodyPr wrap="square">
-            <a:spAutoFit/>
-          </a:bodyPr>
-          <a:lstStyle/>
-          <a:p>
-            <a:pPr>
-              <a:lnSpc>
-                <a:spcPct val="125000"/>
-              </a:lnSpc>
-              <a:defRPr sz="1100">
-                <a:solidFill>
-                  <a:srgbClr val="0F172A"/>
-                </a:solidFill>
-              </a:defRPr>
-            </a:pPr>
-            <a:r>
-              <a:t>Calculates required restock amounts automatically when stock falls below threshold, simplifying grocery planning.</a:t>
-            </a:r>
-          </a:p>
-        </p:txBody>
-      </p:sp>
-      <p:sp>
-        <p:nvSpPr>
-          <p:cNvPr id="18" name="Rounded Rectangle 17"/>
-          <p:cNvSpPr/>
-          <p:nvPr/>
-        </p:nvSpPr>
-        <p:spPr>
-          <a:xfrm>
-            <a:off x="914400" y="5440680"/>
-            <a:ext cx="10332720" cy="868680"/>
-          </a:xfrm>
-          <a:prstGeom prst="roundRect">
-            <a:avLst/>
-          </a:prstGeom>
-          <a:solidFill>
-            <a:srgbClr val="0F172A"/>
-          </a:solidFill>
-          <a:ln w="25400">
-            <a:solidFill>
-              <a:srgbClr val="10B981"/>
-            </a:solidFill>
-          </a:ln>
-        </p:spPr>
-        <p:style>
-          <a:lnRef idx="1">
-            <a:schemeClr val="accent1"/>
-          </a:lnRef>
-          <a:fillRef idx="3">
-            <a:schemeClr val="accent1"/>
-          </a:fillRef>
-          <a:effectRef idx="2">
-            <a:schemeClr val="accent1"/>
-          </a:effectRef>
-          <a:fontRef idx="minor">
-            <a:schemeClr val="lt1"/>
-          </a:fontRef>
-        </p:style>
-        <p:txBody>
-          <a:bodyPr rtlCol="0" anchor="ctr"/>
-          <a:lstStyle/>
-          <a:p>
-            <a:pPr algn="ctr"/>
-          </a:p>
-        </p:txBody>
-      </p:sp>
-      <p:sp>
-        <p:nvSpPr>
-          <p:cNvPr id="19" name="TextBox 18"/>
-          <p:cNvSpPr txBox="1"/>
-          <p:nvPr/>
-        </p:nvSpPr>
-        <p:spPr>
-          <a:xfrm>
-            <a:off x="1097280" y="5486400"/>
-            <a:ext cx="9966960" cy="777240"/>
-          </a:xfrm>
-          <a:prstGeom prst="rect">
-            <a:avLst/>
-          </a:prstGeom>
-          <a:noFill/>
-        </p:spPr>
-        <p:txBody>
-          <a:bodyPr wrap="square">
-            <a:spAutoFit/>
-          </a:bodyPr>
-          <a:lstStyle/>
-          <a:p>
-            <a:pPr>
-              <a:defRPr sz="1000" b="1">
-                <a:solidFill>
-                  <a:srgbClr val="0EA5E9"/>
-                </a:solidFill>
-              </a:defRPr>
-            </a:pPr>
-            <a:r>
+              </a:defRPr>
+            </a:pPr>
+            <a:r>
+              <a:rPr dirty="0"/>
               <a:t>🌐 LIVE PRODUCTION DEPLOYMENT (VERCEL)</a:t>
             </a:r>
           </a:p>
@@ -6584,43 +4954,8 @@
               </a:defRPr>
             </a:pPr>
             <a:r>
+              <a:rPr dirty="0"/>
               <a:t>https://refrigerator-inventory-system.vercel.app/</a:t>
-            </a:r>
-          </a:p>
-        </p:txBody>
-      </p:sp>
-      <p:sp>
-        <p:nvSpPr>
-          <p:cNvPr id="20" name="TextBox 19"/>
-          <p:cNvSpPr txBox="1"/>
-          <p:nvPr/>
-        </p:nvSpPr>
-        <p:spPr>
-          <a:xfrm>
-            <a:off x="731520" y="6473952"/>
-            <a:ext cx="10728655" cy="274320"/>
-          </a:xfrm>
-          <a:prstGeom prst="rect">
-            <a:avLst/>
-          </a:prstGeom>
-          <a:noFill/>
-        </p:spPr>
-        <p:txBody>
-          <a:bodyPr wrap="none">
-            <a:spAutoFit/>
-          </a:bodyPr>
-          <a:lstStyle/>
-          <a:p>
-            <a:pPr>
-              <a:defRPr sz="900">
-                <a:solidFill>
-                  <a:srgbClr val="475569"/>
-                </a:solidFill>
-                <a:latin typeface="Arial"/>
-              </a:defRPr>
-            </a:pPr>
-            <a:r>
-              <a:t>Refrigerator &amp; Pantry Inventory System Prototype   •   Slide 13 of 13</a:t>
             </a:r>
           </a:p>
         </p:txBody>
@@ -6634,7 +4969,7 @@
 </file>
 
 <file path=ppt/slides/slide2.xml><?xml version="1.0" encoding="utf-8"?>
-<p:sld xmlns:a="http://schemas.openxmlformats.org/drawingml/2006/main" xmlns:p="http://schemas.openxmlformats.org/presentationml/2006/main" xmlns:r="http://schemas.openxmlformats.org/officeDocument/2006/relationships">
+<p:sld xmlns:a="http://schemas.openxmlformats.org/drawingml/2006/main" xmlns:r="http://schemas.openxmlformats.org/officeDocument/2006/relationships" xmlns:p="http://schemas.openxmlformats.org/presentationml/2006/main">
   <p:cSld>
     <p:spTree>
       <p:nvGrpSpPr>
@@ -6642,7 +4977,14 @@
         <p:cNvGrpSpPr/>
         <p:nvPr/>
       </p:nvGrpSpPr>
-      <p:grpSpPr/>
+      <p:grpSpPr>
+        <a:xfrm>
+          <a:off x="0" y="0"/>
+          <a:ext cx="0" cy="0"/>
+          <a:chOff x="0" y="0"/>
+          <a:chExt cx="0" cy="0"/>
+        </a:xfrm>
+      </p:grpSpPr>
       <p:sp>
         <p:nvSpPr>
           <p:cNvPr id="2" name="Rectangle 1"/>
@@ -6685,6 +5027,7 @@
           <a:lstStyle/>
           <a:p>
             <a:pPr algn="ctr"/>
+            <a:endParaRPr/>
           </a:p>
         </p:txBody>
       </p:sp>
@@ -6728,6 +5071,7 @@
           <a:lstStyle/>
           <a:p>
             <a:pPr algn="ctr"/>
+            <a:endParaRPr/>
           </a:p>
         </p:txBody>
       </p:sp>
@@ -6845,6 +5189,7 @@
           <a:lstStyle/>
           <a:p>
             <a:pPr algn="ctr"/>
+            <a:endParaRPr/>
           </a:p>
         </p:txBody>
       </p:sp>
@@ -6977,6 +5322,7 @@
           <a:lstStyle/>
           <a:p>
             <a:pPr algn="ctr"/>
+            <a:endParaRPr/>
           </a:p>
         </p:txBody>
       </p:sp>
@@ -7109,6 +5455,7 @@
           <a:lstStyle/>
           <a:p>
             <a:pPr algn="ctr"/>
+            <a:endParaRPr/>
           </a:p>
         </p:txBody>
       </p:sp>
@@ -7241,6 +5588,7 @@
           <a:lstStyle/>
           <a:p>
             <a:pPr algn="ctr"/>
+            <a:endParaRPr/>
           </a:p>
         </p:txBody>
       </p:sp>
@@ -7291,8 +5639,14 @@
               </a:defRPr>
             </a:pPr>
             <a:r>
-              <a:t>Multi-Tier Health Badges</a:t>
-            </a:r>
+              <a:rPr dirty="0"/>
+              <a:t> </a:t>
+            </a:r>
+            <a:r>
+              <a:rPr lang="en-IN" dirty="0"/>
+              <a:t>Real-time</a:t>
+            </a:r>
+            <a:endParaRPr dirty="0"/>
           </a:p>
         </p:txBody>
       </p:sp>
@@ -7373,6 +5727,7 @@
           <a:lstStyle/>
           <a:p>
             <a:pPr algn="ctr"/>
+            <a:endParaRPr/>
           </a:p>
         </p:txBody>
       </p:sp>
@@ -7505,6 +5860,7 @@
           <a:lstStyle/>
           <a:p>
             <a:pPr algn="ctr"/>
+            <a:endParaRPr/>
           </a:p>
         </p:txBody>
       </p:sp>
@@ -7591,42 +5947,6 @@
             </a:pPr>
             <a:r>
               <a:t>Automatically generates replenishment lists when stock drops below minimum thresholds, with calculated order quantities.</a:t>
-            </a:r>
-          </a:p>
-        </p:txBody>
-      </p:sp>
-      <p:sp>
-        <p:nvSpPr>
-          <p:cNvPr id="24" name="TextBox 23"/>
-          <p:cNvSpPr txBox="1"/>
-          <p:nvPr/>
-        </p:nvSpPr>
-        <p:spPr>
-          <a:xfrm>
-            <a:off x="731520" y="6473952"/>
-            <a:ext cx="10728655" cy="274320"/>
-          </a:xfrm>
-          <a:prstGeom prst="rect">
-            <a:avLst/>
-          </a:prstGeom>
-          <a:noFill/>
-        </p:spPr>
-        <p:txBody>
-          <a:bodyPr wrap="none">
-            <a:spAutoFit/>
-          </a:bodyPr>
-          <a:lstStyle/>
-          <a:p>
-            <a:pPr>
-              <a:defRPr sz="900">
-                <a:solidFill>
-                  <a:srgbClr val="475569"/>
-                </a:solidFill>
-                <a:latin typeface="Arial"/>
-              </a:defRPr>
-            </a:pPr>
-            <a:r>
-              <a:t>Refrigerator &amp; Pantry Inventory System Prototype   •   Slide 2 of 13</a:t>
             </a:r>
           </a:p>
         </p:txBody>
@@ -7640,7 +5960,7 @@
 </file>
 
 <file path=ppt/slides/slide3.xml><?xml version="1.0" encoding="utf-8"?>
-<p:sld xmlns:a="http://schemas.openxmlformats.org/drawingml/2006/main" xmlns:p="http://schemas.openxmlformats.org/presentationml/2006/main" xmlns:r="http://schemas.openxmlformats.org/officeDocument/2006/relationships">
+<p:sld xmlns:a="http://schemas.openxmlformats.org/drawingml/2006/main" xmlns:r="http://schemas.openxmlformats.org/officeDocument/2006/relationships" xmlns:p="http://schemas.openxmlformats.org/presentationml/2006/main">
   <p:cSld>
     <p:spTree>
       <p:nvGrpSpPr>
@@ -7648,7 +5968,14 @@
         <p:cNvGrpSpPr/>
         <p:nvPr/>
       </p:nvGrpSpPr>
-      <p:grpSpPr/>
+      <p:grpSpPr>
+        <a:xfrm>
+          <a:off x="0" y="0"/>
+          <a:ext cx="0" cy="0"/>
+          <a:chOff x="0" y="0"/>
+          <a:chExt cx="0" cy="0"/>
+        </a:xfrm>
+      </p:grpSpPr>
       <p:sp>
         <p:nvSpPr>
           <p:cNvPr id="2" name="Rectangle 1"/>
@@ -7691,6 +6018,7 @@
           <a:lstStyle/>
           <a:p>
             <a:pPr algn="ctr"/>
+            <a:endParaRPr/>
           </a:p>
         </p:txBody>
       </p:sp>
@@ -7734,6 +6062,7 @@
           <a:lstStyle/>
           <a:p>
             <a:pPr algn="ctr"/>
+            <a:endParaRPr/>
           </a:p>
         </p:txBody>
       </p:sp>
@@ -7851,6 +6180,7 @@
           <a:lstStyle/>
           <a:p>
             <a:pPr algn="ctr"/>
+            <a:endParaRPr/>
           </a:p>
         </p:txBody>
       </p:sp>
@@ -8013,6 +6343,7 @@
           <a:lstStyle/>
           <a:p>
             <a:pPr algn="ctr"/>
+            <a:endParaRPr/>
           </a:p>
         </p:txBody>
       </p:sp>
@@ -8175,6 +6506,7 @@
           <a:lstStyle/>
           <a:p>
             <a:pPr algn="ctr"/>
+            <a:endParaRPr/>
           </a:p>
         </p:txBody>
       </p:sp>
@@ -8337,6 +6669,7 @@
           <a:lstStyle/>
           <a:p>
             <a:pPr algn="ctr"/>
+            <a:endParaRPr/>
           </a:p>
         </p:txBody>
       </p:sp>
@@ -8499,6 +6832,7 @@
           <a:lstStyle/>
           <a:p>
             <a:pPr algn="ctr"/>
+            <a:endParaRPr/>
           </a:p>
         </p:txBody>
       </p:sp>
@@ -8661,6 +6995,7 @@
           <a:lstStyle/>
           <a:p>
             <a:pPr algn="ctr"/>
+            <a:endParaRPr/>
           </a:p>
         </p:txBody>
       </p:sp>
@@ -8777,42 +7112,6 @@
             </a:pPr>
             <a:r>
               <a:t>• Items: Chicken Breast, Olive Oil, Black Pepper, Soy Sauce</a:t>
-            </a:r>
-          </a:p>
-        </p:txBody>
-      </p:sp>
-      <p:sp>
-        <p:nvSpPr>
-          <p:cNvPr id="24" name="TextBox 23"/>
-          <p:cNvSpPr txBox="1"/>
-          <p:nvPr/>
-        </p:nvSpPr>
-        <p:spPr>
-          <a:xfrm>
-            <a:off x="731520" y="6473952"/>
-            <a:ext cx="10728655" cy="274320"/>
-          </a:xfrm>
-          <a:prstGeom prst="rect">
-            <a:avLst/>
-          </a:prstGeom>
-          <a:noFill/>
-        </p:spPr>
-        <p:txBody>
-          <a:bodyPr wrap="none">
-            <a:spAutoFit/>
-          </a:bodyPr>
-          <a:lstStyle/>
-          <a:p>
-            <a:pPr>
-              <a:defRPr sz="900">
-                <a:solidFill>
-                  <a:srgbClr val="475569"/>
-                </a:solidFill>
-                <a:latin typeface="Arial"/>
-              </a:defRPr>
-            </a:pPr>
-            <a:r>
-              <a:t>Refrigerator &amp; Pantry Inventory System Prototype   •   Slide 3 of 13</a:t>
             </a:r>
           </a:p>
         </p:txBody>
@@ -8826,7 +7125,7 @@
 </file>
 
 <file path=ppt/slides/slide4.xml><?xml version="1.0" encoding="utf-8"?>
-<p:sld xmlns:a="http://schemas.openxmlformats.org/drawingml/2006/main" xmlns:p="http://schemas.openxmlformats.org/presentationml/2006/main" xmlns:r="http://schemas.openxmlformats.org/officeDocument/2006/relationships">
+<p:sld xmlns:a="http://schemas.openxmlformats.org/drawingml/2006/main" xmlns:r="http://schemas.openxmlformats.org/officeDocument/2006/relationships" xmlns:p="http://schemas.openxmlformats.org/presentationml/2006/main">
   <p:cSld>
     <p:spTree>
       <p:nvGrpSpPr>
@@ -8834,7 +7133,14 @@
         <p:cNvGrpSpPr/>
         <p:nvPr/>
       </p:nvGrpSpPr>
-      <p:grpSpPr/>
+      <p:grpSpPr>
+        <a:xfrm>
+          <a:off x="0" y="0"/>
+          <a:ext cx="0" cy="0"/>
+          <a:chOff x="0" y="0"/>
+          <a:chExt cx="0" cy="0"/>
+        </a:xfrm>
+      </p:grpSpPr>
       <p:sp>
         <p:nvSpPr>
           <p:cNvPr id="2" name="Rectangle 1"/>
@@ -8877,6 +7183,7 @@
           <a:lstStyle/>
           <a:p>
             <a:pPr algn="ctr"/>
+            <a:endParaRPr/>
           </a:p>
         </p:txBody>
       </p:sp>
@@ -8920,6 +7227,7 @@
           <a:lstStyle/>
           <a:p>
             <a:pPr algn="ctr"/>
+            <a:endParaRPr/>
           </a:p>
         </p:txBody>
       </p:sp>
@@ -8990,7 +7298,7 @@
               </a:defRPr>
             </a:pPr>
             <a:r>
-              <a:t>3. Full-Stack System Architecture &amp; Technology Stack</a:t>
+              <a:t>5. Object-Oriented Domain Entities &amp; UML Structure</a:t>
             </a:r>
           </a:p>
         </p:txBody>
@@ -9004,7 +7312,7 @@
         <p:spPr>
           <a:xfrm>
             <a:off x="731520" y="1280160"/>
-            <a:ext cx="3474720" cy="4892040"/>
+            <a:ext cx="3474720" cy="2240280"/>
           </a:xfrm>
           <a:prstGeom prst="roundRect">
             <a:avLst/>
@@ -9037,6 +7345,7 @@
           <a:lstStyle/>
           <a:p>
             <a:pPr algn="ctr"/>
+            <a:endParaRPr/>
           </a:p>
         </p:txBody>
       </p:sp>
@@ -9055,7 +7364,7 @@
             <a:avLst/>
           </a:prstGeom>
           <a:solidFill>
-            <a:srgbClr val="2563EB"/>
+            <a:srgbClr val="0F172A"/>
           </a:solidFill>
           <a:ln>
             <a:noFill/>
@@ -9087,7 +7396,7 @@
               </a:defRPr>
             </a:pPr>
             <a:r>
-              <a:t>Frontend Client Layer</a:t>
+              <a:t>Category | Domain Grouping</a:t>
             </a:r>
           </a:p>
         </p:txBody>
@@ -9100,8 +7409,8 @@
         </p:nvSpPr>
         <p:spPr>
           <a:xfrm>
-            <a:off x="868680" y="1783080"/>
-            <a:ext cx="3200400" cy="4206240"/>
+            <a:off x="822960" y="1737360"/>
+            <a:ext cx="3291840" cy="1691640"/>
           </a:xfrm>
           <a:prstGeom prst="rect">
             <a:avLst/>
@@ -9115,104 +7424,40 @@
           <a:lstStyle/>
           <a:p>
             <a:pPr>
-              <a:defRPr sz="1000" b="1">
-                <a:solidFill>
-                  <a:srgbClr val="475569"/>
-                </a:solidFill>
-              </a:defRPr>
-            </a:pPr>
-            <a:r>
-              <a:t>REACT 18 + VITE (PORT 5173)</a:t>
-            </a:r>
-          </a:p>
-          <a:p>
-            <a:pPr>
               <a:spcBef>
-                <a:spcPts val="1200"/>
+                <a:spcPts val="0"/>
               </a:spcBef>
-              <a:defRPr sz="1100" b="1">
+              <a:defRPr sz="950">
                 <a:solidFill>
                   <a:srgbClr val="0F172A"/>
                 </a:solidFill>
               </a:defRPr>
             </a:pPr>
             <a:r>
-              <a:t>▶ Glassmorphic Dashboard</a:t>
+              <a:t>+ id: int [PK]</a:t>
+            </a:r>
+            <a:br/>
+            <a:r>
+              <a:t>+ name: string</a:t>
+            </a:r>
+            <a:br/>
+            <a:r>
+              <a:t>+ description: string</a:t>
             </a:r>
           </a:p>
           <a:p>
             <a:pPr>
               <a:spcBef>
-                <a:spcPts val="200"/>
+                <a:spcPts val="400"/>
               </a:spcBef>
-              <a:defRPr sz="1000">
+              <a:defRPr sz="950">
                 <a:solidFill>
                   <a:srgbClr val="0F172A"/>
                 </a:solidFill>
               </a:defRPr>
             </a:pPr>
             <a:r>
-              <a:t>Real-time KPI metric counters and top alert banner.</a:t>
-            </a:r>
-          </a:p>
-          <a:p>
-            <a:pPr>
-              <a:spcBef>
-                <a:spcPts val="1200"/>
-              </a:spcBef>
-              <a:defRPr sz="1100" b="1">
-                <a:solidFill>
-                  <a:srgbClr val="0F172A"/>
-                </a:solidFill>
-              </a:defRPr>
-            </a:pPr>
-            <a:r>
-              <a:t>▶ Category Grid &amp; Table</a:t>
-            </a:r>
-          </a:p>
-          <a:p>
-            <a:pPr>
-              <a:spcBef>
-                <a:spcPts val="200"/>
-              </a:spcBef>
-              <a:defRPr sz="1000">
-                <a:solidFill>
-                  <a:srgbClr val="0F172A"/>
-                </a:solidFill>
-              </a:defRPr>
-            </a:pPr>
-            <a:r>
-              <a:t>Searchable catalog with 6 food category tabs &amp; health filters.</a:t>
-            </a:r>
-          </a:p>
-          <a:p>
-            <a:pPr>
-              <a:spcBef>
-                <a:spcPts val="1200"/>
-              </a:spcBef>
-              <a:defRPr sz="1100" b="1">
-                <a:solidFill>
-                  <a:srgbClr val="0F172A"/>
-                </a:solidFill>
-              </a:defRPr>
-            </a:pPr>
-            <a:r>
-              <a:t>▶ Interactive Modals</a:t>
-            </a:r>
-          </a:p>
-          <a:p>
-            <a:pPr>
-              <a:spcBef>
-                <a:spcPts val="200"/>
-              </a:spcBef>
-              <a:defRPr sz="1000">
-                <a:solidFill>
-                  <a:srgbClr val="0F172A"/>
-                </a:solidFill>
-              </a:defRPr>
-            </a:pPr>
-            <a:r>
-              <a:t>Dedicated Stock-In, Stock-Out, New Item, and Shopping List modals.</a:t>
+              <a:t>+ getItems(): List&lt;InventoryItem&gt;</a:t>
             </a:r>
           </a:p>
         </p:txBody>
@@ -9226,7 +7471,7 @@
         <p:spPr>
           <a:xfrm>
             <a:off x="4343400" y="1280160"/>
-            <a:ext cx="3474720" cy="4892040"/>
+            <a:ext cx="3474720" cy="2240280"/>
           </a:xfrm>
           <a:prstGeom prst="roundRect">
             <a:avLst/>
@@ -9259,6 +7504,7 @@
           <a:lstStyle/>
           <a:p>
             <a:pPr algn="ctr"/>
+            <a:endParaRPr/>
           </a:p>
         </p:txBody>
       </p:sp>
@@ -9277,7 +7523,7 @@
             <a:avLst/>
           </a:prstGeom>
           <a:solidFill>
-            <a:srgbClr val="1E40AF"/>
+            <a:srgbClr val="0F172A"/>
           </a:solidFill>
           <a:ln>
             <a:noFill/>
@@ -9309,7 +7555,7 @@
               </a:defRPr>
             </a:pPr>
             <a:r>
-              <a:t>REST API Backend Layer</a:t>
+              <a:t>InventoryItem | Core Catalog Entity</a:t>
             </a:r>
           </a:p>
         </p:txBody>
@@ -9322,8 +7568,8 @@
         </p:nvSpPr>
         <p:spPr>
           <a:xfrm>
-            <a:off x="4480560" y="1783080"/>
-            <a:ext cx="3200400" cy="4206240"/>
+            <a:off x="4434840" y="1737360"/>
+            <a:ext cx="3291840" cy="1691640"/>
           </a:xfrm>
           <a:prstGeom prst="rect">
             <a:avLst/>
@@ -9337,104 +7583,56 @@
           <a:lstStyle/>
           <a:p>
             <a:pPr>
-              <a:defRPr sz="1000" b="1">
-                <a:solidFill>
-                  <a:srgbClr val="475569"/>
-                </a:solidFill>
-              </a:defRPr>
-            </a:pPr>
-            <a:r>
-              <a:t>NODE.JS + EXPRESS (PORT 5000)</a:t>
-            </a:r>
-          </a:p>
-          <a:p>
-            <a:pPr>
               <a:spcBef>
-                <a:spcPts val="1200"/>
+                <a:spcPts val="0"/>
               </a:spcBef>
-              <a:defRPr sz="1100" b="1">
+              <a:defRPr sz="950">
                 <a:solidFill>
                   <a:srgbClr val="0F172A"/>
                 </a:solidFill>
               </a:defRPr>
             </a:pPr>
             <a:r>
-              <a:t>▶ CRUD Operations</a:t>
+              <a:t>+ id: int [PK]</a:t>
+            </a:r>
+            <a:br/>
+            <a:r>
+              <a:t>+ categoryId: int [FK]</a:t>
+            </a:r>
+            <a:br/>
+            <a:r>
+              <a:t>+ name: string</a:t>
+            </a:r>
+            <a:br/>
+            <a:r>
+              <a:t>+ unit: string</a:t>
+            </a:r>
+            <a:br/>
+            <a:r>
+              <a:t>+ minThreshold: float</a:t>
             </a:r>
           </a:p>
           <a:p>
             <a:pPr>
               <a:spcBef>
-                <a:spcPts val="200"/>
+                <a:spcPts val="400"/>
               </a:spcBef>
-              <a:defRPr sz="1000">
+              <a:defRPr sz="950">
                 <a:solidFill>
                   <a:srgbClr val="0F172A"/>
                 </a:solidFill>
               </a:defRPr>
             </a:pPr>
             <a:r>
-              <a:t>Endpoints for category, item, and batch transaction management.</a:t>
-            </a:r>
-          </a:p>
-          <a:p>
-            <a:pPr>
-              <a:spcBef>
-                <a:spcPts val="1200"/>
-              </a:spcBef>
-              <a:defRPr sz="1100" b="1">
-                <a:solidFill>
-                  <a:srgbClr val="0F172A"/>
-                </a:solidFill>
-              </a:defRPr>
-            </a:pPr>
-            <a:r>
-              <a:t>▶ Health Computation</a:t>
-            </a:r>
-          </a:p>
-          <a:p>
-            <a:pPr>
-              <a:spcBef>
-                <a:spcPts val="200"/>
-              </a:spcBef>
-              <a:defRPr sz="1000">
-                <a:solidFill>
-                  <a:srgbClr val="0F172A"/>
-                </a:solidFill>
-              </a:defRPr>
-            </a:pPr>
-            <a:r>
-              <a:t>Real-time status calculation (Sufficient, Low Stock, Expiring).</a:t>
-            </a:r>
-          </a:p>
-          <a:p>
-            <a:pPr>
-              <a:spcBef>
-                <a:spcPts val="1200"/>
-              </a:spcBef>
-              <a:defRPr sz="1100" b="1">
-                <a:solidFill>
-                  <a:srgbClr val="0F172A"/>
-                </a:solidFill>
-              </a:defRPr>
-            </a:pPr>
-            <a:r>
-              <a:t>▶ Telemetry Service</a:t>
-            </a:r>
-          </a:p>
-          <a:p>
-            <a:pPr>
-              <a:spcBef>
-                <a:spcPts val="200"/>
-              </a:spcBef>
-              <a:defRPr sz="1000">
-                <a:solidFill>
-                  <a:srgbClr val="0F172A"/>
-                </a:solidFill>
-              </a:defRPr>
-            </a:pPr>
-            <a:r>
-              <a:t>3-day expiration evaluation and shopping list deficit aggregation.</a:t>
+              <a:t>+ calculateCurrentStock(): float</a:t>
+            </a:r>
+            <a:br/>
+            <a:r>
+              <a:t>+ getNearestExpiration(): Date</a:t>
+            </a:r>
+            <a:br/>
+            <a:r>
+              <a:t>+ evaluateStatus(): StatusBadge</a:t>
             </a:r>
           </a:p>
         </p:txBody>
@@ -9448,7 +7646,7 @@
         <p:spPr>
           <a:xfrm>
             <a:off x="7955280" y="1280160"/>
-            <a:ext cx="3474720" cy="4892040"/>
+            <a:ext cx="3474720" cy="2240280"/>
           </a:xfrm>
           <a:prstGeom prst="roundRect">
             <a:avLst/>
@@ -9481,6 +7679,7 @@
           <a:lstStyle/>
           <a:p>
             <a:pPr algn="ctr"/>
+            <a:endParaRPr/>
           </a:p>
         </p:txBody>
       </p:sp>
@@ -9499,7 +7698,7 @@
             <a:avLst/>
           </a:prstGeom>
           <a:solidFill>
-            <a:srgbClr val="10B981"/>
+            <a:srgbClr val="0F172A"/>
           </a:solidFill>
           <a:ln>
             <a:noFill/>
@@ -9531,7 +7730,7 @@
               </a:defRPr>
             </a:pPr>
             <a:r>
-              <a:t>Data Persistence Layer</a:t>
+              <a:t>InventoryTransaction | Batch Movement Record</a:t>
             </a:r>
           </a:p>
         </p:txBody>
@@ -9544,8 +7743,8 @@
         </p:nvSpPr>
         <p:spPr>
           <a:xfrm>
-            <a:off x="8092440" y="1783080"/>
-            <a:ext cx="3200400" cy="4206240"/>
+            <a:off x="8046720" y="1737360"/>
+            <a:ext cx="3291840" cy="1691640"/>
           </a:xfrm>
           <a:prstGeom prst="rect">
             <a:avLst/>
@@ -9559,118 +7758,164 @@
           <a:lstStyle/>
           <a:p>
             <a:pPr>
-              <a:defRPr sz="1000" b="1">
-                <a:solidFill>
-                  <a:srgbClr val="475569"/>
-                </a:solidFill>
-              </a:defRPr>
-            </a:pPr>
-            <a:r>
-              <a:t>SQLITE DATABASE (PANTRY.DB)</a:t>
-            </a:r>
-          </a:p>
-          <a:p>
-            <a:pPr>
               <a:spcBef>
-                <a:spcPts val="1200"/>
+                <a:spcPts val="0"/>
               </a:spcBef>
-              <a:defRPr sz="1100" b="1">
+              <a:defRPr sz="950">
                 <a:solidFill>
                   <a:srgbClr val="0F172A"/>
                 </a:solidFill>
               </a:defRPr>
             </a:pPr>
             <a:r>
-              <a:t>▶ ACID Reliability</a:t>
+              <a:t>+ id: int [PK]</a:t>
+            </a:r>
+            <a:br/>
+            <a:r>
+              <a:t>+ itemId: int [FK]</a:t>
+            </a:r>
+            <a:br/>
+            <a:r>
+              <a:t>+ transactionType: 'IN'|'OUT'</a:t>
+            </a:r>
+            <a:br/>
+            <a:r>
+              <a:t>+ quantity: float</a:t>
             </a:r>
           </a:p>
           <a:p>
             <a:pPr>
               <a:spcBef>
-                <a:spcPts val="200"/>
+                <a:spcPts val="400"/>
               </a:spcBef>
-              <a:defRPr sz="1000">
+              <a:defRPr sz="950">
                 <a:solidFill>
                   <a:srgbClr val="0F172A"/>
                 </a:solidFill>
               </a:defRPr>
             </a:pPr>
             <a:r>
-              <a:t>Atomically records all inflows and outflows with foreign key cascades.</a:t>
-            </a:r>
-          </a:p>
-          <a:p>
-            <a:pPr>
-              <a:spcBef>
-                <a:spcPts val="1200"/>
-              </a:spcBef>
-              <a:defRPr sz="1100" b="1">
-                <a:solidFill>
-                  <a:srgbClr val="0F172A"/>
-                </a:solidFill>
-              </a:defRPr>
-            </a:pPr>
-            <a:r>
-              <a:t>▶ Normalized Tables</a:t>
-            </a:r>
-          </a:p>
-          <a:p>
-            <a:pPr>
-              <a:spcBef>
-                <a:spcPts val="200"/>
-              </a:spcBef>
-              <a:defRPr sz="1000">
-                <a:solidFill>
-                  <a:srgbClr val="0F172A"/>
-                </a:solidFill>
-              </a:defRPr>
-            </a:pPr>
-            <a:r>
-              <a:t>3NF relational schema: categories, items, inventory_transactions.</a:t>
-            </a:r>
-          </a:p>
-          <a:p>
-            <a:pPr>
-              <a:spcBef>
-                <a:spcPts val="1200"/>
-              </a:spcBef>
-              <a:defRPr sz="1100" b="1">
-                <a:solidFill>
-                  <a:srgbClr val="0F172A"/>
-                </a:solidFill>
-              </a:defRPr>
-            </a:pPr>
-            <a:r>
-              <a:t>▶ B-Tree Indexes</a:t>
-            </a:r>
-          </a:p>
-          <a:p>
-            <a:pPr>
-              <a:spcBef>
-                <a:spcPts val="200"/>
-              </a:spcBef>
-              <a:defRPr sz="1000">
-                <a:solidFill>
-                  <a:srgbClr val="0F172A"/>
-                </a:solidFill>
-              </a:defRPr>
-            </a:pPr>
-            <a:r>
-              <a:t>Optimized lookups on category_id and expiration_date.</a:t>
-            </a:r>
-          </a:p>
-        </p:txBody>
-      </p:sp>
-      <p:sp>
-        <p:nvSpPr>
-          <p:cNvPr id="15" name="TextBox 14"/>
+              <a:t>+ purchaseDate: Date</a:t>
+            </a:r>
+            <a:br/>
+            <a:r>
+              <a:t>+ expirationDate: Date</a:t>
+            </a:r>
+            <a:br/>
+            <a:r>
+              <a:t>+ reason: string</a:t>
+            </a:r>
+          </a:p>
+        </p:txBody>
+      </p:sp>
+      <p:sp>
+        <p:nvSpPr>
+          <p:cNvPr id="15" name="Rounded Rectangle 14"/>
+          <p:cNvSpPr/>
+          <p:nvPr/>
+        </p:nvSpPr>
+        <p:spPr>
+          <a:xfrm>
+            <a:off x="731520" y="3703320"/>
+            <a:ext cx="3474720" cy="2240280"/>
+          </a:xfrm>
+          <a:prstGeom prst="roundRect">
+            <a:avLst/>
+          </a:prstGeom>
+          <a:solidFill>
+            <a:srgbClr val="FFFFFF"/>
+          </a:solidFill>
+          <a:ln w="12700">
+            <a:solidFill>
+              <a:srgbClr val="CBD5E1"/>
+            </a:solidFill>
+          </a:ln>
+        </p:spPr>
+        <p:style>
+          <a:lnRef idx="1">
+            <a:schemeClr val="accent1"/>
+          </a:lnRef>
+          <a:fillRef idx="3">
+            <a:schemeClr val="accent1"/>
+          </a:fillRef>
+          <a:effectRef idx="2">
+            <a:schemeClr val="accent1"/>
+          </a:effectRef>
+          <a:fontRef idx="minor">
+            <a:schemeClr val="lt1"/>
+          </a:fontRef>
+        </p:style>
+        <p:txBody>
+          <a:bodyPr rtlCol="0" anchor="ctr"/>
+          <a:lstStyle/>
+          <a:p>
+            <a:pPr algn="ctr"/>
+            <a:endParaRPr/>
+          </a:p>
+        </p:txBody>
+      </p:sp>
+      <p:sp>
+        <p:nvSpPr>
+          <p:cNvPr id="16" name="Rectangle 15"/>
+          <p:cNvSpPr/>
+          <p:nvPr/>
+        </p:nvSpPr>
+        <p:spPr>
+          <a:xfrm>
+            <a:off x="731520" y="3703320"/>
+            <a:ext cx="3474720" cy="384048"/>
+          </a:xfrm>
+          <a:prstGeom prst="rect">
+            <a:avLst/>
+          </a:prstGeom>
+          <a:solidFill>
+            <a:srgbClr val="0F172A"/>
+          </a:solidFill>
+          <a:ln>
+            <a:noFill/>
+          </a:ln>
+        </p:spPr>
+        <p:style>
+          <a:lnRef idx="1">
+            <a:schemeClr val="accent1"/>
+          </a:lnRef>
+          <a:fillRef idx="3">
+            <a:schemeClr val="accent1"/>
+          </a:fillRef>
+          <a:effectRef idx="2">
+            <a:schemeClr val="accent1"/>
+          </a:effectRef>
+          <a:fontRef idx="minor">
+            <a:schemeClr val="lt1"/>
+          </a:fontRef>
+        </p:style>
+        <p:txBody>
+          <a:bodyPr rtlCol="0" anchor="ctr"/>
+          <a:lstStyle/>
+          <a:p>
+            <a:pPr algn="ctr">
+              <a:defRPr sz="1200" b="1">
+                <a:solidFill>
+                  <a:srgbClr val="FFFFFF"/>
+                </a:solidFill>
+              </a:defRPr>
+            </a:pPr>
+            <a:r>
+              <a:t>AlertEngine | Telemetry Service</a:t>
+            </a:r>
+          </a:p>
+        </p:txBody>
+      </p:sp>
+      <p:sp>
+        <p:nvSpPr>
+          <p:cNvPr id="17" name="TextBox 16"/>
           <p:cNvSpPr txBox="1"/>
           <p:nvPr/>
         </p:nvSpPr>
         <p:spPr>
           <a:xfrm>
-            <a:off x="731520" y="6473952"/>
-            <a:ext cx="10728655" cy="274320"/>
+            <a:off x="822960" y="4160520"/>
+            <a:ext cx="3291840" cy="1691640"/>
           </a:xfrm>
           <a:prstGeom prst="rect">
             <a:avLst/>
@@ -9678,21 +7923,323 @@
           <a:noFill/>
         </p:spPr>
         <p:txBody>
-          <a:bodyPr wrap="none">
+          <a:bodyPr wrap="square">
             <a:spAutoFit/>
           </a:bodyPr>
           <a:lstStyle/>
           <a:p>
             <a:pPr>
-              <a:defRPr sz="900">
-                <a:solidFill>
-                  <a:srgbClr val="475569"/>
-                </a:solidFill>
-                <a:latin typeface="Arial"/>
-              </a:defRPr>
-            </a:pPr>
-            <a:r>
-              <a:t>Refrigerator &amp; Pantry Inventory System Prototype   •   Slide 4 of 13</a:t>
+              <a:spcBef>
+                <a:spcPts val="0"/>
+              </a:spcBef>
+              <a:defRPr sz="950">
+                <a:solidFill>
+                  <a:srgbClr val="0F172A"/>
+                </a:solidFill>
+              </a:defRPr>
+            </a:pPr>
+            <a:r>
+              <a:t>+ evaluateExpiringLots(horizonDays=3): List&lt;Alert&gt;</a:t>
+            </a:r>
+            <a:br/>
+            <a:r>
+              <a:t>+ evaluateLowStock(): List&lt;ShoppingListItem&gt;</a:t>
+            </a:r>
+          </a:p>
+        </p:txBody>
+      </p:sp>
+      <p:sp>
+        <p:nvSpPr>
+          <p:cNvPr id="18" name="Rounded Rectangle 17"/>
+          <p:cNvSpPr/>
+          <p:nvPr/>
+        </p:nvSpPr>
+        <p:spPr>
+          <a:xfrm>
+            <a:off x="4343400" y="3703320"/>
+            <a:ext cx="3474720" cy="2240280"/>
+          </a:xfrm>
+          <a:prstGeom prst="roundRect">
+            <a:avLst/>
+          </a:prstGeom>
+          <a:solidFill>
+            <a:srgbClr val="FFFFFF"/>
+          </a:solidFill>
+          <a:ln w="12700">
+            <a:solidFill>
+              <a:srgbClr val="CBD5E1"/>
+            </a:solidFill>
+          </a:ln>
+        </p:spPr>
+        <p:style>
+          <a:lnRef idx="1">
+            <a:schemeClr val="accent1"/>
+          </a:lnRef>
+          <a:fillRef idx="3">
+            <a:schemeClr val="accent1"/>
+          </a:fillRef>
+          <a:effectRef idx="2">
+            <a:schemeClr val="accent1"/>
+          </a:effectRef>
+          <a:fontRef idx="minor">
+            <a:schemeClr val="lt1"/>
+          </a:fontRef>
+        </p:style>
+        <p:txBody>
+          <a:bodyPr rtlCol="0" anchor="ctr"/>
+          <a:lstStyle/>
+          <a:p>
+            <a:pPr algn="ctr"/>
+            <a:endParaRPr/>
+          </a:p>
+        </p:txBody>
+      </p:sp>
+      <p:sp>
+        <p:nvSpPr>
+          <p:cNvPr id="19" name="Rectangle 18"/>
+          <p:cNvSpPr/>
+          <p:nvPr/>
+        </p:nvSpPr>
+        <p:spPr>
+          <a:xfrm>
+            <a:off x="4343400" y="3703320"/>
+            <a:ext cx="3474720" cy="384048"/>
+          </a:xfrm>
+          <a:prstGeom prst="rect">
+            <a:avLst/>
+          </a:prstGeom>
+          <a:solidFill>
+            <a:srgbClr val="0F172A"/>
+          </a:solidFill>
+          <a:ln>
+            <a:noFill/>
+          </a:ln>
+        </p:spPr>
+        <p:style>
+          <a:lnRef idx="1">
+            <a:schemeClr val="accent1"/>
+          </a:lnRef>
+          <a:fillRef idx="3">
+            <a:schemeClr val="accent1"/>
+          </a:fillRef>
+          <a:effectRef idx="2">
+            <a:schemeClr val="accent1"/>
+          </a:effectRef>
+          <a:fontRef idx="minor">
+            <a:schemeClr val="lt1"/>
+          </a:fontRef>
+        </p:style>
+        <p:txBody>
+          <a:bodyPr rtlCol="0" anchor="ctr"/>
+          <a:lstStyle/>
+          <a:p>
+            <a:pPr algn="ctr">
+              <a:defRPr sz="1200" b="1">
+                <a:solidFill>
+                  <a:srgbClr val="FFFFFF"/>
+                </a:solidFill>
+              </a:defRPr>
+            </a:pPr>
+            <a:r>
+              <a:t>StockInPayload | Inbound DTO</a:t>
+            </a:r>
+          </a:p>
+        </p:txBody>
+      </p:sp>
+      <p:sp>
+        <p:nvSpPr>
+          <p:cNvPr id="20" name="TextBox 19"/>
+          <p:cNvSpPr txBox="1"/>
+          <p:nvPr/>
+        </p:nvSpPr>
+        <p:spPr>
+          <a:xfrm>
+            <a:off x="4434840" y="4160520"/>
+            <a:ext cx="3291840" cy="1691640"/>
+          </a:xfrm>
+          <a:prstGeom prst="rect">
+            <a:avLst/>
+          </a:prstGeom>
+          <a:noFill/>
+        </p:spPr>
+        <p:txBody>
+          <a:bodyPr wrap="square">
+            <a:spAutoFit/>
+          </a:bodyPr>
+          <a:lstStyle/>
+          <a:p>
+            <a:pPr>
+              <a:spcBef>
+                <a:spcPts val="0"/>
+              </a:spcBef>
+              <a:defRPr sz="950">
+                <a:solidFill>
+                  <a:srgbClr val="0F172A"/>
+                </a:solidFill>
+              </a:defRPr>
+            </a:pPr>
+            <a:r>
+              <a:t>+ itemId: int</a:t>
+            </a:r>
+            <a:br/>
+            <a:r>
+              <a:t>+ quantity: float</a:t>
+            </a:r>
+            <a:br/>
+            <a:r>
+              <a:t>+ purchaseDate: Date</a:t>
+            </a:r>
+            <a:br/>
+            <a:r>
+              <a:t>+ expirationDate: Date</a:t>
+            </a:r>
+            <a:br/>
+            <a:r>
+              <a:t>+ reason: string</a:t>
+            </a:r>
+          </a:p>
+        </p:txBody>
+      </p:sp>
+      <p:sp>
+        <p:nvSpPr>
+          <p:cNvPr id="21" name="Rounded Rectangle 20"/>
+          <p:cNvSpPr/>
+          <p:nvPr/>
+        </p:nvSpPr>
+        <p:spPr>
+          <a:xfrm>
+            <a:off x="7955280" y="3703320"/>
+            <a:ext cx="3474720" cy="2240280"/>
+          </a:xfrm>
+          <a:prstGeom prst="roundRect">
+            <a:avLst/>
+          </a:prstGeom>
+          <a:solidFill>
+            <a:srgbClr val="FFFFFF"/>
+          </a:solidFill>
+          <a:ln w="12700">
+            <a:solidFill>
+              <a:srgbClr val="CBD5E1"/>
+            </a:solidFill>
+          </a:ln>
+        </p:spPr>
+        <p:style>
+          <a:lnRef idx="1">
+            <a:schemeClr val="accent1"/>
+          </a:lnRef>
+          <a:fillRef idx="3">
+            <a:schemeClr val="accent1"/>
+          </a:fillRef>
+          <a:effectRef idx="2">
+            <a:schemeClr val="accent1"/>
+          </a:effectRef>
+          <a:fontRef idx="minor">
+            <a:schemeClr val="lt1"/>
+          </a:fontRef>
+        </p:style>
+        <p:txBody>
+          <a:bodyPr rtlCol="0" anchor="ctr"/>
+          <a:lstStyle/>
+          <a:p>
+            <a:pPr algn="ctr"/>
+            <a:endParaRPr/>
+          </a:p>
+        </p:txBody>
+      </p:sp>
+      <p:sp>
+        <p:nvSpPr>
+          <p:cNvPr id="22" name="Rectangle 21"/>
+          <p:cNvSpPr/>
+          <p:nvPr/>
+        </p:nvSpPr>
+        <p:spPr>
+          <a:xfrm>
+            <a:off x="7955280" y="3703320"/>
+            <a:ext cx="3474720" cy="384048"/>
+          </a:xfrm>
+          <a:prstGeom prst="rect">
+            <a:avLst/>
+          </a:prstGeom>
+          <a:solidFill>
+            <a:srgbClr val="0F172A"/>
+          </a:solidFill>
+          <a:ln>
+            <a:noFill/>
+          </a:ln>
+        </p:spPr>
+        <p:style>
+          <a:lnRef idx="1">
+            <a:schemeClr val="accent1"/>
+          </a:lnRef>
+          <a:fillRef idx="3">
+            <a:schemeClr val="accent1"/>
+          </a:fillRef>
+          <a:effectRef idx="2">
+            <a:schemeClr val="accent1"/>
+          </a:effectRef>
+          <a:fontRef idx="minor">
+            <a:schemeClr val="lt1"/>
+          </a:fontRef>
+        </p:style>
+        <p:txBody>
+          <a:bodyPr rtlCol="0" anchor="ctr"/>
+          <a:lstStyle/>
+          <a:p>
+            <a:pPr algn="ctr">
+              <a:defRPr sz="1200" b="1">
+                <a:solidFill>
+                  <a:srgbClr val="FFFFFF"/>
+                </a:solidFill>
+              </a:defRPr>
+            </a:pPr>
+            <a:r>
+              <a:t>StockOutPayload | Outbound DTO</a:t>
+            </a:r>
+          </a:p>
+        </p:txBody>
+      </p:sp>
+      <p:sp>
+        <p:nvSpPr>
+          <p:cNvPr id="23" name="TextBox 22"/>
+          <p:cNvSpPr txBox="1"/>
+          <p:nvPr/>
+        </p:nvSpPr>
+        <p:spPr>
+          <a:xfrm>
+            <a:off x="8046720" y="4160520"/>
+            <a:ext cx="3291840" cy="1691640"/>
+          </a:xfrm>
+          <a:prstGeom prst="rect">
+            <a:avLst/>
+          </a:prstGeom>
+          <a:noFill/>
+        </p:spPr>
+        <p:txBody>
+          <a:bodyPr wrap="square">
+            <a:spAutoFit/>
+          </a:bodyPr>
+          <a:lstStyle/>
+          <a:p>
+            <a:pPr>
+              <a:spcBef>
+                <a:spcPts val="0"/>
+              </a:spcBef>
+              <a:defRPr sz="950">
+                <a:solidFill>
+                  <a:srgbClr val="0F172A"/>
+                </a:solidFill>
+              </a:defRPr>
+            </a:pPr>
+            <a:r>
+              <a:t>+ itemId: int</a:t>
+            </a:r>
+            <a:br/>
+            <a:r>
+              <a:t>+ quantity: float</a:t>
+            </a:r>
+            <a:br/>
+            <a:r>
+              <a:t>+ reason: 'Used/Consumed'|'Spoiled/Expired'|'Transferred'</a:t>
             </a:r>
           </a:p>
         </p:txBody>
@@ -9706,7 +8253,7 @@
 </file>
 
 <file path=ppt/slides/slide5.xml><?xml version="1.0" encoding="utf-8"?>
-<p:sld xmlns:a="http://schemas.openxmlformats.org/drawingml/2006/main" xmlns:p="http://schemas.openxmlformats.org/presentationml/2006/main" xmlns:r="http://schemas.openxmlformats.org/officeDocument/2006/relationships">
+<p:sld xmlns:a="http://schemas.openxmlformats.org/drawingml/2006/main" xmlns:r="http://schemas.openxmlformats.org/officeDocument/2006/relationships" xmlns:p="http://schemas.openxmlformats.org/presentationml/2006/main">
   <p:cSld>
     <p:spTree>
       <p:nvGrpSpPr>
@@ -9714,7 +8261,14 @@
         <p:cNvGrpSpPr/>
         <p:nvPr/>
       </p:nvGrpSpPr>
-      <p:grpSpPr/>
+      <p:grpSpPr>
+        <a:xfrm>
+          <a:off x="0" y="0"/>
+          <a:ext cx="0" cy="0"/>
+          <a:chOff x="0" y="0"/>
+          <a:chExt cx="0" cy="0"/>
+        </a:xfrm>
+      </p:grpSpPr>
       <p:sp>
         <p:nvSpPr>
           <p:cNvPr id="2" name="Rectangle 1"/>
@@ -9757,6 +8311,7 @@
           <a:lstStyle/>
           <a:p>
             <a:pPr algn="ctr"/>
+            <a:endParaRPr/>
           </a:p>
         </p:txBody>
       </p:sp>
@@ -9800,6 +8355,7 @@
           <a:lstStyle/>
           <a:p>
             <a:pPr algn="ctr"/>
+            <a:endParaRPr/>
           </a:p>
         </p:txBody>
       </p:sp>
@@ -9870,7 +8426,7 @@
               </a:defRPr>
             </a:pPr>
             <a:r>
-              <a:t>4. Relational Database Schema &amp; Entity Relationships</a:t>
+              <a:t>6. Class-Responsibility-Collaborator (CRC) Cards</a:t>
             </a:r>
           </a:p>
         </p:txBody>
@@ -9884,7 +8440,7 @@
         <p:spPr>
           <a:xfrm>
             <a:off x="731520" y="1280160"/>
-            <a:ext cx="5212080" cy="4892040"/>
+            <a:ext cx="3474720" cy="4892040"/>
           </a:xfrm>
           <a:prstGeom prst="roundRect">
             <a:avLst/>
@@ -9917,6 +8473,7 @@
           <a:lstStyle/>
           <a:p>
             <a:pPr algn="ctr"/>
+            <a:endParaRPr/>
           </a:p>
         </p:txBody>
       </p:sp>
@@ -9929,13 +8486,13 @@
         <p:spPr>
           <a:xfrm>
             <a:off x="731520" y="1280160"/>
-            <a:ext cx="5212080" cy="384048"/>
+            <a:ext cx="3474720" cy="384048"/>
           </a:xfrm>
           <a:prstGeom prst="rect">
             <a:avLst/>
           </a:prstGeom>
           <a:solidFill>
-            <a:srgbClr val="0F172A"/>
+            <a:srgbClr val="2563EB"/>
           </a:solidFill>
           <a:ln>
             <a:noFill/>
@@ -9967,7 +8524,7 @@
               </a:defRPr>
             </a:pPr>
             <a:r>
-              <a:t>Relational SQLite DDL Schema</a:t>
+              <a:t>InventoryItem</a:t>
             </a:r>
           </a:p>
         </p:txBody>
@@ -9981,7 +8538,7 @@
         <p:spPr>
           <a:xfrm>
             <a:off x="868680" y="1783080"/>
-            <a:ext cx="4937760" cy="4206240"/>
+            <a:ext cx="3200400" cy="4206240"/>
           </a:xfrm>
           <a:prstGeom prst="rect">
             <a:avLst/>
@@ -9995,117 +8552,119 @@
           <a:lstStyle/>
           <a:p>
             <a:pPr>
-              <a:defRPr sz="900">
+              <a:defRPr sz="1000" b="1">
                 <a:solidFill>
                   <a:srgbClr val="0F172A"/>
                 </a:solidFill>
-                <a:latin typeface="Courier New"/>
-              </a:defRPr>
-            </a:pPr>
-            <a:r>
-              <a:t>-- 1. Categories Table (1:N with Items)</a:t>
-            </a:r>
-            <a:br/>
-            <a:r>
-              <a:t>CREATE TABLE categories (</a:t>
-            </a:r>
-            <a:br/>
-            <a:r>
-              <a:t>  id INTEGER PRIMARY KEY AUTOINCREMENT,</a:t>
-            </a:r>
-            <a:br/>
-            <a:r>
-              <a:t>  name TEXT UNIQUE NOT NULL,</a:t>
-            </a:r>
-            <a:br/>
-            <a:r>
-              <a:t>  description TEXT</a:t>
-            </a:r>
-            <a:br/>
-            <a:r>
-              <a:t>);</a:t>
-            </a:r>
-            <a:br/>
-            <a:br/>
-            <a:r>
-              <a:t>-- 2. Items Table (1:N with Transactions)</a:t>
-            </a:r>
-            <a:br/>
-            <a:r>
-              <a:t>CREATE TABLE items (</a:t>
-            </a:r>
-            <a:br/>
-            <a:r>
-              <a:t>  id INTEGER PRIMARY KEY AUTOINCREMENT,</a:t>
-            </a:r>
-            <a:br/>
-            <a:r>
-              <a:t>  category_id INTEGER NOT NULL REFERENCES categories(id),</a:t>
-            </a:r>
-            <a:br/>
-            <a:r>
-              <a:t>  name TEXT NOT NULL,</a:t>
-            </a:r>
-            <a:br/>
-            <a:r>
-              <a:t>  unit TEXT NOT NULL, -- kg, liters, g, units</a:t>
-            </a:r>
-            <a:br/>
-            <a:r>
-              <a:t>  min_threshold REAL NOT NULL DEFAULT 1.0,</a:t>
-            </a:r>
-            <a:br/>
-            <a:r>
-              <a:t>  created_at TEXT DEFAULT CURRENT_TIMESTAMP</a:t>
-            </a:r>
-            <a:br/>
-            <a:r>
-              <a:t>);</a:t>
-            </a:r>
-            <a:br/>
-            <a:br/>
-            <a:r>
-              <a:t>-- 3. Inventory Transactions (Batch Inflow / Outflow)</a:t>
-            </a:r>
-            <a:br/>
-            <a:r>
-              <a:t>CREATE TABLE inventory_transactions (</a:t>
-            </a:r>
-            <a:br/>
-            <a:r>
-              <a:t>  id INTEGER PRIMARY KEY AUTOINCREMENT,</a:t>
-            </a:r>
-            <a:br/>
-            <a:r>
-              <a:t>  item_id INTEGER NOT NULL REFERENCES items(id),</a:t>
-            </a:r>
-            <a:br/>
-            <a:r>
-              <a:t>  transaction_type TEXT CHECK(transaction_type IN ('IN','OUT')),</a:t>
-            </a:r>
-            <a:br/>
-            <a:r>
-              <a:t>  quantity REAL NOT NULL,</a:t>
-            </a:r>
-            <a:br/>
-            <a:r>
-              <a:t>  purchase_date TEXT,</a:t>
-            </a:r>
-            <a:br/>
-            <a:r>
-              <a:t>  expiration_date TEXT,</a:t>
-            </a:r>
-            <a:br/>
-            <a:r>
-              <a:t>  timestamp TEXT DEFAULT CURRENT_TIMESTAMP,</a:t>
-            </a:r>
-            <a:br/>
-            <a:r>
-              <a:t>  reason TEXT</a:t>
-            </a:r>
-            <a:br/>
-            <a:r>
-              <a:t>);</a:t>
+              </a:defRPr>
+            </a:pPr>
+            <a:r>
+              <a:t>RESPONSIBILITIES (What it Does):</a:t>
+            </a:r>
+          </a:p>
+          <a:p>
+            <a:pPr>
+              <a:spcBef>
+                <a:spcPts val="300"/>
+              </a:spcBef>
+              <a:defRPr sz="950">
+                <a:solidFill>
+                  <a:srgbClr val="0F172A"/>
+                </a:solidFill>
+              </a:defRPr>
+            </a:pPr>
+            <a:r>
+              <a:t>• Maintains item name, category, unit, and min threshold</a:t>
+            </a:r>
+          </a:p>
+          <a:p>
+            <a:pPr>
+              <a:spcBef>
+                <a:spcPts val="300"/>
+              </a:spcBef>
+              <a:defRPr sz="950">
+                <a:solidFill>
+                  <a:srgbClr val="0F172A"/>
+                </a:solidFill>
+              </a:defRPr>
+            </a:pPr>
+            <a:r>
+              <a:t>• Aggregates total stock balance from transactions</a:t>
+            </a:r>
+          </a:p>
+          <a:p>
+            <a:pPr>
+              <a:spcBef>
+                <a:spcPts val="300"/>
+              </a:spcBef>
+              <a:defRPr sz="950">
+                <a:solidFill>
+                  <a:srgbClr val="0F172A"/>
+                </a:solidFill>
+              </a:defRPr>
+            </a:pPr>
+            <a:r>
+              <a:t>• Evaluates health status (Sufficient, Low, Expiring)</a:t>
+            </a:r>
+          </a:p>
+          <a:p>
+            <a:pPr>
+              <a:spcBef>
+                <a:spcPts val="1400"/>
+              </a:spcBef>
+              <a:defRPr sz="1000" b="1">
+                <a:solidFill>
+                  <a:srgbClr val="2563EB"/>
+                </a:solidFill>
+              </a:defRPr>
+            </a:pPr>
+            <a:r>
+              <a:t>COLLABORATORS (Interacts With):</a:t>
+            </a:r>
+          </a:p>
+          <a:p>
+            <a:pPr>
+              <a:spcBef>
+                <a:spcPts val="300"/>
+              </a:spcBef>
+              <a:defRPr sz="950">
+                <a:solidFill>
+                  <a:srgbClr val="0F172A"/>
+                </a:solidFill>
+              </a:defRPr>
+            </a:pPr>
+            <a:r>
+              <a:t>• Category</a:t>
+            </a:r>
+          </a:p>
+          <a:p>
+            <a:pPr>
+              <a:spcBef>
+                <a:spcPts val="300"/>
+              </a:spcBef>
+              <a:defRPr sz="950">
+                <a:solidFill>
+                  <a:srgbClr val="0F172A"/>
+                </a:solidFill>
+              </a:defRPr>
+            </a:pPr>
+            <a:r>
+              <a:t>• InventoryTransaction</a:t>
+            </a:r>
+          </a:p>
+          <a:p>
+            <a:pPr>
+              <a:spcBef>
+                <a:spcPts val="300"/>
+              </a:spcBef>
+              <a:defRPr sz="950">
+                <a:solidFill>
+                  <a:srgbClr val="0F172A"/>
+                </a:solidFill>
+              </a:defRPr>
+            </a:pPr>
+            <a:r>
+              <a:t>• AlertEngine</a:t>
             </a:r>
           </a:p>
         </p:txBody>
@@ -10118,8 +8677,8 @@
         </p:nvSpPr>
         <p:spPr>
           <a:xfrm>
-            <a:off x="6217920" y="1280160"/>
-            <a:ext cx="5212080" cy="4892040"/>
+            <a:off x="4343400" y="1280160"/>
+            <a:ext cx="3474720" cy="4892040"/>
           </a:xfrm>
           <a:prstGeom prst="roundRect">
             <a:avLst/>
@@ -10152,6 +8711,7 @@
           <a:lstStyle/>
           <a:p>
             <a:pPr algn="ctr"/>
+            <a:endParaRPr/>
           </a:p>
         </p:txBody>
       </p:sp>
@@ -10163,14 +8723,14 @@
         </p:nvSpPr>
         <p:spPr>
           <a:xfrm>
-            <a:off x="6217920" y="1280160"/>
-            <a:ext cx="5212080" cy="384048"/>
+            <a:off x="4343400" y="1280160"/>
+            <a:ext cx="3474720" cy="384048"/>
           </a:xfrm>
           <a:prstGeom prst="rect">
             <a:avLst/>
           </a:prstGeom>
           <a:solidFill>
-            <a:srgbClr val="2563EB"/>
+            <a:srgbClr val="1E40AF"/>
           </a:solidFill>
           <a:ln>
             <a:noFill/>
@@ -10202,7 +8762,7 @@
               </a:defRPr>
             </a:pPr>
             <a:r>
-              <a:t>Data Integrity &amp; Calculation Rules</a:t>
+              <a:t>InventoryTransaction</a:t>
             </a:r>
           </a:p>
         </p:txBody>
@@ -10215,8 +8775,8 @@
         </p:nvSpPr>
         <p:spPr>
           <a:xfrm>
-            <a:off x="6355080" y="1783080"/>
-            <a:ext cx="4937760" cy="4206240"/>
+            <a:off x="4480560" y="1783080"/>
+            <a:ext cx="3200400" cy="4206240"/>
           </a:xfrm>
           <a:prstGeom prst="rect">
             <a:avLst/>
@@ -10230,23 +8790,20 @@
           <a:lstStyle/>
           <a:p>
             <a:pPr>
+              <a:defRPr sz="1000" b="1">
+                <a:solidFill>
+                  <a:srgbClr val="0F172A"/>
+                </a:solidFill>
+              </a:defRPr>
+            </a:pPr>
+            <a:r>
+              <a:t>RESPONSIBILITIES (What it Does):</a:t>
+            </a:r>
+          </a:p>
+          <a:p>
+            <a:pPr>
               <a:spcBef>
-                <a:spcPts val="0"/>
-              </a:spcBef>
-              <a:defRPr sz="1100" b="1">
-                <a:solidFill>
-                  <a:srgbClr val="2563EB"/>
-                </a:solidFill>
-              </a:defRPr>
-            </a:pPr>
-            <a:r>
-              <a:t>✔ Current Stock Aggregation</a:t>
-            </a:r>
-          </a:p>
-          <a:p>
-            <a:pPr>
-              <a:spcBef>
-                <a:spcPts val="200"/>
+                <a:spcPts val="300"/>
               </a:spcBef>
               <a:defRPr sz="950">
                 <a:solidFill>
@@ -10255,28 +8812,13 @@
               </a:defRPr>
             </a:pPr>
             <a:r>
-              <a:t>current_stock = SUM(CASE WHEN type='IN' THEN qty ELSE -qty END) calculated in real time per item.</a:t>
+              <a:t>• Records individual batch inflow and consumption outflow</a:t>
             </a:r>
           </a:p>
           <a:p>
             <a:pPr>
               <a:spcBef>
-                <a:spcPts val="800"/>
-              </a:spcBef>
-              <a:defRPr sz="1100" b="1">
-                <a:solidFill>
-                  <a:srgbClr val="2563EB"/>
-                </a:solidFill>
-              </a:defRPr>
-            </a:pPr>
-            <a:r>
-              <a:t>✔ Nearest Expiration Lookup</a:t>
-            </a:r>
-          </a:p>
-          <a:p>
-            <a:pPr>
-              <a:spcBef>
-                <a:spcPts val="200"/>
+                <a:spcPts val="300"/>
               </a:spcBef>
               <a:defRPr sz="950">
                 <a:solidFill>
@@ -10285,28 +8827,13 @@
               </a:defRPr>
             </a:pPr>
             <a:r>
-              <a:t>MIN(expiration_date) across positive active batches gives the nearest expiry badge.</a:t>
+              <a:t>• Tracks specific purchase and expiration dates</a:t>
             </a:r>
           </a:p>
           <a:p>
             <a:pPr>
               <a:spcBef>
-                <a:spcPts val="800"/>
-              </a:spcBef>
-              <a:defRPr sz="1100" b="1">
-                <a:solidFill>
-                  <a:srgbClr val="2563EB"/>
-                </a:solidFill>
-              </a:defRPr>
-            </a:pPr>
-            <a:r>
-              <a:t>✔ Foreign Key Cascades</a:t>
-            </a:r>
-          </a:p>
-          <a:p>
-            <a:pPr>
-              <a:spcBef>
-                <a:spcPts val="200"/>
+                <a:spcPts val="300"/>
               </a:spcBef>
               <a:defRPr sz="950">
                 <a:solidFill>
@@ -10315,28 +8842,28 @@
               </a:defRPr>
             </a:pPr>
             <a:r>
-              <a:t>Deleting an item cleans up all associated transaction records safely.</a:t>
+              <a:t>• Logs reason classification</a:t>
             </a:r>
           </a:p>
           <a:p>
             <a:pPr>
               <a:spcBef>
-                <a:spcPts val="800"/>
+                <a:spcPts val="1400"/>
               </a:spcBef>
-              <a:defRPr sz="1100" b="1">
+              <a:defRPr sz="1000" b="1">
                 <a:solidFill>
                   <a:srgbClr val="2563EB"/>
                 </a:solidFill>
               </a:defRPr>
             </a:pPr>
             <a:r>
-              <a:t>✔ B-Tree Indexes</a:t>
+              <a:t>COLLABORATORS (Interacts With):</a:t>
             </a:r>
           </a:p>
           <a:p>
             <a:pPr>
               <a:spcBef>
-                <a:spcPts val="200"/>
+                <a:spcPts val="300"/>
               </a:spcBef>
               <a:defRPr sz="950">
                 <a:solidFill>
@@ -10345,21 +8872,119 @@
               </a:defRPr>
             </a:pPr>
             <a:r>
-              <a:t>idx_items_category and idx_transactions_exp ensure sub-5ms query response times.</a:t>
-            </a:r>
-          </a:p>
-        </p:txBody>
-      </p:sp>
-      <p:sp>
-        <p:nvSpPr>
-          <p:cNvPr id="12" name="TextBox 11"/>
+              <a:t>• InventoryItem</a:t>
+            </a:r>
+          </a:p>
+        </p:txBody>
+      </p:sp>
+      <p:sp>
+        <p:nvSpPr>
+          <p:cNvPr id="12" name="Rounded Rectangle 11"/>
+          <p:cNvSpPr/>
+          <p:nvPr/>
+        </p:nvSpPr>
+        <p:spPr>
+          <a:xfrm>
+            <a:off x="7955280" y="1280160"/>
+            <a:ext cx="3474720" cy="4892040"/>
+          </a:xfrm>
+          <a:prstGeom prst="roundRect">
+            <a:avLst/>
+          </a:prstGeom>
+          <a:solidFill>
+            <a:srgbClr val="FFFFFF"/>
+          </a:solidFill>
+          <a:ln w="12700">
+            <a:solidFill>
+              <a:srgbClr val="CBD5E1"/>
+            </a:solidFill>
+          </a:ln>
+        </p:spPr>
+        <p:style>
+          <a:lnRef idx="1">
+            <a:schemeClr val="accent1"/>
+          </a:lnRef>
+          <a:fillRef idx="3">
+            <a:schemeClr val="accent1"/>
+          </a:fillRef>
+          <a:effectRef idx="2">
+            <a:schemeClr val="accent1"/>
+          </a:effectRef>
+          <a:fontRef idx="minor">
+            <a:schemeClr val="lt1"/>
+          </a:fontRef>
+        </p:style>
+        <p:txBody>
+          <a:bodyPr rtlCol="0" anchor="ctr"/>
+          <a:lstStyle/>
+          <a:p>
+            <a:pPr algn="ctr"/>
+            <a:endParaRPr/>
+          </a:p>
+        </p:txBody>
+      </p:sp>
+      <p:sp>
+        <p:nvSpPr>
+          <p:cNvPr id="13" name="Rectangle 12"/>
+          <p:cNvSpPr/>
+          <p:nvPr/>
+        </p:nvSpPr>
+        <p:spPr>
+          <a:xfrm>
+            <a:off x="7955280" y="1280160"/>
+            <a:ext cx="3474720" cy="384048"/>
+          </a:xfrm>
+          <a:prstGeom prst="rect">
+            <a:avLst/>
+          </a:prstGeom>
+          <a:solidFill>
+            <a:srgbClr val="10B981"/>
+          </a:solidFill>
+          <a:ln>
+            <a:noFill/>
+          </a:ln>
+        </p:spPr>
+        <p:style>
+          <a:lnRef idx="1">
+            <a:schemeClr val="accent1"/>
+          </a:lnRef>
+          <a:fillRef idx="3">
+            <a:schemeClr val="accent1"/>
+          </a:fillRef>
+          <a:effectRef idx="2">
+            <a:schemeClr val="accent1"/>
+          </a:effectRef>
+          <a:fontRef idx="minor">
+            <a:schemeClr val="lt1"/>
+          </a:fontRef>
+        </p:style>
+        <p:txBody>
+          <a:bodyPr rtlCol="0" anchor="ctr"/>
+          <a:lstStyle/>
+          <a:p>
+            <a:pPr algn="ctr">
+              <a:defRPr sz="1200" b="1">
+                <a:solidFill>
+                  <a:srgbClr val="FFFFFF"/>
+                </a:solidFill>
+              </a:defRPr>
+            </a:pPr>
+            <a:r>
+              <a:t>AlertEngine</a:t>
+            </a:r>
+          </a:p>
+        </p:txBody>
+      </p:sp>
+      <p:sp>
+        <p:nvSpPr>
+          <p:cNvPr id="14" name="TextBox 13"/>
           <p:cNvSpPr txBox="1"/>
           <p:nvPr/>
         </p:nvSpPr>
         <p:spPr>
           <a:xfrm>
-            <a:off x="731520" y="6473952"/>
-            <a:ext cx="10728655" cy="274320"/>
+            <a:off x="8092440" y="1783080"/>
+            <a:ext cx="3200400" cy="4206240"/>
           </a:xfrm>
           <a:prstGeom prst="rect">
             <a:avLst/>
@@ -10367,21 +8992,110 @@
           <a:noFill/>
         </p:spPr>
         <p:txBody>
-          <a:bodyPr wrap="none">
+          <a:bodyPr wrap="square">
             <a:spAutoFit/>
           </a:bodyPr>
           <a:lstStyle/>
           <a:p>
             <a:pPr>
-              <a:defRPr sz="900">
-                <a:solidFill>
-                  <a:srgbClr val="475569"/>
-                </a:solidFill>
-                <a:latin typeface="Arial"/>
-              </a:defRPr>
-            </a:pPr>
-            <a:r>
-              <a:t>Refrigerator &amp; Pantry Inventory System Prototype   •   Slide 5 of 13</a:t>
+              <a:defRPr sz="1000" b="1">
+                <a:solidFill>
+                  <a:srgbClr val="0F172A"/>
+                </a:solidFill>
+              </a:defRPr>
+            </a:pPr>
+            <a:r>
+              <a:t>RESPONSIBILITIES (What it Does):</a:t>
+            </a:r>
+          </a:p>
+          <a:p>
+            <a:pPr>
+              <a:spcBef>
+                <a:spcPts val="300"/>
+              </a:spcBef>
+              <a:defRPr sz="950">
+                <a:solidFill>
+                  <a:srgbClr val="0F172A"/>
+                </a:solidFill>
+              </a:defRPr>
+            </a:pPr>
+            <a:r>
+              <a:t>• Scans batch expiration dates against today's date</a:t>
+            </a:r>
+          </a:p>
+          <a:p>
+            <a:pPr>
+              <a:spcBef>
+                <a:spcPts val="300"/>
+              </a:spcBef>
+              <a:defRPr sz="950">
+                <a:solidFill>
+                  <a:srgbClr val="0F172A"/>
+                </a:solidFill>
+              </a:defRPr>
+            </a:pPr>
+            <a:r>
+              <a:t>• Emits 3-day lookahead Expiring Soon alerts</a:t>
+            </a:r>
+          </a:p>
+          <a:p>
+            <a:pPr>
+              <a:spcBef>
+                <a:spcPts val="300"/>
+              </a:spcBef>
+              <a:defRPr sz="950">
+                <a:solidFill>
+                  <a:srgbClr val="0F172A"/>
+                </a:solidFill>
+              </a:defRPr>
+            </a:pPr>
+            <a:r>
+              <a:t>• Compiles Low Stock items into Shopping List</a:t>
+            </a:r>
+          </a:p>
+          <a:p>
+            <a:pPr>
+              <a:spcBef>
+                <a:spcPts val="1400"/>
+              </a:spcBef>
+              <a:defRPr sz="1000" b="1">
+                <a:solidFill>
+                  <a:srgbClr val="2563EB"/>
+                </a:solidFill>
+              </a:defRPr>
+            </a:pPr>
+            <a:r>
+              <a:t>COLLABORATORS (Interacts With):</a:t>
+            </a:r>
+          </a:p>
+          <a:p>
+            <a:pPr>
+              <a:spcBef>
+                <a:spcPts val="300"/>
+              </a:spcBef>
+              <a:defRPr sz="950">
+                <a:solidFill>
+                  <a:srgbClr val="0F172A"/>
+                </a:solidFill>
+              </a:defRPr>
+            </a:pPr>
+            <a:r>
+              <a:t>• InventoryItem</a:t>
+            </a:r>
+          </a:p>
+          <a:p>
+            <a:pPr>
+              <a:spcBef>
+                <a:spcPts val="300"/>
+              </a:spcBef>
+              <a:defRPr sz="950">
+                <a:solidFill>
+                  <a:srgbClr val="0F172A"/>
+                </a:solidFill>
+              </a:defRPr>
+            </a:pPr>
+            <a:r>
+              <a:t>• InventoryTransaction</a:t>
             </a:r>
           </a:p>
         </p:txBody>
@@ -10395,7 +9109,7 @@
 </file>
 
 <file path=ppt/slides/slide6.xml><?xml version="1.0" encoding="utf-8"?>
-<p:sld xmlns:a="http://schemas.openxmlformats.org/drawingml/2006/main" xmlns:p="http://schemas.openxmlformats.org/presentationml/2006/main" xmlns:r="http://schemas.openxmlformats.org/officeDocument/2006/relationships">
+<p:sld xmlns:a="http://schemas.openxmlformats.org/drawingml/2006/main" xmlns:r="http://schemas.openxmlformats.org/officeDocument/2006/relationships" xmlns:p="http://schemas.openxmlformats.org/presentationml/2006/main">
   <p:cSld>
     <p:spTree>
       <p:nvGrpSpPr>
@@ -10403,7 +9117,14 @@
         <p:cNvGrpSpPr/>
         <p:nvPr/>
       </p:nvGrpSpPr>
-      <p:grpSpPr/>
+      <p:grpSpPr>
+        <a:xfrm>
+          <a:off x="0" y="0"/>
+          <a:ext cx="0" cy="0"/>
+          <a:chOff x="0" y="0"/>
+          <a:chExt cx="0" cy="0"/>
+        </a:xfrm>
+      </p:grpSpPr>
       <p:sp>
         <p:nvSpPr>
           <p:cNvPr id="2" name="Rectangle 1"/>
@@ -10446,6 +9167,7 @@
           <a:lstStyle/>
           <a:p>
             <a:pPr algn="ctr"/>
+            <a:endParaRPr/>
           </a:p>
         </p:txBody>
       </p:sp>
@@ -10489,6 +9211,7 @@
           <a:lstStyle/>
           <a:p>
             <a:pPr algn="ctr"/>
+            <a:endParaRPr/>
           </a:p>
         </p:txBody>
       </p:sp>
@@ -10559,7 +9282,7 @@
               </a:defRPr>
             </a:pPr>
             <a:r>
-              <a:t>5. Object-Oriented Domain Entities &amp; UML Structure</a:t>
+              <a:t>7. Inbound Stock-In Workflow &amp; Category Filter Feature</a:t>
             </a:r>
           </a:p>
         </p:txBody>
@@ -10572,8 +9295,8 @@
         </p:nvSpPr>
         <p:spPr>
           <a:xfrm>
-            <a:off x="731520" y="1280160"/>
-            <a:ext cx="3474720" cy="2240280"/>
+            <a:off x="914400" y="1280160"/>
+            <a:ext cx="10332720" cy="868680"/>
           </a:xfrm>
           <a:prstGeom prst="roundRect">
             <a:avLst/>
@@ -10581,9 +9304,9 @@
           <a:solidFill>
             <a:srgbClr val="FFFFFF"/>
           </a:solidFill>
-          <a:ln w="12700">
+          <a:ln w="19050">
             <a:solidFill>
-              <a:srgbClr val="CBD5E1"/>
+              <a:srgbClr val="2563EB"/>
             </a:solidFill>
           </a:ln>
         </p:spPr>
@@ -10606,6 +9329,7 @@
           <a:lstStyle/>
           <a:p>
             <a:pPr algn="ctr"/>
+            <a:endParaRPr/>
           </a:p>
         </p:txBody>
       </p:sp>
@@ -10617,14 +9341,14 @@
         </p:nvSpPr>
         <p:spPr>
           <a:xfrm>
-            <a:off x="731520" y="1280160"/>
-            <a:ext cx="3474720" cy="384048"/>
+            <a:off x="1051560" y="1389888"/>
+            <a:ext cx="640080" cy="640080"/>
           </a:xfrm>
           <a:prstGeom prst="rect">
             <a:avLst/>
           </a:prstGeom>
           <a:solidFill>
-            <a:srgbClr val="0F172A"/>
+            <a:srgbClr val="2563EB"/>
           </a:solidFill>
           <a:ln>
             <a:noFill/>
@@ -10649,14 +9373,14 @@
           <a:lstStyle/>
           <a:p>
             <a:pPr algn="ctr">
-              <a:defRPr sz="1200" b="1">
+              <a:defRPr sz="1800" b="1">
                 <a:solidFill>
                   <a:srgbClr val="FFFFFF"/>
                 </a:solidFill>
               </a:defRPr>
             </a:pPr>
             <a:r>
-              <a:t>Category | Domain Grouping</a:t>
+              <a:t>1</a:t>
             </a:r>
           </a:p>
         </p:txBody>
@@ -10669,8 +9393,8 @@
         </p:nvSpPr>
         <p:spPr>
           <a:xfrm>
-            <a:off x="822960" y="1737360"/>
-            <a:ext cx="3291840" cy="1691640"/>
+            <a:off x="1828800" y="1325880"/>
+            <a:ext cx="9235440" cy="777240"/>
           </a:xfrm>
           <a:prstGeom prst="rect">
             <a:avLst/>
@@ -10684,8 +9408,20 @@
           <a:lstStyle/>
           <a:p>
             <a:pPr>
+              <a:defRPr sz="1100" b="1">
+                <a:solidFill>
+                  <a:srgbClr val="2563EB"/>
+                </a:solidFill>
+              </a:defRPr>
+            </a:pPr>
+            <a:r>
+              <a:t>Step 1: Open Stock-In Modal</a:t>
+            </a:r>
+          </a:p>
+          <a:p>
+            <a:pPr>
               <a:spcBef>
-                <a:spcPts val="0"/>
+                <a:spcPts val="200"/>
               </a:spcBef>
               <a:defRPr sz="950">
                 <a:solidFill>
@@ -10694,30 +9430,7 @@
               </a:defRPr>
             </a:pPr>
             <a:r>
-              <a:t>+ id: int [PK]</a:t>
-            </a:r>
-            <a:br/>
-            <a:r>
-              <a:t>+ name: string</a:t>
-            </a:r>
-            <a:br/>
-            <a:r>
-              <a:t>+ description: string</a:t>
-            </a:r>
-          </a:p>
-          <a:p>
-            <a:pPr>
-              <a:spcBef>
-                <a:spcPts val="400"/>
-              </a:spcBef>
-              <a:defRPr sz="950">
-                <a:solidFill>
-                  <a:srgbClr val="0F172A"/>
-                </a:solidFill>
-              </a:defRPr>
-            </a:pPr>
-            <a:r>
-              <a:t>+ getItems(): List&lt;InventoryItem&gt;</a:t>
+              <a:t>User clicks '+ In' on an inventory row or '+ Stock In' from the dashboard.</a:t>
             </a:r>
           </a:p>
         </p:txBody>
@@ -10730,8 +9443,8 @@
         </p:nvSpPr>
         <p:spPr>
           <a:xfrm>
-            <a:off x="4343400" y="1280160"/>
-            <a:ext cx="3474720" cy="2240280"/>
+            <a:off x="914400" y="2240280"/>
+            <a:ext cx="10332720" cy="868680"/>
           </a:xfrm>
           <a:prstGeom prst="roundRect">
             <a:avLst/>
@@ -10739,9 +9452,9 @@
           <a:solidFill>
             <a:srgbClr val="FFFFFF"/>
           </a:solidFill>
-          <a:ln w="12700">
+          <a:ln w="19050">
             <a:solidFill>
-              <a:srgbClr val="CBD5E1"/>
+              <a:srgbClr val="2563EB"/>
             </a:solidFill>
           </a:ln>
         </p:spPr>
@@ -10764,6 +9477,7 @@
           <a:lstStyle/>
           <a:p>
             <a:pPr algn="ctr"/>
+            <a:endParaRPr/>
           </a:p>
         </p:txBody>
       </p:sp>
@@ -10775,14 +9489,14 @@
         </p:nvSpPr>
         <p:spPr>
           <a:xfrm>
-            <a:off x="4343400" y="1280160"/>
-            <a:ext cx="3474720" cy="384048"/>
+            <a:off x="1051560" y="2350008"/>
+            <a:ext cx="640080" cy="640080"/>
           </a:xfrm>
           <a:prstGeom prst="rect">
             <a:avLst/>
           </a:prstGeom>
           <a:solidFill>
-            <a:srgbClr val="0F172A"/>
+            <a:srgbClr val="2563EB"/>
           </a:solidFill>
           <a:ln>
             <a:noFill/>
@@ -10807,14 +9521,14 @@
           <a:lstStyle/>
           <a:p>
             <a:pPr algn="ctr">
-              <a:defRPr sz="1200" b="1">
+              <a:defRPr sz="1800" b="1">
                 <a:solidFill>
                   <a:srgbClr val="FFFFFF"/>
                 </a:solidFill>
               </a:defRPr>
             </a:pPr>
             <a:r>
-              <a:t>InventoryItem | Core Catalog Entity</a:t>
+              <a:t>2</a:t>
             </a:r>
           </a:p>
         </p:txBody>
@@ -10827,8 +9541,8 @@
         </p:nvSpPr>
         <p:spPr>
           <a:xfrm>
-            <a:off x="4434840" y="1737360"/>
-            <a:ext cx="3291840" cy="1691640"/>
+            <a:off x="1828800" y="2286000"/>
+            <a:ext cx="9235440" cy="777240"/>
           </a:xfrm>
           <a:prstGeom prst="rect">
             <a:avLst/>
@@ -10842,8 +9556,20 @@
           <a:lstStyle/>
           <a:p>
             <a:pPr>
+              <a:defRPr sz="1100" b="1">
+                <a:solidFill>
+                  <a:srgbClr val="2563EB"/>
+                </a:solidFill>
+              </a:defRPr>
+            </a:pPr>
+            <a:r>
+              <a:t>Step 2: Instant Category &amp; Keyword Filter</a:t>
+            </a:r>
+          </a:p>
+          <a:p>
+            <a:pPr>
               <a:spcBef>
-                <a:spcPts val="0"/>
+                <a:spcPts val="200"/>
               </a:spcBef>
               <a:defRPr sz="950">
                 <a:solidFill>
@@ -10852,46 +9578,7 @@
               </a:defRPr>
             </a:pPr>
             <a:r>
-              <a:t>+ id: int [PK]</a:t>
-            </a:r>
-            <a:br/>
-            <a:r>
-              <a:t>+ categoryId: int [FK]</a:t>
-            </a:r>
-            <a:br/>
-            <a:r>
-              <a:t>+ name: string</a:t>
-            </a:r>
-            <a:br/>
-            <a:r>
-              <a:t>+ unit: string</a:t>
-            </a:r>
-            <a:br/>
-            <a:r>
-              <a:t>+ minThreshold: float</a:t>
-            </a:r>
-          </a:p>
-          <a:p>
-            <a:pPr>
-              <a:spcBef>
-                <a:spcPts val="400"/>
-              </a:spcBef>
-              <a:defRPr sz="950">
-                <a:solidFill>
-                  <a:srgbClr val="0F172A"/>
-                </a:solidFill>
-              </a:defRPr>
-            </a:pPr>
-            <a:r>
-              <a:t>+ calculateCurrentStock(): float</a:t>
-            </a:r>
-            <a:br/>
-            <a:r>
-              <a:t>+ getNearestExpiration(): Date</a:t>
-            </a:r>
-            <a:br/>
-            <a:r>
-              <a:t>+ evaluateStatus(): StatusBadge</a:t>
+              <a:t>User selects a Category (e.g., 'Dairy Products') or types in the live search box. Modal dynamically filters dropdown to only matching materials.</a:t>
             </a:r>
           </a:p>
         </p:txBody>
@@ -10904,8 +9591,8 @@
         </p:nvSpPr>
         <p:spPr>
           <a:xfrm>
-            <a:off x="7955280" y="1280160"/>
-            <a:ext cx="3474720" cy="2240280"/>
+            <a:off x="914400" y="3200400"/>
+            <a:ext cx="10332720" cy="868680"/>
           </a:xfrm>
           <a:prstGeom prst="roundRect">
             <a:avLst/>
@@ -10913,9 +9600,9 @@
           <a:solidFill>
             <a:srgbClr val="FFFFFF"/>
           </a:solidFill>
-          <a:ln w="12700">
+          <a:ln w="19050">
             <a:solidFill>
-              <a:srgbClr val="CBD5E1"/>
+              <a:srgbClr val="2563EB"/>
             </a:solidFill>
           </a:ln>
         </p:spPr>
@@ -10938,6 +9625,7 @@
           <a:lstStyle/>
           <a:p>
             <a:pPr algn="ctr"/>
+            <a:endParaRPr/>
           </a:p>
         </p:txBody>
       </p:sp>
@@ -10949,14 +9637,14 @@
         </p:nvSpPr>
         <p:spPr>
           <a:xfrm>
-            <a:off x="7955280" y="1280160"/>
-            <a:ext cx="3474720" cy="384048"/>
+            <a:off x="1051560" y="3310128"/>
+            <a:ext cx="640080" cy="640080"/>
           </a:xfrm>
           <a:prstGeom prst="rect">
             <a:avLst/>
           </a:prstGeom>
           <a:solidFill>
-            <a:srgbClr val="0F172A"/>
+            <a:srgbClr val="2563EB"/>
           </a:solidFill>
           <a:ln>
             <a:noFill/>
@@ -10981,14 +9669,14 @@
           <a:lstStyle/>
           <a:p>
             <a:pPr algn="ctr">
-              <a:defRPr sz="1200" b="1">
+              <a:defRPr sz="1800" b="1">
                 <a:solidFill>
                   <a:srgbClr val="FFFFFF"/>
                 </a:solidFill>
               </a:defRPr>
             </a:pPr>
             <a:r>
-              <a:t>InventoryTransaction | Batch Movement Record</a:t>
+              <a:t>3</a:t>
             </a:r>
           </a:p>
         </p:txBody>
@@ -11001,8 +9689,8 @@
         </p:nvSpPr>
         <p:spPr>
           <a:xfrm>
-            <a:off x="8046720" y="1737360"/>
-            <a:ext cx="3291840" cy="1691640"/>
+            <a:off x="1828800" y="3246120"/>
+            <a:ext cx="9235440" cy="777240"/>
           </a:xfrm>
           <a:prstGeom prst="rect">
             <a:avLst/>
@@ -11016,8 +9704,20 @@
           <a:lstStyle/>
           <a:p>
             <a:pPr>
+              <a:defRPr sz="1100" b="1">
+                <a:solidFill>
+                  <a:srgbClr val="2563EB"/>
+                </a:solidFill>
+              </a:defRPr>
+            </a:pPr>
+            <a:r>
+              <a:t>Step 3: Quantity &amp; Batch Dates Entry</a:t>
+            </a:r>
+          </a:p>
+          <a:p>
+            <a:pPr>
               <a:spcBef>
-                <a:spcPts val="0"/>
+                <a:spcPts val="200"/>
               </a:spcBef>
               <a:defRPr sz="950">
                 <a:solidFill>
@@ -11026,42 +9726,7 @@
               </a:defRPr>
             </a:pPr>
             <a:r>
-              <a:t>+ id: int [PK]</a:t>
-            </a:r>
-            <a:br/>
-            <a:r>
-              <a:t>+ itemId: int [FK]</a:t>
-            </a:r>
-            <a:br/>
-            <a:r>
-              <a:t>+ transactionType: 'IN'|'OUT'</a:t>
-            </a:r>
-            <a:br/>
-            <a:r>
-              <a:t>+ quantity: float</a:t>
-            </a:r>
-          </a:p>
-          <a:p>
-            <a:pPr>
-              <a:spcBef>
-                <a:spcPts val="400"/>
-              </a:spcBef>
-              <a:defRPr sz="950">
-                <a:solidFill>
-                  <a:srgbClr val="0F172A"/>
-                </a:solidFill>
-              </a:defRPr>
-            </a:pPr>
-            <a:r>
-              <a:t>+ purchaseDate: Date</a:t>
-            </a:r>
-            <a:br/>
-            <a:r>
-              <a:t>+ expirationDate: Date</a:t>
-            </a:r>
-            <a:br/>
-            <a:r>
-              <a:t>+ reason: string</a:t>
+              <a:t>User specifies intake quantity, purchase date, and batch expiration date.</a:t>
             </a:r>
           </a:p>
         </p:txBody>
@@ -11074,8 +9739,8 @@
         </p:nvSpPr>
         <p:spPr>
           <a:xfrm>
-            <a:off x="731520" y="3703320"/>
-            <a:ext cx="3474720" cy="2240280"/>
+            <a:off x="914400" y="4160520"/>
+            <a:ext cx="10332720" cy="868680"/>
           </a:xfrm>
           <a:prstGeom prst="roundRect">
             <a:avLst/>
@@ -11083,9 +9748,9 @@
           <a:solidFill>
             <a:srgbClr val="FFFFFF"/>
           </a:solidFill>
-          <a:ln w="12700">
+          <a:ln w="19050">
             <a:solidFill>
-              <a:srgbClr val="CBD5E1"/>
+              <a:srgbClr val="2563EB"/>
             </a:solidFill>
           </a:ln>
         </p:spPr>
@@ -11108,6 +9773,7 @@
           <a:lstStyle/>
           <a:p>
             <a:pPr algn="ctr"/>
+            <a:endParaRPr/>
           </a:p>
         </p:txBody>
       </p:sp>
@@ -11119,14 +9785,14 @@
         </p:nvSpPr>
         <p:spPr>
           <a:xfrm>
-            <a:off x="731520" y="3703320"/>
-            <a:ext cx="3474720" cy="384048"/>
+            <a:off x="1051560" y="4270248"/>
+            <a:ext cx="640080" cy="640080"/>
           </a:xfrm>
           <a:prstGeom prst="rect">
             <a:avLst/>
           </a:prstGeom>
           <a:solidFill>
-            <a:srgbClr val="0F172A"/>
+            <a:srgbClr val="2563EB"/>
           </a:solidFill>
           <a:ln>
             <a:noFill/>
@@ -11151,14 +9817,14 @@
           <a:lstStyle/>
           <a:p>
             <a:pPr algn="ctr">
-              <a:defRPr sz="1200" b="1">
+              <a:defRPr sz="1800" b="1">
                 <a:solidFill>
                   <a:srgbClr val="FFFFFF"/>
                 </a:solidFill>
               </a:defRPr>
             </a:pPr>
             <a:r>
-              <a:t>AlertEngine | Telemetry Service</a:t>
+              <a:t>4</a:t>
             </a:r>
           </a:p>
         </p:txBody>
@@ -11171,8 +9837,8 @@
         </p:nvSpPr>
         <p:spPr>
           <a:xfrm>
-            <a:off x="822960" y="4160520"/>
-            <a:ext cx="3291840" cy="1691640"/>
+            <a:off x="1828800" y="4206240"/>
+            <a:ext cx="9235440" cy="777240"/>
           </a:xfrm>
           <a:prstGeom prst="rect">
             <a:avLst/>
@@ -11186,8 +9852,20 @@
           <a:lstStyle/>
           <a:p>
             <a:pPr>
+              <a:defRPr sz="1100" b="1">
+                <a:solidFill>
+                  <a:srgbClr val="2563EB"/>
+                </a:solidFill>
+              </a:defRPr>
+            </a:pPr>
+            <a:r>
+              <a:t>Step 4: Reason Tagging</a:t>
+            </a:r>
+          </a:p>
+          <a:p>
+            <a:pPr>
               <a:spcBef>
-                <a:spcPts val="0"/>
+                <a:spcPts val="200"/>
               </a:spcBef>
               <a:defRPr sz="950">
                 <a:solidFill>
@@ -11196,11 +9874,7 @@
               </a:defRPr>
             </a:pPr>
             <a:r>
-              <a:t>+ evaluateExpiringLots(horizonDays=3): List&lt;Alert&gt;</a:t>
-            </a:r>
-            <a:br/>
-            <a:r>
-              <a:t>+ evaluateLowStock(): List&lt;ShoppingListItem&gt;</a:t>
+              <a:t>User selects reason: 'Initial Stock / Regular Purchase', 'Supplier Restock', or 'Fresh Produce Restock'.</a:t>
             </a:r>
           </a:p>
         </p:txBody>
@@ -11213,8 +9887,8 @@
         </p:nvSpPr>
         <p:spPr>
           <a:xfrm>
-            <a:off x="4343400" y="3703320"/>
-            <a:ext cx="3474720" cy="2240280"/>
+            <a:off x="914400" y="5120640"/>
+            <a:ext cx="10332720" cy="868680"/>
           </a:xfrm>
           <a:prstGeom prst="roundRect">
             <a:avLst/>
@@ -11222,9 +9896,9 @@
           <a:solidFill>
             <a:srgbClr val="FFFFFF"/>
           </a:solidFill>
-          <a:ln w="12700">
+          <a:ln w="19050">
             <a:solidFill>
-              <a:srgbClr val="CBD5E1"/>
+              <a:srgbClr val="2563EB"/>
             </a:solidFill>
           </a:ln>
         </p:spPr>
@@ -11247,6 +9921,7 @@
           <a:lstStyle/>
           <a:p>
             <a:pPr algn="ctr"/>
+            <a:endParaRPr/>
           </a:p>
         </p:txBody>
       </p:sp>
@@ -11258,14 +9933,14 @@
         </p:nvSpPr>
         <p:spPr>
           <a:xfrm>
-            <a:off x="4343400" y="3703320"/>
-            <a:ext cx="3474720" cy="384048"/>
+            <a:off x="1051560" y="5230368"/>
+            <a:ext cx="640080" cy="640080"/>
           </a:xfrm>
           <a:prstGeom prst="rect">
             <a:avLst/>
           </a:prstGeom>
           <a:solidFill>
-            <a:srgbClr val="0F172A"/>
+            <a:srgbClr val="2563EB"/>
           </a:solidFill>
           <a:ln>
             <a:noFill/>
@@ -11290,14 +9965,14 @@
           <a:lstStyle/>
           <a:p>
             <a:pPr algn="ctr">
-              <a:defRPr sz="1200" b="1">
+              <a:defRPr sz="1800" b="1">
                 <a:solidFill>
                   <a:srgbClr val="FFFFFF"/>
                 </a:solidFill>
               </a:defRPr>
             </a:pPr>
             <a:r>
-              <a:t>StockInPayload | Inbound DTO</a:t>
+              <a:t>5</a:t>
             </a:r>
           </a:p>
         </p:txBody>
@@ -11310,8 +9985,8 @@
         </p:nvSpPr>
         <p:spPr>
           <a:xfrm>
-            <a:off x="4434840" y="4160520"/>
-            <a:ext cx="3291840" cy="1691640"/>
+            <a:off x="1828800" y="5166360"/>
+            <a:ext cx="9235440" cy="777240"/>
           </a:xfrm>
           <a:prstGeom prst="rect">
             <a:avLst/>
@@ -11325,8 +10000,20 @@
           <a:lstStyle/>
           <a:p>
             <a:pPr>
+              <a:defRPr sz="1100" b="1">
+                <a:solidFill>
+                  <a:srgbClr val="2563EB"/>
+                </a:solidFill>
+              </a:defRPr>
+            </a:pPr>
+            <a:r>
+              <a:t>Step 5: Database Commit &amp; Real-Time Sync</a:t>
+            </a:r>
+          </a:p>
+          <a:p>
+            <a:pPr>
               <a:spcBef>
-                <a:spcPts val="0"/>
+                <a:spcPts val="200"/>
               </a:spcBef>
               <a:defRPr sz="950">
                 <a:solidFill>
@@ -11335,202 +10022,7 @@
               </a:defRPr>
             </a:pPr>
             <a:r>
-              <a:t>+ itemId: int</a:t>
-            </a:r>
-            <a:br/>
-            <a:r>
-              <a:t>+ quantity: float</a:t>
-            </a:r>
-            <a:br/>
-            <a:r>
-              <a:t>+ purchaseDate: Date</a:t>
-            </a:r>
-            <a:br/>
-            <a:r>
-              <a:t>+ expirationDate: Date</a:t>
-            </a:r>
-            <a:br/>
-            <a:r>
-              <a:t>+ reason: string</a:t>
-            </a:r>
-          </a:p>
-        </p:txBody>
-      </p:sp>
-      <p:sp>
-        <p:nvSpPr>
-          <p:cNvPr id="21" name="Rounded Rectangle 20"/>
-          <p:cNvSpPr/>
-          <p:nvPr/>
-        </p:nvSpPr>
-        <p:spPr>
-          <a:xfrm>
-            <a:off x="7955280" y="3703320"/>
-            <a:ext cx="3474720" cy="2240280"/>
-          </a:xfrm>
-          <a:prstGeom prst="roundRect">
-            <a:avLst/>
-          </a:prstGeom>
-          <a:solidFill>
-            <a:srgbClr val="FFFFFF"/>
-          </a:solidFill>
-          <a:ln w="12700">
-            <a:solidFill>
-              <a:srgbClr val="CBD5E1"/>
-            </a:solidFill>
-          </a:ln>
-        </p:spPr>
-        <p:style>
-          <a:lnRef idx="1">
-            <a:schemeClr val="accent1"/>
-          </a:lnRef>
-          <a:fillRef idx="3">
-            <a:schemeClr val="accent1"/>
-          </a:fillRef>
-          <a:effectRef idx="2">
-            <a:schemeClr val="accent1"/>
-          </a:effectRef>
-          <a:fontRef idx="minor">
-            <a:schemeClr val="lt1"/>
-          </a:fontRef>
-        </p:style>
-        <p:txBody>
-          <a:bodyPr rtlCol="0" anchor="ctr"/>
-          <a:lstStyle/>
-          <a:p>
-            <a:pPr algn="ctr"/>
-          </a:p>
-        </p:txBody>
-      </p:sp>
-      <p:sp>
-        <p:nvSpPr>
-          <p:cNvPr id="22" name="Rectangle 21"/>
-          <p:cNvSpPr/>
-          <p:nvPr/>
-        </p:nvSpPr>
-        <p:spPr>
-          <a:xfrm>
-            <a:off x="7955280" y="3703320"/>
-            <a:ext cx="3474720" cy="384048"/>
-          </a:xfrm>
-          <a:prstGeom prst="rect">
-            <a:avLst/>
-          </a:prstGeom>
-          <a:solidFill>
-            <a:srgbClr val="0F172A"/>
-          </a:solidFill>
-          <a:ln>
-            <a:noFill/>
-          </a:ln>
-        </p:spPr>
-        <p:style>
-          <a:lnRef idx="1">
-            <a:schemeClr val="accent1"/>
-          </a:lnRef>
-          <a:fillRef idx="3">
-            <a:schemeClr val="accent1"/>
-          </a:fillRef>
-          <a:effectRef idx="2">
-            <a:schemeClr val="accent1"/>
-          </a:effectRef>
-          <a:fontRef idx="minor">
-            <a:schemeClr val="lt1"/>
-          </a:fontRef>
-        </p:style>
-        <p:txBody>
-          <a:bodyPr rtlCol="0" anchor="ctr"/>
-          <a:lstStyle/>
-          <a:p>
-            <a:pPr algn="ctr">
-              <a:defRPr sz="1200" b="1">
-                <a:solidFill>
-                  <a:srgbClr val="FFFFFF"/>
-                </a:solidFill>
-              </a:defRPr>
-            </a:pPr>
-            <a:r>
-              <a:t>StockOutPayload | Outbound DTO</a:t>
-            </a:r>
-          </a:p>
-        </p:txBody>
-      </p:sp>
-      <p:sp>
-        <p:nvSpPr>
-          <p:cNvPr id="23" name="TextBox 22"/>
-          <p:cNvSpPr txBox="1"/>
-          <p:nvPr/>
-        </p:nvSpPr>
-        <p:spPr>
-          <a:xfrm>
-            <a:off x="8046720" y="4160520"/>
-            <a:ext cx="3291840" cy="1691640"/>
-          </a:xfrm>
-          <a:prstGeom prst="rect">
-            <a:avLst/>
-          </a:prstGeom>
-          <a:noFill/>
-        </p:spPr>
-        <p:txBody>
-          <a:bodyPr wrap="square">
-            <a:spAutoFit/>
-          </a:bodyPr>
-          <a:lstStyle/>
-          <a:p>
-            <a:pPr>
-              <a:spcBef>
-                <a:spcPts val="0"/>
-              </a:spcBef>
-              <a:defRPr sz="950">
-                <a:solidFill>
-                  <a:srgbClr val="0F172A"/>
-                </a:solidFill>
-              </a:defRPr>
-            </a:pPr>
-            <a:r>
-              <a:t>+ itemId: int</a:t>
-            </a:r>
-            <a:br/>
-            <a:r>
-              <a:t>+ quantity: float</a:t>
-            </a:r>
-            <a:br/>
-            <a:r>
-              <a:t>+ reason: 'Used/Consumed'|'Spoiled/Expired'|'Transferred'</a:t>
-            </a:r>
-          </a:p>
-        </p:txBody>
-      </p:sp>
-      <p:sp>
-        <p:nvSpPr>
-          <p:cNvPr id="24" name="TextBox 23"/>
-          <p:cNvSpPr txBox="1"/>
-          <p:nvPr/>
-        </p:nvSpPr>
-        <p:spPr>
-          <a:xfrm>
-            <a:off x="731520" y="6473952"/>
-            <a:ext cx="10728655" cy="274320"/>
-          </a:xfrm>
-          <a:prstGeom prst="rect">
-            <a:avLst/>
-          </a:prstGeom>
-          <a:noFill/>
-        </p:spPr>
-        <p:txBody>
-          <a:bodyPr wrap="none">
-            <a:spAutoFit/>
-          </a:bodyPr>
-          <a:lstStyle/>
-          <a:p>
-            <a:pPr>
-              <a:defRPr sz="900">
-                <a:solidFill>
-                  <a:srgbClr val="475569"/>
-                </a:solidFill>
-                <a:latin typeface="Arial"/>
-              </a:defRPr>
-            </a:pPr>
-            <a:r>
-              <a:t>Refrigerator &amp; Pantry Inventory System Prototype   •   Slide 6 of 13</a:t>
+              <a:t>POST /api/transactions/in logs the transaction, updates stock totals, and refreshes the UI dashboard instantly.</a:t>
             </a:r>
           </a:p>
         </p:txBody>
@@ -11544,7 +10036,7 @@
 </file>
 
 <file path=ppt/slides/slide7.xml><?xml version="1.0" encoding="utf-8"?>
-<p:sld xmlns:a="http://schemas.openxmlformats.org/drawingml/2006/main" xmlns:p="http://schemas.openxmlformats.org/presentationml/2006/main" xmlns:r="http://schemas.openxmlformats.org/officeDocument/2006/relationships">
+<p:sld xmlns:a="http://schemas.openxmlformats.org/drawingml/2006/main" xmlns:r="http://schemas.openxmlformats.org/officeDocument/2006/relationships" xmlns:p="http://schemas.openxmlformats.org/presentationml/2006/main">
   <p:cSld>
     <p:spTree>
       <p:nvGrpSpPr>
@@ -11552,7 +10044,14 @@
         <p:cNvGrpSpPr/>
         <p:nvPr/>
       </p:nvGrpSpPr>
-      <p:grpSpPr/>
+      <p:grpSpPr>
+        <a:xfrm>
+          <a:off x="0" y="0"/>
+          <a:ext cx="0" cy="0"/>
+          <a:chOff x="0" y="0"/>
+          <a:chExt cx="0" cy="0"/>
+        </a:xfrm>
+      </p:grpSpPr>
       <p:sp>
         <p:nvSpPr>
           <p:cNvPr id="2" name="Rectangle 1"/>
@@ -11595,6 +10094,7 @@
           <a:lstStyle/>
           <a:p>
             <a:pPr algn="ctr"/>
+            <a:endParaRPr/>
           </a:p>
         </p:txBody>
       </p:sp>
@@ -11638,6 +10138,7 @@
           <a:lstStyle/>
           <a:p>
             <a:pPr algn="ctr"/>
+            <a:endParaRPr/>
           </a:p>
         </p:txBody>
       </p:sp>
@@ -11708,7 +10209,7 @@
               </a:defRPr>
             </a:pPr>
             <a:r>
-              <a:t>6. Class-Responsibility-Collaborator (CRC) Cards</a:t>
+              <a:t>8. Outbound Stock-Out Workflow &amp; Validation Rules</a:t>
             </a:r>
           </a:p>
         </p:txBody>
@@ -11722,7 +10223,7 @@
         <p:spPr>
           <a:xfrm>
             <a:off x="731520" y="1280160"/>
-            <a:ext cx="3474720" cy="4892040"/>
+            <a:ext cx="5212080" cy="4892040"/>
           </a:xfrm>
           <a:prstGeom prst="roundRect">
             <a:avLst/>
@@ -11755,6 +10256,7 @@
           <a:lstStyle/>
           <a:p>
             <a:pPr algn="ctr"/>
+            <a:endParaRPr/>
           </a:p>
         </p:txBody>
       </p:sp>
@@ -11767,13 +10269,13 @@
         <p:spPr>
           <a:xfrm>
             <a:off x="731520" y="1280160"/>
-            <a:ext cx="3474720" cy="384048"/>
+            <a:ext cx="5212080" cy="384048"/>
           </a:xfrm>
           <a:prstGeom prst="rect">
             <a:avLst/>
           </a:prstGeom>
           <a:solidFill>
-            <a:srgbClr val="2563EB"/>
+            <a:srgbClr val="EF4444"/>
           </a:solidFill>
           <a:ln>
             <a:noFill/>
@@ -11805,7 +10307,7 @@
               </a:defRPr>
             </a:pPr>
             <a:r>
-              <a:t>InventoryItem</a:t>
+              <a:t>Stock-Out Execution Flow</a:t>
             </a:r>
           </a:p>
         </p:txBody>
@@ -11819,7 +10321,7 @@
         <p:spPr>
           <a:xfrm>
             <a:off x="868680" y="1783080"/>
-            <a:ext cx="3200400" cy="4206240"/>
+            <a:ext cx="4937760" cy="4206240"/>
           </a:xfrm>
           <a:prstGeom prst="rect">
             <a:avLst/>
@@ -11833,20 +10335,23 @@
           <a:lstStyle/>
           <a:p>
             <a:pPr>
-              <a:defRPr sz="1000" b="1">
-                <a:solidFill>
-                  <a:srgbClr val="0F172A"/>
-                </a:solidFill>
-              </a:defRPr>
-            </a:pPr>
-            <a:r>
-              <a:t>RESPONSIBILITIES (What it Does):</a:t>
-            </a:r>
-          </a:p>
-          <a:p>
-            <a:pPr>
               <a:spcBef>
-                <a:spcPts val="300"/>
+                <a:spcPts val="0"/>
+              </a:spcBef>
+              <a:defRPr sz="1100" b="1">
+                <a:solidFill>
+                  <a:srgbClr val="EF4444"/>
+                </a:solidFill>
+              </a:defRPr>
+            </a:pPr>
+            <a:r>
+              <a:t>1. Material Selection</a:t>
+            </a:r>
+          </a:p>
+          <a:p>
+            <a:pPr>
+              <a:spcBef>
+                <a:spcPts val="200"/>
               </a:spcBef>
               <a:defRPr sz="950">
                 <a:solidFill>
@@ -11855,13 +10360,28 @@
               </a:defRPr>
             </a:pPr>
             <a:r>
-              <a:t>• Maintains item name, category, unit, and min threshold</a:t>
+              <a:t>User filters by category or searches item name inside the Stock-Out modal.</a:t>
             </a:r>
           </a:p>
           <a:p>
             <a:pPr>
               <a:spcBef>
-                <a:spcPts val="300"/>
+                <a:spcPts val="800"/>
+              </a:spcBef>
+              <a:defRPr sz="1100" b="1">
+                <a:solidFill>
+                  <a:srgbClr val="EF4444"/>
+                </a:solidFill>
+              </a:defRPr>
+            </a:pPr>
+            <a:r>
+              <a:t>2. Stock Sufficiency Check</a:t>
+            </a:r>
+          </a:p>
+          <a:p>
+            <a:pPr>
+              <a:spcBef>
+                <a:spcPts val="200"/>
               </a:spcBef>
               <a:defRPr sz="950">
                 <a:solidFill>
@@ -11870,13 +10390,28 @@
               </a:defRPr>
             </a:pPr>
             <a:r>
-              <a:t>• Aggregates total stock balance from transactions</a:t>
+              <a:t>Modal validates that deduction quantity &lt;= available stock balance. Over-deductions are blocked with an error banner.</a:t>
             </a:r>
           </a:p>
           <a:p>
             <a:pPr>
               <a:spcBef>
-                <a:spcPts val="300"/>
+                <a:spcPts val="800"/>
+              </a:spcBef>
+              <a:defRPr sz="1100" b="1">
+                <a:solidFill>
+                  <a:srgbClr val="EF4444"/>
+                </a:solidFill>
+              </a:defRPr>
+            </a:pPr>
+            <a:r>
+              <a:t>3. Reason Classification</a:t>
+            </a:r>
+          </a:p>
+          <a:p>
+            <a:pPr>
+              <a:spcBef>
+                <a:spcPts val="200"/>
               </a:spcBef>
               <a:defRPr sz="950">
                 <a:solidFill>
@@ -11885,28 +10420,28 @@
               </a:defRPr>
             </a:pPr>
             <a:r>
-              <a:t>• Evaluates health status (Sufficient, Low, Expiring)</a:t>
+              <a:t>User selects one of 3 clean reasons: 'Used / Consumed', 'Spoiled / Expired', or 'Transferred'.</a:t>
             </a:r>
           </a:p>
           <a:p>
             <a:pPr>
               <a:spcBef>
-                <a:spcPts val="1400"/>
+                <a:spcPts val="800"/>
               </a:spcBef>
-              <a:defRPr sz="1000" b="1">
-                <a:solidFill>
-                  <a:srgbClr val="2563EB"/>
-                </a:solidFill>
-              </a:defRPr>
-            </a:pPr>
-            <a:r>
-              <a:t>COLLABORATORS (Interacts With):</a:t>
+              <a:defRPr sz="1100" b="1">
+                <a:solidFill>
+                  <a:srgbClr val="EF4444"/>
+                </a:solidFill>
+              </a:defRPr>
+            </a:pPr>
+            <a:r>
+              <a:t>4. Atomic Deduction Commit</a:t>
             </a:r>
           </a:p>
           <a:p>
             <a:pPr>
               <a:spcBef>
-                <a:spcPts val="300"/>
+                <a:spcPts val="200"/>
               </a:spcBef>
               <a:defRPr sz="950">
                 <a:solidFill>
@@ -11915,37 +10450,7 @@
               </a:defRPr>
             </a:pPr>
             <a:r>
-              <a:t>• Category</a:t>
-            </a:r>
-          </a:p>
-          <a:p>
-            <a:pPr>
-              <a:spcBef>
-                <a:spcPts val="300"/>
-              </a:spcBef>
-              <a:defRPr sz="950">
-                <a:solidFill>
-                  <a:srgbClr val="0F172A"/>
-                </a:solidFill>
-              </a:defRPr>
-            </a:pPr>
-            <a:r>
-              <a:t>• InventoryTransaction</a:t>
-            </a:r>
-          </a:p>
-          <a:p>
-            <a:pPr>
-              <a:spcBef>
-                <a:spcPts val="300"/>
-              </a:spcBef>
-              <a:defRPr sz="950">
-                <a:solidFill>
-                  <a:srgbClr val="0F172A"/>
-                </a:solidFill>
-              </a:defRPr>
-            </a:pPr>
-            <a:r>
-              <a:t>• AlertEngine</a:t>
+              <a:t>POST /api/transactions/out writes the 'OUT' transaction and updates the item's balance.</a:t>
             </a:r>
           </a:p>
         </p:txBody>
@@ -11958,8 +10463,8 @@
         </p:nvSpPr>
         <p:spPr>
           <a:xfrm>
-            <a:off x="4343400" y="1280160"/>
-            <a:ext cx="3474720" cy="4892040"/>
+            <a:off x="6217920" y="1280160"/>
+            <a:ext cx="5212080" cy="4892040"/>
           </a:xfrm>
           <a:prstGeom prst="roundRect">
             <a:avLst/>
@@ -11992,6 +10497,7 @@
           <a:lstStyle/>
           <a:p>
             <a:pPr algn="ctr"/>
+            <a:endParaRPr/>
           </a:p>
         </p:txBody>
       </p:sp>
@@ -12003,8 +10509,8 @@
         </p:nvSpPr>
         <p:spPr>
           <a:xfrm>
-            <a:off x="4343400" y="1280160"/>
-            <a:ext cx="3474720" cy="384048"/>
+            <a:off x="6217920" y="1280160"/>
+            <a:ext cx="5212080" cy="384048"/>
           </a:xfrm>
           <a:prstGeom prst="rect">
             <a:avLst/>
@@ -12042,7 +10548,7 @@
               </a:defRPr>
             </a:pPr>
             <a:r>
-              <a:t>InventoryTransaction</a:t>
+              <a:t>Deduction Reason Definitions</a:t>
             </a:r>
           </a:p>
         </p:txBody>
@@ -12055,8 +10561,8 @@
         </p:nvSpPr>
         <p:spPr>
           <a:xfrm>
-            <a:off x="4480560" y="1783080"/>
-            <a:ext cx="3200400" cy="4206240"/>
+            <a:off x="6355080" y="1783080"/>
+            <a:ext cx="4937760" cy="4206240"/>
           </a:xfrm>
           <a:prstGeom prst="rect">
             <a:avLst/>
@@ -12070,20 +10576,23 @@
           <a:lstStyle/>
           <a:p>
             <a:pPr>
-              <a:defRPr sz="1000" b="1">
-                <a:solidFill>
-                  <a:srgbClr val="0F172A"/>
-                </a:solidFill>
-              </a:defRPr>
-            </a:pPr>
-            <a:r>
-              <a:t>RESPONSIBILITIES (What it Does):</a:t>
-            </a:r>
-          </a:p>
-          <a:p>
-            <a:pPr>
               <a:spcBef>
-                <a:spcPts val="300"/>
+                <a:spcPts val="0"/>
+              </a:spcBef>
+              <a:defRPr sz="1100" b="1">
+                <a:solidFill>
+                  <a:srgbClr val="1E40AF"/>
+                </a:solidFill>
+              </a:defRPr>
+            </a:pPr>
+            <a:r>
+              <a:t>• Used / Consumed (Default)</a:t>
+            </a:r>
+          </a:p>
+          <a:p>
+            <a:pPr>
+              <a:spcBef>
+                <a:spcPts val="200"/>
               </a:spcBef>
               <a:defRPr sz="950">
                 <a:solidFill>
@@ -12092,13 +10601,28 @@
               </a:defRPr>
             </a:pPr>
             <a:r>
-              <a:t>• Records individual batch inflow and consumption outflow</a:t>
+              <a:t>Standard culinary usage: ingredients cooked, eaten, or prepared for meals.</a:t>
             </a:r>
           </a:p>
           <a:p>
             <a:pPr>
               <a:spcBef>
-                <a:spcPts val="300"/>
+                <a:spcPts val="1200"/>
+              </a:spcBef>
+              <a:defRPr sz="1100" b="1">
+                <a:solidFill>
+                  <a:srgbClr val="1E40AF"/>
+                </a:solidFill>
+              </a:defRPr>
+            </a:pPr>
+            <a:r>
+              <a:t>• Spoiled / Expired</a:t>
+            </a:r>
+          </a:p>
+          <a:p>
+            <a:pPr>
+              <a:spcBef>
+                <a:spcPts val="200"/>
               </a:spcBef>
               <a:defRPr sz="950">
                 <a:solidFill>
@@ -12107,13 +10631,28 @@
               </a:defRPr>
             </a:pPr>
             <a:r>
-              <a:t>• Tracks specific purchase and expiration dates</a:t>
+              <a:t>Discarded inventory: food that reached past expiration, spoiled, or went bad.</a:t>
             </a:r>
           </a:p>
           <a:p>
             <a:pPr>
               <a:spcBef>
-                <a:spcPts val="300"/>
+                <a:spcPts val="1200"/>
+              </a:spcBef>
+              <a:defRPr sz="1100" b="1">
+                <a:solidFill>
+                  <a:srgbClr val="1E40AF"/>
+                </a:solidFill>
+              </a:defRPr>
+            </a:pPr>
+            <a:r>
+              <a:t>• Transferred</a:t>
+            </a:r>
+          </a:p>
+          <a:p>
+            <a:pPr>
+              <a:spcBef>
+                <a:spcPts val="200"/>
               </a:spcBef>
               <a:defRPr sz="950">
                 <a:solidFill>
@@ -12122,295 +10661,7 @@
               </a:defRPr>
             </a:pPr>
             <a:r>
-              <a:t>• Logs reason classification</a:t>
-            </a:r>
-          </a:p>
-          <a:p>
-            <a:pPr>
-              <a:spcBef>
-                <a:spcPts val="1400"/>
-              </a:spcBef>
-              <a:defRPr sz="1000" b="1">
-                <a:solidFill>
-                  <a:srgbClr val="2563EB"/>
-                </a:solidFill>
-              </a:defRPr>
-            </a:pPr>
-            <a:r>
-              <a:t>COLLABORATORS (Interacts With):</a:t>
-            </a:r>
-          </a:p>
-          <a:p>
-            <a:pPr>
-              <a:spcBef>
-                <a:spcPts val="300"/>
-              </a:spcBef>
-              <a:defRPr sz="950">
-                <a:solidFill>
-                  <a:srgbClr val="0F172A"/>
-                </a:solidFill>
-              </a:defRPr>
-            </a:pPr>
-            <a:r>
-              <a:t>• InventoryItem</a:t>
-            </a:r>
-          </a:p>
-        </p:txBody>
-      </p:sp>
-      <p:sp>
-        <p:nvSpPr>
-          <p:cNvPr id="12" name="Rounded Rectangle 11"/>
-          <p:cNvSpPr/>
-          <p:nvPr/>
-        </p:nvSpPr>
-        <p:spPr>
-          <a:xfrm>
-            <a:off x="7955280" y="1280160"/>
-            <a:ext cx="3474720" cy="4892040"/>
-          </a:xfrm>
-          <a:prstGeom prst="roundRect">
-            <a:avLst/>
-          </a:prstGeom>
-          <a:solidFill>
-            <a:srgbClr val="FFFFFF"/>
-          </a:solidFill>
-          <a:ln w="12700">
-            <a:solidFill>
-              <a:srgbClr val="CBD5E1"/>
-            </a:solidFill>
-          </a:ln>
-        </p:spPr>
-        <p:style>
-          <a:lnRef idx="1">
-            <a:schemeClr val="accent1"/>
-          </a:lnRef>
-          <a:fillRef idx="3">
-            <a:schemeClr val="accent1"/>
-          </a:fillRef>
-          <a:effectRef idx="2">
-            <a:schemeClr val="accent1"/>
-          </a:effectRef>
-          <a:fontRef idx="minor">
-            <a:schemeClr val="lt1"/>
-          </a:fontRef>
-        </p:style>
-        <p:txBody>
-          <a:bodyPr rtlCol="0" anchor="ctr"/>
-          <a:lstStyle/>
-          <a:p>
-            <a:pPr algn="ctr"/>
-          </a:p>
-        </p:txBody>
-      </p:sp>
-      <p:sp>
-        <p:nvSpPr>
-          <p:cNvPr id="13" name="Rectangle 12"/>
-          <p:cNvSpPr/>
-          <p:nvPr/>
-        </p:nvSpPr>
-        <p:spPr>
-          <a:xfrm>
-            <a:off x="7955280" y="1280160"/>
-            <a:ext cx="3474720" cy="384048"/>
-          </a:xfrm>
-          <a:prstGeom prst="rect">
-            <a:avLst/>
-          </a:prstGeom>
-          <a:solidFill>
-            <a:srgbClr val="10B981"/>
-          </a:solidFill>
-          <a:ln>
-            <a:noFill/>
-          </a:ln>
-        </p:spPr>
-        <p:style>
-          <a:lnRef idx="1">
-            <a:schemeClr val="accent1"/>
-          </a:lnRef>
-          <a:fillRef idx="3">
-            <a:schemeClr val="accent1"/>
-          </a:fillRef>
-          <a:effectRef idx="2">
-            <a:schemeClr val="accent1"/>
-          </a:effectRef>
-          <a:fontRef idx="minor">
-            <a:schemeClr val="lt1"/>
-          </a:fontRef>
-        </p:style>
-        <p:txBody>
-          <a:bodyPr rtlCol="0" anchor="ctr"/>
-          <a:lstStyle/>
-          <a:p>
-            <a:pPr algn="ctr">
-              <a:defRPr sz="1200" b="1">
-                <a:solidFill>
-                  <a:srgbClr val="FFFFFF"/>
-                </a:solidFill>
-              </a:defRPr>
-            </a:pPr>
-            <a:r>
-              <a:t>AlertEngine</a:t>
-            </a:r>
-          </a:p>
-        </p:txBody>
-      </p:sp>
-      <p:sp>
-        <p:nvSpPr>
-          <p:cNvPr id="14" name="TextBox 13"/>
-          <p:cNvSpPr txBox="1"/>
-          <p:nvPr/>
-        </p:nvSpPr>
-        <p:spPr>
-          <a:xfrm>
-            <a:off x="8092440" y="1783080"/>
-            <a:ext cx="3200400" cy="4206240"/>
-          </a:xfrm>
-          <a:prstGeom prst="rect">
-            <a:avLst/>
-          </a:prstGeom>
-          <a:noFill/>
-        </p:spPr>
-        <p:txBody>
-          <a:bodyPr wrap="square">
-            <a:spAutoFit/>
-          </a:bodyPr>
-          <a:lstStyle/>
-          <a:p>
-            <a:pPr>
-              <a:defRPr sz="1000" b="1">
-                <a:solidFill>
-                  <a:srgbClr val="0F172A"/>
-                </a:solidFill>
-              </a:defRPr>
-            </a:pPr>
-            <a:r>
-              <a:t>RESPONSIBILITIES (What it Does):</a:t>
-            </a:r>
-          </a:p>
-          <a:p>
-            <a:pPr>
-              <a:spcBef>
-                <a:spcPts val="300"/>
-              </a:spcBef>
-              <a:defRPr sz="950">
-                <a:solidFill>
-                  <a:srgbClr val="0F172A"/>
-                </a:solidFill>
-              </a:defRPr>
-            </a:pPr>
-            <a:r>
-              <a:t>• Scans batch expiration dates against today's date</a:t>
-            </a:r>
-          </a:p>
-          <a:p>
-            <a:pPr>
-              <a:spcBef>
-                <a:spcPts val="300"/>
-              </a:spcBef>
-              <a:defRPr sz="950">
-                <a:solidFill>
-                  <a:srgbClr val="0F172A"/>
-                </a:solidFill>
-              </a:defRPr>
-            </a:pPr>
-            <a:r>
-              <a:t>• Emits 3-day lookahead Expiring Soon alerts</a:t>
-            </a:r>
-          </a:p>
-          <a:p>
-            <a:pPr>
-              <a:spcBef>
-                <a:spcPts val="300"/>
-              </a:spcBef>
-              <a:defRPr sz="950">
-                <a:solidFill>
-                  <a:srgbClr val="0F172A"/>
-                </a:solidFill>
-              </a:defRPr>
-            </a:pPr>
-            <a:r>
-              <a:t>• Compiles Low Stock items into Shopping List</a:t>
-            </a:r>
-          </a:p>
-          <a:p>
-            <a:pPr>
-              <a:spcBef>
-                <a:spcPts val="1400"/>
-              </a:spcBef>
-              <a:defRPr sz="1000" b="1">
-                <a:solidFill>
-                  <a:srgbClr val="2563EB"/>
-                </a:solidFill>
-              </a:defRPr>
-            </a:pPr>
-            <a:r>
-              <a:t>COLLABORATORS (Interacts With):</a:t>
-            </a:r>
-          </a:p>
-          <a:p>
-            <a:pPr>
-              <a:spcBef>
-                <a:spcPts val="300"/>
-              </a:spcBef>
-              <a:defRPr sz="950">
-                <a:solidFill>
-                  <a:srgbClr val="0F172A"/>
-                </a:solidFill>
-              </a:defRPr>
-            </a:pPr>
-            <a:r>
-              <a:t>• InventoryItem</a:t>
-            </a:r>
-          </a:p>
-          <a:p>
-            <a:pPr>
-              <a:spcBef>
-                <a:spcPts val="300"/>
-              </a:spcBef>
-              <a:defRPr sz="950">
-                <a:solidFill>
-                  <a:srgbClr val="0F172A"/>
-                </a:solidFill>
-              </a:defRPr>
-            </a:pPr>
-            <a:r>
-              <a:t>• InventoryTransaction</a:t>
-            </a:r>
-          </a:p>
-        </p:txBody>
-      </p:sp>
-      <p:sp>
-        <p:nvSpPr>
-          <p:cNvPr id="15" name="TextBox 14"/>
-          <p:cNvSpPr txBox="1"/>
-          <p:nvPr/>
-        </p:nvSpPr>
-        <p:spPr>
-          <a:xfrm>
-            <a:off x="731520" y="6473952"/>
-            <a:ext cx="10728655" cy="274320"/>
-          </a:xfrm>
-          <a:prstGeom prst="rect">
-            <a:avLst/>
-          </a:prstGeom>
-          <a:noFill/>
-        </p:spPr>
-        <p:txBody>
-          <a:bodyPr wrap="none">
-            <a:spAutoFit/>
-          </a:bodyPr>
-          <a:lstStyle/>
-          <a:p>
-            <a:pPr>
-              <a:defRPr sz="900">
-                <a:solidFill>
-                  <a:srgbClr val="475569"/>
-                </a:solidFill>
-                <a:latin typeface="Arial"/>
-              </a:defRPr>
-            </a:pPr>
-            <a:r>
-              <a:t>Refrigerator &amp; Pantry Inventory System Prototype   •   Slide 7 of 13</a:t>
+              <a:t>Relocated inventory: stock transferred to another kitchen, station, or storage area.</a:t>
             </a:r>
           </a:p>
         </p:txBody>
@@ -12424,7 +10675,7 @@
 </file>
 
 <file path=ppt/slides/slide8.xml><?xml version="1.0" encoding="utf-8"?>
-<p:sld xmlns:a="http://schemas.openxmlformats.org/drawingml/2006/main" xmlns:p="http://schemas.openxmlformats.org/presentationml/2006/main" xmlns:r="http://schemas.openxmlformats.org/officeDocument/2006/relationships">
+<p:sld xmlns:a="http://schemas.openxmlformats.org/drawingml/2006/main" xmlns:r="http://schemas.openxmlformats.org/officeDocument/2006/relationships" xmlns:p="http://schemas.openxmlformats.org/presentationml/2006/main">
   <p:cSld>
     <p:spTree>
       <p:nvGrpSpPr>
@@ -12432,7 +10683,14 @@
         <p:cNvGrpSpPr/>
         <p:nvPr/>
       </p:nvGrpSpPr>
-      <p:grpSpPr/>
+      <p:grpSpPr>
+        <a:xfrm>
+          <a:off x="0" y="0"/>
+          <a:ext cx="0" cy="0"/>
+          <a:chOff x="0" y="0"/>
+          <a:chExt cx="0" cy="0"/>
+        </a:xfrm>
+      </p:grpSpPr>
       <p:sp>
         <p:nvSpPr>
           <p:cNvPr id="2" name="Rectangle 1"/>
@@ -12475,6 +10733,7 @@
           <a:lstStyle/>
           <a:p>
             <a:pPr algn="ctr"/>
+            <a:endParaRPr/>
           </a:p>
         </p:txBody>
       </p:sp>
@@ -12518,6 +10777,7 @@
           <a:lstStyle/>
           <a:p>
             <a:pPr algn="ctr"/>
+            <a:endParaRPr/>
           </a:p>
         </p:txBody>
       </p:sp>
@@ -12588,7 +10848,7 @@
               </a:defRPr>
             </a:pPr>
             <a:r>
-              <a:t>7. Inbound Stock-In Workflow &amp; Category Filter Feature</a:t>
+              <a:t>9. Real-Time Telemetry &amp; 5 Status Badges</a:t>
             </a:r>
           </a:p>
         </p:txBody>
@@ -12612,7 +10872,7 @@
           </a:solidFill>
           <a:ln w="19050">
             <a:solidFill>
-              <a:srgbClr val="2563EB"/>
+              <a:srgbClr val="10B981"/>
             </a:solidFill>
           </a:ln>
         </p:spPr>
@@ -12635,25 +10895,26 @@
           <a:lstStyle/>
           <a:p>
             <a:pPr algn="ctr"/>
-          </a:p>
-        </p:txBody>
-      </p:sp>
-      <p:sp>
-        <p:nvSpPr>
-          <p:cNvPr id="7" name="Rectangle 6"/>
+            <a:endParaRPr/>
+          </a:p>
+        </p:txBody>
+      </p:sp>
+      <p:sp>
+        <p:nvSpPr>
+          <p:cNvPr id="7" name="Rounded Rectangle 6"/>
           <p:cNvSpPr/>
           <p:nvPr/>
         </p:nvSpPr>
         <p:spPr>
           <a:xfrm>
-            <a:off x="1051560" y="1389888"/>
-            <a:ext cx="640080" cy="640080"/>
-          </a:xfrm>
-          <a:prstGeom prst="rect">
-            <a:avLst/>
-          </a:prstGeom>
-          <a:solidFill>
-            <a:srgbClr val="2563EB"/>
+            <a:off x="1051560" y="1417320"/>
+            <a:ext cx="320040" cy="594360"/>
+          </a:xfrm>
+          <a:prstGeom prst="roundRect">
+            <a:avLst/>
+          </a:prstGeom>
+          <a:solidFill>
+            <a:srgbClr val="10B981"/>
           </a:solidFill>
           <a:ln>
             <a:noFill/>
@@ -12677,16 +10938,8 @@
           <a:bodyPr rtlCol="0" anchor="ctr"/>
           <a:lstStyle/>
           <a:p>
-            <a:pPr algn="ctr">
-              <a:defRPr sz="1800" b="1">
-                <a:solidFill>
-                  <a:srgbClr val="FFFFFF"/>
-                </a:solidFill>
-              </a:defRPr>
-            </a:pPr>
-            <a:r>
-              <a:t>1</a:t>
-            </a:r>
+            <a:pPr algn="ctr"/>
+            <a:endParaRPr/>
           </a:p>
         </p:txBody>
       </p:sp>
@@ -12698,8 +10951,8 @@
         </p:nvSpPr>
         <p:spPr>
           <a:xfrm>
-            <a:off x="1828800" y="1325880"/>
-            <a:ext cx="9235440" cy="777240"/>
+            <a:off x="1508760" y="1325880"/>
+            <a:ext cx="9601200" cy="777240"/>
           </a:xfrm>
           <a:prstGeom prst="rect">
             <a:avLst/>
@@ -12715,12 +10968,12 @@
             <a:pPr>
               <a:defRPr sz="1100" b="1">
                 <a:solidFill>
-                  <a:srgbClr val="2563EB"/>
-                </a:solidFill>
-              </a:defRPr>
-            </a:pPr>
-            <a:r>
-              <a:t>Step 1: Open Stock-In Modal</a:t>
+                  <a:srgbClr val="10B981"/>
+                </a:solidFill>
+              </a:defRPr>
+            </a:pPr>
+            <a:r>
+              <a:t>SUFFICIENT (Green Badge)</a:t>
             </a:r>
           </a:p>
           <a:p>
@@ -12735,7 +10988,7 @@
               </a:defRPr>
             </a:pPr>
             <a:r>
-              <a:t>User clicks '+ In' on an inventory row or '+ Stock In' from the dashboard.</a:t>
+              <a:t>Trigger: current_stock &gt;= min_threshold &amp; No Expiring Batches   •   Healthy stock level; no immediate action required.</a:t>
             </a:r>
           </a:p>
         </p:txBody>
@@ -12759,7 +11012,7 @@
           </a:solidFill>
           <a:ln w="19050">
             <a:solidFill>
-              <a:srgbClr val="2563EB"/>
+              <a:srgbClr val="EAB308"/>
             </a:solidFill>
           </a:ln>
         </p:spPr>
@@ -12782,25 +11035,26 @@
           <a:lstStyle/>
           <a:p>
             <a:pPr algn="ctr"/>
-          </a:p>
-        </p:txBody>
-      </p:sp>
-      <p:sp>
-        <p:nvSpPr>
-          <p:cNvPr id="10" name="Rectangle 9"/>
+            <a:endParaRPr/>
+          </a:p>
+        </p:txBody>
+      </p:sp>
+      <p:sp>
+        <p:nvSpPr>
+          <p:cNvPr id="10" name="Rounded Rectangle 9"/>
           <p:cNvSpPr/>
           <p:nvPr/>
         </p:nvSpPr>
         <p:spPr>
           <a:xfrm>
-            <a:off x="1051560" y="2350008"/>
-            <a:ext cx="640080" cy="640080"/>
-          </a:xfrm>
-          <a:prstGeom prst="rect">
-            <a:avLst/>
-          </a:prstGeom>
-          <a:solidFill>
-            <a:srgbClr val="2563EB"/>
+            <a:off x="1051560" y="2377440"/>
+            <a:ext cx="320040" cy="594360"/>
+          </a:xfrm>
+          <a:prstGeom prst="roundRect">
+            <a:avLst/>
+          </a:prstGeom>
+          <a:solidFill>
+            <a:srgbClr val="EAB308"/>
           </a:solidFill>
           <a:ln>
             <a:noFill/>
@@ -12824,16 +11078,8 @@
           <a:bodyPr rtlCol="0" anchor="ctr"/>
           <a:lstStyle/>
           <a:p>
-            <a:pPr algn="ctr">
-              <a:defRPr sz="1800" b="1">
-                <a:solidFill>
-                  <a:srgbClr val="FFFFFF"/>
-                </a:solidFill>
-              </a:defRPr>
-            </a:pPr>
-            <a:r>
-              <a:t>2</a:t>
-            </a:r>
+            <a:pPr algn="ctr"/>
+            <a:endParaRPr/>
           </a:p>
         </p:txBody>
       </p:sp>
@@ -12845,8 +11091,8 @@
         </p:nvSpPr>
         <p:spPr>
           <a:xfrm>
-            <a:off x="1828800" y="2286000"/>
-            <a:ext cx="9235440" cy="777240"/>
+            <a:off x="1508760" y="2286000"/>
+            <a:ext cx="9601200" cy="777240"/>
           </a:xfrm>
           <a:prstGeom prst="rect">
             <a:avLst/>
@@ -12862,12 +11108,12 @@
             <a:pPr>
               <a:defRPr sz="1100" b="1">
                 <a:solidFill>
-                  <a:srgbClr val="2563EB"/>
-                </a:solidFill>
-              </a:defRPr>
-            </a:pPr>
-            <a:r>
-              <a:t>Step 2: Instant Category &amp; Keyword Filter</a:t>
+                  <a:srgbClr val="EAB308"/>
+                </a:solidFill>
+              </a:defRPr>
+            </a:pPr>
+            <a:r>
+              <a:t>LOW_STOCK (Yellow Badge)</a:t>
             </a:r>
           </a:p>
           <a:p>
@@ -12882,7 +11128,7 @@
               </a:defRPr>
             </a:pPr>
             <a:r>
-              <a:t>User selects a Category (e.g., 'Dairy Products') or types in the live search box. Modal dynamically filters dropdown to only matching materials.</a:t>
+              <a:t>Trigger: 0 &lt; current_stock &lt; min_threshold   •   Inventory running low; automatically added to Reorder Shopping List.</a:t>
             </a:r>
           </a:p>
         </p:txBody>
@@ -12906,7 +11152,7 @@
           </a:solidFill>
           <a:ln w="19050">
             <a:solidFill>
-              <a:srgbClr val="2563EB"/>
+              <a:srgbClr val="F59E0B"/>
             </a:solidFill>
           </a:ln>
         </p:spPr>
@@ -12929,25 +11175,26 @@
           <a:lstStyle/>
           <a:p>
             <a:pPr algn="ctr"/>
-          </a:p>
-        </p:txBody>
-      </p:sp>
-      <p:sp>
-        <p:nvSpPr>
-          <p:cNvPr id="13" name="Rectangle 12"/>
+            <a:endParaRPr/>
+          </a:p>
+        </p:txBody>
+      </p:sp>
+      <p:sp>
+        <p:nvSpPr>
+          <p:cNvPr id="13" name="Rounded Rectangle 12"/>
           <p:cNvSpPr/>
           <p:nvPr/>
         </p:nvSpPr>
         <p:spPr>
           <a:xfrm>
-            <a:off x="1051560" y="3310128"/>
-            <a:ext cx="640080" cy="640080"/>
-          </a:xfrm>
-          <a:prstGeom prst="rect">
-            <a:avLst/>
-          </a:prstGeom>
-          <a:solidFill>
-            <a:srgbClr val="2563EB"/>
+            <a:off x="1051560" y="3337560"/>
+            <a:ext cx="320040" cy="594360"/>
+          </a:xfrm>
+          <a:prstGeom prst="roundRect">
+            <a:avLst/>
+          </a:prstGeom>
+          <a:solidFill>
+            <a:srgbClr val="F59E0B"/>
           </a:solidFill>
           <a:ln>
             <a:noFill/>
@@ -12971,16 +11218,8 @@
           <a:bodyPr rtlCol="0" anchor="ctr"/>
           <a:lstStyle/>
           <a:p>
-            <a:pPr algn="ctr">
-              <a:defRPr sz="1800" b="1">
-                <a:solidFill>
-                  <a:srgbClr val="FFFFFF"/>
-                </a:solidFill>
-              </a:defRPr>
-            </a:pPr>
-            <a:r>
-              <a:t>3</a:t>
-            </a:r>
+            <a:pPr algn="ctr"/>
+            <a:endParaRPr/>
           </a:p>
         </p:txBody>
       </p:sp>
@@ -12992,8 +11231,8 @@
         </p:nvSpPr>
         <p:spPr>
           <a:xfrm>
-            <a:off x="1828800" y="3246120"/>
-            <a:ext cx="9235440" cy="777240"/>
+            <a:off x="1508760" y="3246120"/>
+            <a:ext cx="9601200" cy="777240"/>
           </a:xfrm>
           <a:prstGeom prst="rect">
             <a:avLst/>
@@ -13009,12 +11248,12 @@
             <a:pPr>
               <a:defRPr sz="1100" b="1">
                 <a:solidFill>
-                  <a:srgbClr val="2563EB"/>
-                </a:solidFill>
-              </a:defRPr>
-            </a:pPr>
-            <a:r>
-              <a:t>Step 3: Quantity &amp; Batch Dates Entry</a:t>
+                  <a:srgbClr val="F59E0B"/>
+                </a:solidFill>
+              </a:defRPr>
+            </a:pPr>
+            <a:r>
+              <a:t>EXPIRING_SOON (Orange Badge)</a:t>
             </a:r>
           </a:p>
           <a:p>
@@ -13029,7 +11268,7 @@
               </a:defRPr>
             </a:pPr>
             <a:r>
-              <a:t>User specifies intake quantity, purchase date, and batch expiration date.</a:t>
+              <a:t>Trigger: 0 &lt; (expiration_date - TODAY) &lt;= 3 Days   •   Batch near expiration; highlighted in top banner to prioritize usage.</a:t>
             </a:r>
           </a:p>
         </p:txBody>
@@ -13053,7 +11292,7 @@
           </a:solidFill>
           <a:ln w="19050">
             <a:solidFill>
-              <a:srgbClr val="2563EB"/>
+              <a:srgbClr val="EF4444"/>
             </a:solidFill>
           </a:ln>
         </p:spPr>
@@ -13076,25 +11315,26 @@
           <a:lstStyle/>
           <a:p>
             <a:pPr algn="ctr"/>
-          </a:p>
-        </p:txBody>
-      </p:sp>
-      <p:sp>
-        <p:nvSpPr>
-          <p:cNvPr id="16" name="Rectangle 15"/>
+            <a:endParaRPr/>
+          </a:p>
+        </p:txBody>
+      </p:sp>
+      <p:sp>
+        <p:nvSpPr>
+          <p:cNvPr id="16" name="Rounded Rectangle 15"/>
           <p:cNvSpPr/>
           <p:nvPr/>
         </p:nvSpPr>
         <p:spPr>
           <a:xfrm>
-            <a:off x="1051560" y="4270248"/>
-            <a:ext cx="640080" cy="640080"/>
-          </a:xfrm>
-          <a:prstGeom prst="rect">
-            <a:avLst/>
-          </a:prstGeom>
-          <a:solidFill>
-            <a:srgbClr val="2563EB"/>
+            <a:off x="1051560" y="4297680"/>
+            <a:ext cx="320040" cy="594360"/>
+          </a:xfrm>
+          <a:prstGeom prst="roundRect">
+            <a:avLst/>
+          </a:prstGeom>
+          <a:solidFill>
+            <a:srgbClr val="EF4444"/>
           </a:solidFill>
           <a:ln>
             <a:noFill/>
@@ -13118,16 +11358,8 @@
           <a:bodyPr rtlCol="0" anchor="ctr"/>
           <a:lstStyle/>
           <a:p>
-            <a:pPr algn="ctr">
-              <a:defRPr sz="1800" b="1">
-                <a:solidFill>
-                  <a:srgbClr val="FFFFFF"/>
-                </a:solidFill>
-              </a:defRPr>
-            </a:pPr>
-            <a:r>
-              <a:t>4</a:t>
-            </a:r>
+            <a:pPr algn="ctr"/>
+            <a:endParaRPr/>
           </a:p>
         </p:txBody>
       </p:sp>
@@ -13139,8 +11371,8 @@
         </p:nvSpPr>
         <p:spPr>
           <a:xfrm>
-            <a:off x="1828800" y="4206240"/>
-            <a:ext cx="9235440" cy="777240"/>
+            <a:off x="1508760" y="4206240"/>
+            <a:ext cx="9601200" cy="777240"/>
           </a:xfrm>
           <a:prstGeom prst="rect">
             <a:avLst/>
@@ -13156,12 +11388,12 @@
             <a:pPr>
               <a:defRPr sz="1100" b="1">
                 <a:solidFill>
-                  <a:srgbClr val="2563EB"/>
-                </a:solidFill>
-              </a:defRPr>
-            </a:pPr>
-            <a:r>
-              <a:t>Step 4: Reason Tagging</a:t>
+                  <a:srgbClr val="EF4444"/>
+                </a:solidFill>
+              </a:defRPr>
+            </a:pPr>
+            <a:r>
+              <a:t>EXPIRED (Red Badge)</a:t>
             </a:r>
           </a:p>
           <a:p>
@@ -13176,7 +11408,7 @@
               </a:defRPr>
             </a:pPr>
             <a:r>
-              <a:t>User selects reason: 'Initial Stock / Regular Purchase', 'Supplier Restock', or 'Fresh Produce Restock'.</a:t>
+              <a:t>Trigger: Positive batch with expiration_date &lt; TODAY   •   Batch past expiration; flagged for immediate inspection or discard.</a:t>
             </a:r>
           </a:p>
         </p:txBody>
@@ -13200,7 +11432,7 @@
           </a:solidFill>
           <a:ln w="19050">
             <a:solidFill>
-              <a:srgbClr val="2563EB"/>
+              <a:srgbClr val="0F172A"/>
             </a:solidFill>
           </a:ln>
         </p:spPr>
@@ -13223,25 +11455,26 @@
           <a:lstStyle/>
           <a:p>
             <a:pPr algn="ctr"/>
-          </a:p>
-        </p:txBody>
-      </p:sp>
-      <p:sp>
-        <p:nvSpPr>
-          <p:cNvPr id="19" name="Rectangle 18"/>
+            <a:endParaRPr/>
+          </a:p>
+        </p:txBody>
+      </p:sp>
+      <p:sp>
+        <p:nvSpPr>
+          <p:cNvPr id="19" name="Rounded Rectangle 18"/>
           <p:cNvSpPr/>
           <p:nvPr/>
         </p:nvSpPr>
         <p:spPr>
           <a:xfrm>
-            <a:off x="1051560" y="5230368"/>
-            <a:ext cx="640080" cy="640080"/>
-          </a:xfrm>
-          <a:prstGeom prst="rect">
-            <a:avLst/>
-          </a:prstGeom>
-          <a:solidFill>
-            <a:srgbClr val="2563EB"/>
+            <a:off x="1051560" y="5257800"/>
+            <a:ext cx="320040" cy="594360"/>
+          </a:xfrm>
+          <a:prstGeom prst="roundRect">
+            <a:avLst/>
+          </a:prstGeom>
+          <a:solidFill>
+            <a:srgbClr val="0F172A"/>
           </a:solidFill>
           <a:ln>
             <a:noFill/>
@@ -13265,16 +11498,8 @@
           <a:bodyPr rtlCol="0" anchor="ctr"/>
           <a:lstStyle/>
           <a:p>
-            <a:pPr algn="ctr">
-              <a:defRPr sz="1800" b="1">
-                <a:solidFill>
-                  <a:srgbClr val="FFFFFF"/>
-                </a:solidFill>
-              </a:defRPr>
-            </a:pPr>
-            <a:r>
-              <a:t>5</a:t>
-            </a:r>
+            <a:pPr algn="ctr"/>
+            <a:endParaRPr/>
           </a:p>
         </p:txBody>
       </p:sp>
@@ -13286,8 +11511,8 @@
         </p:nvSpPr>
         <p:spPr>
           <a:xfrm>
-            <a:off x="1828800" y="5166360"/>
-            <a:ext cx="9235440" cy="777240"/>
+            <a:off x="1508760" y="5166360"/>
+            <a:ext cx="9601200" cy="433452"/>
           </a:xfrm>
           <a:prstGeom prst="rect">
             <a:avLst/>
@@ -13303,12 +11528,21 @@
             <a:pPr>
               <a:defRPr sz="1100" b="1">
                 <a:solidFill>
-                  <a:srgbClr val="2563EB"/>
-                </a:solidFill>
-              </a:defRPr>
-            </a:pPr>
-            <a:r>
-              <a:t>Step 5: Database Commit &amp; Real-Time Sync</a:t>
+                  <a:srgbClr val="0F172A"/>
+                </a:solidFill>
+              </a:defRPr>
+            </a:pPr>
+            <a:r>
+              <a:rPr dirty="0"/>
+              <a:t>OUT_OF_STOCK (</a:t>
+            </a:r>
+            <a:r>
+              <a:rPr lang="en-IN" dirty="0"/>
+              <a:t>Basic Indication</a:t>
+            </a:r>
+            <a:r>
+              <a:rPr dirty="0"/>
+              <a:t>)</a:t>
             </a:r>
           </a:p>
           <a:p>
@@ -13323,43 +11557,16 @@
               </a:defRPr>
             </a:pPr>
             <a:r>
-              <a:t>POST /api/transactions/in logs the transaction, updates stock totals, and refreshes the UI dashboard instantly.</a:t>
-            </a:r>
-          </a:p>
-        </p:txBody>
-      </p:sp>
-      <p:sp>
-        <p:nvSpPr>
-          <p:cNvPr id="21" name="TextBox 20"/>
-          <p:cNvSpPr txBox="1"/>
-          <p:nvPr/>
-        </p:nvSpPr>
-        <p:spPr>
-          <a:xfrm>
-            <a:off x="731520" y="6473952"/>
-            <a:ext cx="10728655" cy="274320"/>
-          </a:xfrm>
-          <a:prstGeom prst="rect">
-            <a:avLst/>
-          </a:prstGeom>
-          <a:noFill/>
-        </p:spPr>
-        <p:txBody>
-          <a:bodyPr wrap="none">
-            <a:spAutoFit/>
-          </a:bodyPr>
-          <a:lstStyle/>
-          <a:p>
-            <a:pPr>
-              <a:defRPr sz="900">
-                <a:solidFill>
-                  <a:srgbClr val="475569"/>
-                </a:solidFill>
-                <a:latin typeface="Arial"/>
-              </a:defRPr>
-            </a:pPr>
-            <a:r>
-              <a:t>Refrigerator &amp; Pantry Inventory System Prototype   •   Slide 8 of 13</a:t>
+              <a:rPr dirty="0"/>
+              <a:t>Trigger: </a:t>
+            </a:r>
+            <a:r>
+              <a:rPr dirty="0" err="1"/>
+              <a:t>current_stock</a:t>
+            </a:r>
+            <a:r>
+              <a:rPr dirty="0"/>
+              <a:t> &lt;= 0   •   Completely depleted; urgent restock required.</a:t>
             </a:r>
           </a:p>
         </p:txBody>
@@ -13373,7 +11580,7 @@
 </file>
 
 <file path=ppt/slides/slide9.xml><?xml version="1.0" encoding="utf-8"?>
-<p:sld xmlns:a="http://schemas.openxmlformats.org/drawingml/2006/main" xmlns:p="http://schemas.openxmlformats.org/presentationml/2006/main" xmlns:r="http://schemas.openxmlformats.org/officeDocument/2006/relationships">
+<p:sld xmlns:a="http://schemas.openxmlformats.org/drawingml/2006/main" xmlns:r="http://schemas.openxmlformats.org/officeDocument/2006/relationships" xmlns:p="http://schemas.openxmlformats.org/presentationml/2006/main">
   <p:cSld>
     <p:spTree>
       <p:nvGrpSpPr>
@@ -13381,7 +11588,14 @@
         <p:cNvGrpSpPr/>
         <p:nvPr/>
       </p:nvGrpSpPr>
-      <p:grpSpPr/>
+      <p:grpSpPr>
+        <a:xfrm>
+          <a:off x="0" y="0"/>
+          <a:ext cx="0" cy="0"/>
+          <a:chOff x="0" y="0"/>
+          <a:chExt cx="0" cy="0"/>
+        </a:xfrm>
+      </p:grpSpPr>
       <p:sp>
         <p:nvSpPr>
           <p:cNvPr id="2" name="Rectangle 1"/>
@@ -13424,6 +11638,7 @@
           <a:lstStyle/>
           <a:p>
             <a:pPr algn="ctr"/>
+            <a:endParaRPr/>
           </a:p>
         </p:txBody>
       </p:sp>
@@ -13467,6 +11682,7 @@
           <a:lstStyle/>
           <a:p>
             <a:pPr algn="ctr"/>
+            <a:endParaRPr/>
           </a:p>
         </p:txBody>
       </p:sp>
@@ -13537,7 +11753,7 @@
               </a:defRPr>
             </a:pPr>
             <a:r>
-              <a:t>8. Outbound Stock-Out Workflow &amp; Validation Rules</a:t>
+              <a:t>10. Automated Reorder Shopping List Engine</a:t>
             </a:r>
           </a:p>
         </p:txBody>
@@ -13584,6 +11800,7 @@
           <a:lstStyle/>
           <a:p>
             <a:pPr algn="ctr"/>
+            <a:endParaRPr/>
           </a:p>
         </p:txBody>
       </p:sp>
@@ -13602,7 +11819,7 @@
             <a:avLst/>
           </a:prstGeom>
           <a:solidFill>
-            <a:srgbClr val="EF4444"/>
+            <a:srgbClr val="2563EB"/>
           </a:solidFill>
           <a:ln>
             <a:noFill/>
@@ -13634,7 +11851,7 @@
               </a:defRPr>
             </a:pPr>
             <a:r>
-              <a:t>Stock-Out Execution Flow</a:t>
+              <a:t>Reorder Calculation Formula</a:t>
             </a:r>
           </a:p>
         </p:txBody>
@@ -13662,17 +11879,40 @@
           <a:lstStyle/>
           <a:p>
             <a:pPr>
+              <a:defRPr sz="1100" b="1">
+                <a:solidFill>
+                  <a:srgbClr val="0F172A"/>
+                </a:solidFill>
+              </a:defRPr>
+            </a:pPr>
+            <a:r>
+              <a:t>Replenishment Target Formula:</a:t>
+            </a:r>
+          </a:p>
+          <a:p>
+            <a:pPr>
               <a:spcBef>
-                <a:spcPts val="0"/>
+                <a:spcPts val="400"/>
               </a:spcBef>
-              <a:defRPr sz="1100" b="1">
-                <a:solidFill>
-                  <a:srgbClr val="EF4444"/>
-                </a:solidFill>
-              </a:defRPr>
-            </a:pPr>
-            <a:r>
-              <a:t>1. Material Selection</a:t>
+              <a:defRPr sz="1000">
+                <a:solidFill>
+                  <a:srgbClr val="2563EB"/>
+                </a:solidFill>
+                <a:latin typeface="Courier New"/>
+              </a:defRPr>
+            </a:pPr>
+            <a:r>
+              <a:t>Target Stock = 2 × min_threshold</a:t>
+            </a:r>
+            <a:br/>
+            <a:r>
+              <a:t>Suggested Reorder = MAX(1, Target Stock - current_stock)</a:t>
+            </a:r>
+          </a:p>
+          <a:p>
+            <a:br/>
+            <a:r>
+              <a:t>Example Calculation (Lemons):</a:t>
             </a:r>
           </a:p>
           <a:p>
@@ -13687,97 +11927,19 @@
               </a:defRPr>
             </a:pPr>
             <a:r>
-              <a:t>User filters by category or searches item name inside the Stock-Out modal.</a:t>
-            </a:r>
-          </a:p>
-          <a:p>
-            <a:pPr>
-              <a:spcBef>
-                <a:spcPts val="800"/>
-              </a:spcBef>
-              <a:defRPr sz="1100" b="1">
-                <a:solidFill>
-                  <a:srgbClr val="EF4444"/>
-                </a:solidFill>
-              </a:defRPr>
-            </a:pPr>
-            <a:r>
-              <a:t>2. Stock Sufficiency Check</a:t>
-            </a:r>
-          </a:p>
-          <a:p>
-            <a:pPr>
-              <a:spcBef>
-                <a:spcPts val="200"/>
-              </a:spcBef>
-              <a:defRPr sz="950">
-                <a:solidFill>
-                  <a:srgbClr val="0F172A"/>
-                </a:solidFill>
-              </a:defRPr>
-            </a:pPr>
-            <a:r>
-              <a:t>Modal validates that deduction quantity &lt;= available stock balance. Over-deductions are blocked with an error banner.</a:t>
-            </a:r>
-          </a:p>
-          <a:p>
-            <a:pPr>
-              <a:spcBef>
-                <a:spcPts val="800"/>
-              </a:spcBef>
-              <a:defRPr sz="1100" b="1">
-                <a:solidFill>
-                  <a:srgbClr val="EF4444"/>
-                </a:solidFill>
-              </a:defRPr>
-            </a:pPr>
-            <a:r>
-              <a:t>3. Reason Classification</a:t>
-            </a:r>
-          </a:p>
-          <a:p>
-            <a:pPr>
-              <a:spcBef>
-                <a:spcPts val="200"/>
-              </a:spcBef>
-              <a:defRPr sz="950">
-                <a:solidFill>
-                  <a:srgbClr val="0F172A"/>
-                </a:solidFill>
-              </a:defRPr>
-            </a:pPr>
-            <a:r>
-              <a:t>User selects one of 3 clean reasons: 'Used / Consumed', 'Spoiled / Expired', or 'Transferred'.</a:t>
-            </a:r>
-          </a:p>
-          <a:p>
-            <a:pPr>
-              <a:spcBef>
-                <a:spcPts val="800"/>
-              </a:spcBef>
-              <a:defRPr sz="1100" b="1">
-                <a:solidFill>
-                  <a:srgbClr val="EF4444"/>
-                </a:solidFill>
-              </a:defRPr>
-            </a:pPr>
-            <a:r>
-              <a:t>4. Atomic Deduction Commit</a:t>
-            </a:r>
-          </a:p>
-          <a:p>
-            <a:pPr>
-              <a:spcBef>
-                <a:spcPts val="200"/>
-              </a:spcBef>
-              <a:defRPr sz="950">
-                <a:solidFill>
-                  <a:srgbClr val="0F172A"/>
-                </a:solidFill>
-              </a:defRPr>
-            </a:pPr>
-            <a:r>
-              <a:t>POST /api/transactions/out writes the 'OUT' transaction and updates the item's balance.</a:t>
+              <a:t>• Min Threshold: 10.0 units</a:t>
+            </a:r>
+            <a:br/>
+            <a:r>
+              <a:t>• Current Stock: 2.0 units</a:t>
+            </a:r>
+            <a:br/>
+            <a:r>
+              <a:t>• Target Level: 20.0 units</a:t>
+            </a:r>
+            <a:br/>
+            <a:r>
+              <a:t>• Suggested Reorder: 18.0 units (Urgency: HIGH)</a:t>
             </a:r>
           </a:p>
         </p:txBody>
@@ -13824,6 +11986,7 @@
           <a:lstStyle/>
           <a:p>
             <a:pPr algn="ctr"/>
+            <a:endParaRPr/>
           </a:p>
         </p:txBody>
       </p:sp>
@@ -13874,7 +12037,7 @@
               </a:defRPr>
             </a:pPr>
             <a:r>
-              <a:t>Deduction Reason Definitions</a:t>
+              <a:t>Shopping List Modal Features</a:t>
             </a:r>
           </a:p>
         </p:txBody>
@@ -13912,7 +12075,7 @@
               </a:defRPr>
             </a:pPr>
             <a:r>
-              <a:t>• Used / Consumed (Default)</a:t>
+              <a:t>✔ Automated Compilation</a:t>
             </a:r>
           </a:p>
           <a:p>
@@ -13927,13 +12090,13 @@
               </a:defRPr>
             </a:pPr>
             <a:r>
-              <a:t>Standard culinary usage: ingredients cooked, eaten, or prepared for meals.</a:t>
+              <a:t>GET /api/alerts/shopping-list dynamically gathers all depleted items below threshold.</a:t>
             </a:r>
           </a:p>
           <a:p>
             <a:pPr>
               <a:spcBef>
-                <a:spcPts val="1200"/>
+                <a:spcPts val="800"/>
               </a:spcBef>
               <a:defRPr sz="1100" b="1">
                 <a:solidFill>
@@ -13942,7 +12105,7 @@
               </a:defRPr>
             </a:pPr>
             <a:r>
-              <a:t>• Spoiled / Expired</a:t>
+              <a:t>✔ One-Click Access</a:t>
             </a:r>
           </a:p>
           <a:p>
@@ -13957,13 +12120,13 @@
               </a:defRPr>
             </a:pPr>
             <a:r>
-              <a:t>Discarded inventory: food that reached past expiration, spoiled, or went bad.</a:t>
+              <a:t>Top header button displays a live red badge count with total deficit items.</a:t>
             </a:r>
           </a:p>
           <a:p>
             <a:pPr>
               <a:spcBef>
-                <a:spcPts val="1200"/>
+                <a:spcPts val="800"/>
               </a:spcBef>
               <a:defRPr sz="1100" b="1">
                 <a:solidFill>
@@ -13972,7 +12135,7 @@
               </a:defRPr>
             </a:pPr>
             <a:r>
-              <a:t>• Transferred</a:t>
+              <a:t>✔ Urgency Badges</a:t>
             </a:r>
           </a:p>
           <a:p>
@@ -13987,43 +12150,37 @@
               </a:defRPr>
             </a:pPr>
             <a:r>
-              <a:t>Relocated inventory: stock transferred to another kitchen, station, or storage area.</a:t>
-            </a:r>
-          </a:p>
-        </p:txBody>
-      </p:sp>
-      <p:sp>
-        <p:nvSpPr>
-          <p:cNvPr id="12" name="TextBox 11"/>
-          <p:cNvSpPr txBox="1"/>
-          <p:nvPr/>
-        </p:nvSpPr>
-        <p:spPr>
-          <a:xfrm>
-            <a:off x="731520" y="6473952"/>
-            <a:ext cx="10728655" cy="274320"/>
-          </a:xfrm>
-          <a:prstGeom prst="rect">
-            <a:avLst/>
-          </a:prstGeom>
-          <a:noFill/>
-        </p:spPr>
-        <p:txBody>
-          <a:bodyPr wrap="none">
-            <a:spAutoFit/>
-          </a:bodyPr>
-          <a:lstStyle/>
-          <a:p>
-            <a:pPr>
-              <a:defRPr sz="900">
-                <a:solidFill>
-                  <a:srgbClr val="475569"/>
-                </a:solidFill>
-                <a:latin typeface="Arial"/>
-              </a:defRPr>
-            </a:pPr>
-            <a:r>
-              <a:t>Refrigerator &amp; Pantry Inventory System Prototype   •   Slide 9 of 13</a:t>
+              <a:t>Tags depleted stock (&lt;= 0) as 'CRITICAL' and low stock as 'HIGH'.</a:t>
+            </a:r>
+          </a:p>
+          <a:p>
+            <a:pPr>
+              <a:spcBef>
+                <a:spcPts val="800"/>
+              </a:spcBef>
+              <a:defRPr sz="1100" b="1">
+                <a:solidFill>
+                  <a:srgbClr val="1E40AF"/>
+                </a:solidFill>
+              </a:defRPr>
+            </a:pPr>
+            <a:r>
+              <a:t>✔ Category Breakdown</a:t>
+            </a:r>
+          </a:p>
+          <a:p>
+            <a:pPr>
+              <a:spcBef>
+                <a:spcPts val="200"/>
+              </a:spcBef>
+              <a:defRPr sz="950">
+                <a:solidFill>
+                  <a:srgbClr val="0F172A"/>
+                </a:solidFill>
+              </a:defRPr>
+            </a:pPr>
+            <a:r>
+              <a:t>Organizes items by category with exact units for easy in-store or online grocery purchasing.</a:t>
             </a:r>
           </a:p>
         </p:txBody>

--- a/RIMS_System_Specification.pptx
+++ b/RIMS_System_Specification.pptx
@@ -3456,42 +3456,6 @@
           </a:p>
         </p:txBody>
       </p:sp>
-      <p:sp>
-        <p:nvSpPr>
-          <p:cNvPr id="9" name="TextBox 8"/>
-          <p:cNvSpPr txBox="1"/>
-          <p:nvPr/>
-        </p:nvSpPr>
-        <p:spPr>
-          <a:xfrm>
-            <a:off x="731520" y="6473952"/>
-            <a:ext cx="10728655" cy="274320"/>
-          </a:xfrm>
-          <a:prstGeom prst="rect">
-            <a:avLst/>
-          </a:prstGeom>
-          <a:noFill/>
-        </p:spPr>
-        <p:txBody>
-          <a:bodyPr wrap="none">
-            <a:spAutoFit/>
-          </a:bodyPr>
-          <a:lstStyle/>
-          <a:p>
-            <a:pPr>
-              <a:defRPr sz="900">
-                <a:solidFill>
-                  <a:srgbClr val="475569"/>
-                </a:solidFill>
-                <a:latin typeface="Arial"/>
-              </a:defRPr>
-            </a:pPr>
-            <a:r>
-              <a:t>Refrigerator &amp; Pantry Inventory System Prototype   •   Slide 1 of 13</a:t>
-            </a:r>
-          </a:p>
-        </p:txBody>
-      </p:sp>
     </p:spTree>
   </p:cSld>
   <p:clrMapOvr>
@@ -7159,9 +7123,7 @@
             <a:srgbClr val="0F172A"/>
           </a:solidFill>
           <a:ln>
-            <a:solidFill>
-              <a:srgbClr val="2563EB"/>
-            </a:solidFill>
+            <a:noFill/>
           </a:ln>
         </p:spPr>
         <p:style>
@@ -7183,57 +7145,12 @@
           <a:lstStyle/>
           <a:p>
             <a:pPr algn="ctr"/>
-            <a:endParaRPr/>
-          </a:p>
-        </p:txBody>
-      </p:sp>
-      <p:sp>
-        <p:nvSpPr>
-          <p:cNvPr id="3" name="Rectangle 2"/>
-          <p:cNvSpPr/>
-          <p:nvPr/>
-        </p:nvSpPr>
-        <p:spPr>
-          <a:xfrm>
-            <a:off x="0" y="1033271"/>
-            <a:ext cx="12191695" cy="36576"/>
-          </a:xfrm>
-          <a:prstGeom prst="rect">
-            <a:avLst/>
-          </a:prstGeom>
-          <a:solidFill>
-            <a:srgbClr val="2563EB"/>
-          </a:solidFill>
-          <a:ln>
-            <a:noFill/>
-          </a:ln>
-        </p:spPr>
-        <p:style>
-          <a:lnRef idx="1">
-            <a:schemeClr val="accent1"/>
-          </a:lnRef>
-          <a:fillRef idx="3">
-            <a:schemeClr val="accent1"/>
-          </a:fillRef>
-          <a:effectRef idx="2">
-            <a:schemeClr val="accent1"/>
-          </a:effectRef>
-          <a:fontRef idx="minor">
-            <a:schemeClr val="lt1"/>
-          </a:fontRef>
-        </p:style>
-        <p:txBody>
-          <a:bodyPr rtlCol="0" anchor="ctr"/>
-          <a:lstStyle/>
-          <a:p>
-            <a:pPr algn="ctr"/>
-            <a:endParaRPr/>
-          </a:p>
-        </p:txBody>
-      </p:sp>
-      <p:sp>
-        <p:nvSpPr>
-          <p:cNvPr id="4" name="TextBox 3"/>
+          </a:p>
+        </p:txBody>
+      </p:sp>
+      <p:sp>
+        <p:nvSpPr>
+          <p:cNvPr id="3" name="TextBox 2"/>
           <p:cNvSpPr txBox="1"/>
           <p:nvPr/>
         </p:nvSpPr>
@@ -7254,11 +7171,10 @@
           <a:lstStyle/>
           <a:p>
             <a:pPr>
-              <a:defRPr sz="1000" b="1">
+              <a:defRPr sz="950" b="1">
                 <a:solidFill>
                   <a:srgbClr val="0EA5E9"/>
                 </a:solidFill>
-                <a:latin typeface="Arial"/>
               </a:defRPr>
             </a:pPr>
             <a:r>
@@ -7269,7 +7185,7 @@
       </p:sp>
       <p:sp>
         <p:nvSpPr>
-          <p:cNvPr id="5" name="TextBox 4"/>
+          <p:cNvPr id="4" name="TextBox 3"/>
           <p:cNvSpPr txBox="1"/>
           <p:nvPr/>
         </p:nvSpPr>
@@ -7290,127 +7206,52 @@
           <a:lstStyle/>
           <a:p>
             <a:pPr>
-              <a:defRPr sz="2200" b="1">
+              <a:defRPr sz="2000" b="1">
                 <a:solidFill>
                   <a:srgbClr val="FFFFFF"/>
                 </a:solidFill>
-                <a:latin typeface="Arial"/>
-              </a:defRPr>
-            </a:pPr>
-            <a:r>
-              <a:t>5. Object-Oriented Domain Entities &amp; UML Structure</a:t>
-            </a:r>
-          </a:p>
-        </p:txBody>
-      </p:sp>
-      <p:sp>
-        <p:nvSpPr>
-          <p:cNvPr id="6" name="Rounded Rectangle 5"/>
-          <p:cNvSpPr/>
-          <p:nvPr/>
-        </p:nvSpPr>
-        <p:spPr>
-          <a:xfrm>
-            <a:off x="731520" y="1280160"/>
-            <a:ext cx="3474720" cy="2240280"/>
-          </a:xfrm>
-          <a:prstGeom prst="roundRect">
-            <a:avLst/>
-          </a:prstGeom>
-          <a:solidFill>
-            <a:srgbClr val="FFFFFF"/>
-          </a:solidFill>
-          <a:ln w="12700">
-            <a:solidFill>
-              <a:srgbClr val="CBD5E1"/>
-            </a:solidFill>
-          </a:ln>
-        </p:spPr>
-        <p:style>
-          <a:lnRef idx="1">
-            <a:schemeClr val="accent1"/>
-          </a:lnRef>
-          <a:fillRef idx="3">
-            <a:schemeClr val="accent1"/>
-          </a:fillRef>
-          <a:effectRef idx="2">
-            <a:schemeClr val="accent1"/>
-          </a:effectRef>
-          <a:fontRef idx="minor">
-            <a:schemeClr val="lt1"/>
-          </a:fontRef>
-        </p:style>
-        <p:txBody>
-          <a:bodyPr rtlCol="0" anchor="ctr"/>
-          <a:lstStyle/>
-          <a:p>
-            <a:pPr algn="ctr"/>
-            <a:endParaRPr/>
-          </a:p>
-        </p:txBody>
-      </p:sp>
-      <p:sp>
-        <p:nvSpPr>
-          <p:cNvPr id="7" name="Rectangle 6"/>
-          <p:cNvSpPr/>
-          <p:nvPr/>
-        </p:nvSpPr>
-        <p:spPr>
-          <a:xfrm>
-            <a:off x="731520" y="1280160"/>
-            <a:ext cx="3474720" cy="384048"/>
+              </a:defRPr>
+            </a:pPr>
+            <a:r>
+              <a:t>3. Object-Oriented UML Class Diagram</a:t>
+            </a:r>
+          </a:p>
+        </p:txBody>
+      </p:sp>
+      <p:pic>
+        <p:nvPicPr>
+          <p:cNvPr id="5" name="Picture 4" descr="uml_class_diagram.png"/>
+          <p:cNvPicPr>
+            <a:picLocks noChangeAspect="1"/>
+          </p:cNvPicPr>
+          <p:nvPr/>
+        </p:nvPicPr>
+        <p:blipFill>
+          <a:blip r:embed="rId2"/>
+          <a:stretch>
+            <a:fillRect/>
+          </a:stretch>
+        </p:blipFill>
+        <p:spPr>
+          <a:xfrm>
+            <a:off x="731520" y="1188720"/>
+            <a:ext cx="10728655" cy="5120640"/>
           </a:xfrm>
           <a:prstGeom prst="rect">
             <a:avLst/>
           </a:prstGeom>
-          <a:solidFill>
-            <a:srgbClr val="0F172A"/>
-          </a:solidFill>
-          <a:ln>
-            <a:noFill/>
-          </a:ln>
-        </p:spPr>
-        <p:style>
-          <a:lnRef idx="1">
-            <a:schemeClr val="accent1"/>
-          </a:lnRef>
-          <a:fillRef idx="3">
-            <a:schemeClr val="accent1"/>
-          </a:fillRef>
-          <a:effectRef idx="2">
-            <a:schemeClr val="accent1"/>
-          </a:effectRef>
-          <a:fontRef idx="minor">
-            <a:schemeClr val="lt1"/>
-          </a:fontRef>
-        </p:style>
-        <p:txBody>
-          <a:bodyPr rtlCol="0" anchor="ctr"/>
-          <a:lstStyle/>
-          <a:p>
-            <a:pPr algn="ctr">
-              <a:defRPr sz="1200" b="1">
-                <a:solidFill>
-                  <a:srgbClr val="FFFFFF"/>
-                </a:solidFill>
-              </a:defRPr>
-            </a:pPr>
-            <a:r>
-              <a:t>Category | Domain Grouping</a:t>
-            </a:r>
-          </a:p>
-        </p:txBody>
-      </p:sp>
-      <p:sp>
-        <p:nvSpPr>
-          <p:cNvPr id="8" name="TextBox 7"/>
+        </p:spPr>
+      </p:pic>
+      <p:sp>
+        <p:nvSpPr>
+          <p:cNvPr id="6" name="TextBox 5"/>
           <p:cNvSpPr txBox="1"/>
           <p:nvPr/>
         </p:nvSpPr>
         <p:spPr>
           <a:xfrm>
-            <a:off x="822960" y="1737360"/>
-            <a:ext cx="3291840" cy="1691640"/>
+            <a:off x="731520" y="6446520"/>
+            <a:ext cx="10728655" cy="320040"/>
           </a:xfrm>
           <a:prstGeom prst="rect">
             <a:avLst/>
@@ -7418,828 +7259,20 @@
           <a:noFill/>
         </p:spPr>
         <p:txBody>
-          <a:bodyPr wrap="square">
+          <a:bodyPr wrap="none">
             <a:spAutoFit/>
           </a:bodyPr>
           <a:lstStyle/>
           <a:p>
             <a:pPr>
-              <a:spcBef>
-                <a:spcPts val="0"/>
-              </a:spcBef>
-              <a:defRPr sz="950">
-                <a:solidFill>
-                  <a:srgbClr val="0F172A"/>
-                </a:solidFill>
-              </a:defRPr>
-            </a:pPr>
-            <a:r>
-              <a:t>+ id: int [PK]</a:t>
-            </a:r>
-            <a:br/>
-            <a:r>
-              <a:t>+ name: string</a:t>
-            </a:r>
-            <a:br/>
-            <a:r>
-              <a:t>+ description: string</a:t>
-            </a:r>
-          </a:p>
-          <a:p>
-            <a:pPr>
-              <a:spcBef>
-                <a:spcPts val="400"/>
-              </a:spcBef>
-              <a:defRPr sz="950">
-                <a:solidFill>
-                  <a:srgbClr val="0F172A"/>
-                </a:solidFill>
-              </a:defRPr>
-            </a:pPr>
-            <a:r>
-              <a:t>+ getItems(): List&lt;InventoryItem&gt;</a:t>
-            </a:r>
-          </a:p>
-        </p:txBody>
-      </p:sp>
-      <p:sp>
-        <p:nvSpPr>
-          <p:cNvPr id="9" name="Rounded Rectangle 8"/>
-          <p:cNvSpPr/>
-          <p:nvPr/>
-        </p:nvSpPr>
-        <p:spPr>
-          <a:xfrm>
-            <a:off x="4343400" y="1280160"/>
-            <a:ext cx="3474720" cy="2240280"/>
-          </a:xfrm>
-          <a:prstGeom prst="roundRect">
-            <a:avLst/>
-          </a:prstGeom>
-          <a:solidFill>
-            <a:srgbClr val="FFFFFF"/>
-          </a:solidFill>
-          <a:ln w="12700">
-            <a:solidFill>
-              <a:srgbClr val="CBD5E1"/>
-            </a:solidFill>
-          </a:ln>
-        </p:spPr>
-        <p:style>
-          <a:lnRef idx="1">
-            <a:schemeClr val="accent1"/>
-          </a:lnRef>
-          <a:fillRef idx="3">
-            <a:schemeClr val="accent1"/>
-          </a:fillRef>
-          <a:effectRef idx="2">
-            <a:schemeClr val="accent1"/>
-          </a:effectRef>
-          <a:fontRef idx="minor">
-            <a:schemeClr val="lt1"/>
-          </a:fontRef>
-        </p:style>
-        <p:txBody>
-          <a:bodyPr rtlCol="0" anchor="ctr"/>
-          <a:lstStyle/>
-          <a:p>
-            <a:pPr algn="ctr"/>
-            <a:endParaRPr/>
-          </a:p>
-        </p:txBody>
-      </p:sp>
-      <p:sp>
-        <p:nvSpPr>
-          <p:cNvPr id="10" name="Rectangle 9"/>
-          <p:cNvSpPr/>
-          <p:nvPr/>
-        </p:nvSpPr>
-        <p:spPr>
-          <a:xfrm>
-            <a:off x="4343400" y="1280160"/>
-            <a:ext cx="3474720" cy="384048"/>
-          </a:xfrm>
-          <a:prstGeom prst="rect">
-            <a:avLst/>
-          </a:prstGeom>
-          <a:solidFill>
-            <a:srgbClr val="0F172A"/>
-          </a:solidFill>
-          <a:ln>
-            <a:noFill/>
-          </a:ln>
-        </p:spPr>
-        <p:style>
-          <a:lnRef idx="1">
-            <a:schemeClr val="accent1"/>
-          </a:lnRef>
-          <a:fillRef idx="3">
-            <a:schemeClr val="accent1"/>
-          </a:fillRef>
-          <a:effectRef idx="2">
-            <a:schemeClr val="accent1"/>
-          </a:effectRef>
-          <a:fontRef idx="minor">
-            <a:schemeClr val="lt1"/>
-          </a:fontRef>
-        </p:style>
-        <p:txBody>
-          <a:bodyPr rtlCol="0" anchor="ctr"/>
-          <a:lstStyle/>
-          <a:p>
-            <a:pPr algn="ctr">
-              <a:defRPr sz="1200" b="1">
-                <a:solidFill>
-                  <a:srgbClr val="FFFFFF"/>
-                </a:solidFill>
-              </a:defRPr>
-            </a:pPr>
-            <a:r>
-              <a:t>InventoryItem | Core Catalog Entity</a:t>
-            </a:r>
-          </a:p>
-        </p:txBody>
-      </p:sp>
-      <p:sp>
-        <p:nvSpPr>
-          <p:cNvPr id="11" name="TextBox 10"/>
-          <p:cNvSpPr txBox="1"/>
-          <p:nvPr/>
-        </p:nvSpPr>
-        <p:spPr>
-          <a:xfrm>
-            <a:off x="4434840" y="1737360"/>
-            <a:ext cx="3291840" cy="1691640"/>
-          </a:xfrm>
-          <a:prstGeom prst="rect">
-            <a:avLst/>
-          </a:prstGeom>
-          <a:noFill/>
-        </p:spPr>
-        <p:txBody>
-          <a:bodyPr wrap="square">
-            <a:spAutoFit/>
-          </a:bodyPr>
-          <a:lstStyle/>
-          <a:p>
-            <a:pPr>
-              <a:spcBef>
-                <a:spcPts val="0"/>
-              </a:spcBef>
-              <a:defRPr sz="950">
-                <a:solidFill>
-                  <a:srgbClr val="0F172A"/>
-                </a:solidFill>
-              </a:defRPr>
-            </a:pPr>
-            <a:r>
-              <a:t>+ id: int [PK]</a:t>
-            </a:r>
-            <a:br/>
-            <a:r>
-              <a:t>+ categoryId: int [FK]</a:t>
-            </a:r>
-            <a:br/>
-            <a:r>
-              <a:t>+ name: string</a:t>
-            </a:r>
-            <a:br/>
-            <a:r>
-              <a:t>+ unit: string</a:t>
-            </a:r>
-            <a:br/>
-            <a:r>
-              <a:t>+ minThreshold: float</a:t>
-            </a:r>
-          </a:p>
-          <a:p>
-            <a:pPr>
-              <a:spcBef>
-                <a:spcPts val="400"/>
-              </a:spcBef>
-              <a:defRPr sz="950">
-                <a:solidFill>
-                  <a:srgbClr val="0F172A"/>
-                </a:solidFill>
-              </a:defRPr>
-            </a:pPr>
-            <a:r>
-              <a:t>+ calculateCurrentStock(): float</a:t>
-            </a:r>
-            <a:br/>
-            <a:r>
-              <a:t>+ getNearestExpiration(): Date</a:t>
-            </a:r>
-            <a:br/>
-            <a:r>
-              <a:t>+ evaluateStatus(): StatusBadge</a:t>
-            </a:r>
-          </a:p>
-        </p:txBody>
-      </p:sp>
-      <p:sp>
-        <p:nvSpPr>
-          <p:cNvPr id="12" name="Rounded Rectangle 11"/>
-          <p:cNvSpPr/>
-          <p:nvPr/>
-        </p:nvSpPr>
-        <p:spPr>
-          <a:xfrm>
-            <a:off x="7955280" y="1280160"/>
-            <a:ext cx="3474720" cy="2240280"/>
-          </a:xfrm>
-          <a:prstGeom prst="roundRect">
-            <a:avLst/>
-          </a:prstGeom>
-          <a:solidFill>
-            <a:srgbClr val="FFFFFF"/>
-          </a:solidFill>
-          <a:ln w="12700">
-            <a:solidFill>
-              <a:srgbClr val="CBD5E1"/>
-            </a:solidFill>
-          </a:ln>
-        </p:spPr>
-        <p:style>
-          <a:lnRef idx="1">
-            <a:schemeClr val="accent1"/>
-          </a:lnRef>
-          <a:fillRef idx="3">
-            <a:schemeClr val="accent1"/>
-          </a:fillRef>
-          <a:effectRef idx="2">
-            <a:schemeClr val="accent1"/>
-          </a:effectRef>
-          <a:fontRef idx="minor">
-            <a:schemeClr val="lt1"/>
-          </a:fontRef>
-        </p:style>
-        <p:txBody>
-          <a:bodyPr rtlCol="0" anchor="ctr"/>
-          <a:lstStyle/>
-          <a:p>
-            <a:pPr algn="ctr"/>
-            <a:endParaRPr/>
-          </a:p>
-        </p:txBody>
-      </p:sp>
-      <p:sp>
-        <p:nvSpPr>
-          <p:cNvPr id="13" name="Rectangle 12"/>
-          <p:cNvSpPr/>
-          <p:nvPr/>
-        </p:nvSpPr>
-        <p:spPr>
-          <a:xfrm>
-            <a:off x="7955280" y="1280160"/>
-            <a:ext cx="3474720" cy="384048"/>
-          </a:xfrm>
-          <a:prstGeom prst="rect">
-            <a:avLst/>
-          </a:prstGeom>
-          <a:solidFill>
-            <a:srgbClr val="0F172A"/>
-          </a:solidFill>
-          <a:ln>
-            <a:noFill/>
-          </a:ln>
-        </p:spPr>
-        <p:style>
-          <a:lnRef idx="1">
-            <a:schemeClr val="accent1"/>
-          </a:lnRef>
-          <a:fillRef idx="3">
-            <a:schemeClr val="accent1"/>
-          </a:fillRef>
-          <a:effectRef idx="2">
-            <a:schemeClr val="accent1"/>
-          </a:effectRef>
-          <a:fontRef idx="minor">
-            <a:schemeClr val="lt1"/>
-          </a:fontRef>
-        </p:style>
-        <p:txBody>
-          <a:bodyPr rtlCol="0" anchor="ctr"/>
-          <a:lstStyle/>
-          <a:p>
-            <a:pPr algn="ctr">
-              <a:defRPr sz="1200" b="1">
-                <a:solidFill>
-                  <a:srgbClr val="FFFFFF"/>
-                </a:solidFill>
-              </a:defRPr>
-            </a:pPr>
-            <a:r>
-              <a:t>InventoryTransaction | Batch Movement Record</a:t>
-            </a:r>
-          </a:p>
-        </p:txBody>
-      </p:sp>
-      <p:sp>
-        <p:nvSpPr>
-          <p:cNvPr id="14" name="TextBox 13"/>
-          <p:cNvSpPr txBox="1"/>
-          <p:nvPr/>
-        </p:nvSpPr>
-        <p:spPr>
-          <a:xfrm>
-            <a:off x="8046720" y="1737360"/>
-            <a:ext cx="3291840" cy="1691640"/>
-          </a:xfrm>
-          <a:prstGeom prst="rect">
-            <a:avLst/>
-          </a:prstGeom>
-          <a:noFill/>
-        </p:spPr>
-        <p:txBody>
-          <a:bodyPr wrap="square">
-            <a:spAutoFit/>
-          </a:bodyPr>
-          <a:lstStyle/>
-          <a:p>
-            <a:pPr>
-              <a:spcBef>
-                <a:spcPts val="0"/>
-              </a:spcBef>
-              <a:defRPr sz="950">
-                <a:solidFill>
-                  <a:srgbClr val="0F172A"/>
-                </a:solidFill>
-              </a:defRPr>
-            </a:pPr>
-            <a:r>
-              <a:t>+ id: int [PK]</a:t>
-            </a:r>
-            <a:br/>
-            <a:r>
-              <a:t>+ itemId: int [FK]</a:t>
-            </a:r>
-            <a:br/>
-            <a:r>
-              <a:t>+ transactionType: 'IN'|'OUT'</a:t>
-            </a:r>
-            <a:br/>
-            <a:r>
-              <a:t>+ quantity: float</a:t>
-            </a:r>
-          </a:p>
-          <a:p>
-            <a:pPr>
-              <a:spcBef>
-                <a:spcPts val="400"/>
-              </a:spcBef>
-              <a:defRPr sz="950">
-                <a:solidFill>
-                  <a:srgbClr val="0F172A"/>
-                </a:solidFill>
-              </a:defRPr>
-            </a:pPr>
-            <a:r>
-              <a:t>+ purchaseDate: Date</a:t>
-            </a:r>
-            <a:br/>
-            <a:r>
-              <a:t>+ expirationDate: Date</a:t>
-            </a:r>
-            <a:br/>
-            <a:r>
-              <a:t>+ reason: string</a:t>
-            </a:r>
-          </a:p>
-        </p:txBody>
-      </p:sp>
-      <p:sp>
-        <p:nvSpPr>
-          <p:cNvPr id="15" name="Rounded Rectangle 14"/>
-          <p:cNvSpPr/>
-          <p:nvPr/>
-        </p:nvSpPr>
-        <p:spPr>
-          <a:xfrm>
-            <a:off x="731520" y="3703320"/>
-            <a:ext cx="3474720" cy="2240280"/>
-          </a:xfrm>
-          <a:prstGeom prst="roundRect">
-            <a:avLst/>
-          </a:prstGeom>
-          <a:solidFill>
-            <a:srgbClr val="FFFFFF"/>
-          </a:solidFill>
-          <a:ln w="12700">
-            <a:solidFill>
-              <a:srgbClr val="CBD5E1"/>
-            </a:solidFill>
-          </a:ln>
-        </p:spPr>
-        <p:style>
-          <a:lnRef idx="1">
-            <a:schemeClr val="accent1"/>
-          </a:lnRef>
-          <a:fillRef idx="3">
-            <a:schemeClr val="accent1"/>
-          </a:fillRef>
-          <a:effectRef idx="2">
-            <a:schemeClr val="accent1"/>
-          </a:effectRef>
-          <a:fontRef idx="minor">
-            <a:schemeClr val="lt1"/>
-          </a:fontRef>
-        </p:style>
-        <p:txBody>
-          <a:bodyPr rtlCol="0" anchor="ctr"/>
-          <a:lstStyle/>
-          <a:p>
-            <a:pPr algn="ctr"/>
-            <a:endParaRPr/>
-          </a:p>
-        </p:txBody>
-      </p:sp>
-      <p:sp>
-        <p:nvSpPr>
-          <p:cNvPr id="16" name="Rectangle 15"/>
-          <p:cNvSpPr/>
-          <p:nvPr/>
-        </p:nvSpPr>
-        <p:spPr>
-          <a:xfrm>
-            <a:off x="731520" y="3703320"/>
-            <a:ext cx="3474720" cy="384048"/>
-          </a:xfrm>
-          <a:prstGeom prst="rect">
-            <a:avLst/>
-          </a:prstGeom>
-          <a:solidFill>
-            <a:srgbClr val="0F172A"/>
-          </a:solidFill>
-          <a:ln>
-            <a:noFill/>
-          </a:ln>
-        </p:spPr>
-        <p:style>
-          <a:lnRef idx="1">
-            <a:schemeClr val="accent1"/>
-          </a:lnRef>
-          <a:fillRef idx="3">
-            <a:schemeClr val="accent1"/>
-          </a:fillRef>
-          <a:effectRef idx="2">
-            <a:schemeClr val="accent1"/>
-          </a:effectRef>
-          <a:fontRef idx="minor">
-            <a:schemeClr val="lt1"/>
-          </a:fontRef>
-        </p:style>
-        <p:txBody>
-          <a:bodyPr rtlCol="0" anchor="ctr"/>
-          <a:lstStyle/>
-          <a:p>
-            <a:pPr algn="ctr">
-              <a:defRPr sz="1200" b="1">
-                <a:solidFill>
-                  <a:srgbClr val="FFFFFF"/>
-                </a:solidFill>
-              </a:defRPr>
-            </a:pPr>
-            <a:r>
-              <a:t>AlertEngine | Telemetry Service</a:t>
-            </a:r>
-          </a:p>
-        </p:txBody>
-      </p:sp>
-      <p:sp>
-        <p:nvSpPr>
-          <p:cNvPr id="17" name="TextBox 16"/>
-          <p:cNvSpPr txBox="1"/>
-          <p:nvPr/>
-        </p:nvSpPr>
-        <p:spPr>
-          <a:xfrm>
-            <a:off x="822960" y="4160520"/>
-            <a:ext cx="3291840" cy="1691640"/>
-          </a:xfrm>
-          <a:prstGeom prst="rect">
-            <a:avLst/>
-          </a:prstGeom>
-          <a:noFill/>
-        </p:spPr>
-        <p:txBody>
-          <a:bodyPr wrap="square">
-            <a:spAutoFit/>
-          </a:bodyPr>
-          <a:lstStyle/>
-          <a:p>
-            <a:pPr>
-              <a:spcBef>
-                <a:spcPts val="0"/>
-              </a:spcBef>
-              <a:defRPr sz="950">
-                <a:solidFill>
-                  <a:srgbClr val="0F172A"/>
-                </a:solidFill>
-              </a:defRPr>
-            </a:pPr>
-            <a:r>
-              <a:t>+ evaluateExpiringLots(horizonDays=3): List&lt;Alert&gt;</a:t>
-            </a:r>
-            <a:br/>
-            <a:r>
-              <a:t>+ evaluateLowStock(): List&lt;ShoppingListItem&gt;</a:t>
-            </a:r>
-          </a:p>
-        </p:txBody>
-      </p:sp>
-      <p:sp>
-        <p:nvSpPr>
-          <p:cNvPr id="18" name="Rounded Rectangle 17"/>
-          <p:cNvSpPr/>
-          <p:nvPr/>
-        </p:nvSpPr>
-        <p:spPr>
-          <a:xfrm>
-            <a:off x="4343400" y="3703320"/>
-            <a:ext cx="3474720" cy="2240280"/>
-          </a:xfrm>
-          <a:prstGeom prst="roundRect">
-            <a:avLst/>
-          </a:prstGeom>
-          <a:solidFill>
-            <a:srgbClr val="FFFFFF"/>
-          </a:solidFill>
-          <a:ln w="12700">
-            <a:solidFill>
-              <a:srgbClr val="CBD5E1"/>
-            </a:solidFill>
-          </a:ln>
-        </p:spPr>
-        <p:style>
-          <a:lnRef idx="1">
-            <a:schemeClr val="accent1"/>
-          </a:lnRef>
-          <a:fillRef idx="3">
-            <a:schemeClr val="accent1"/>
-          </a:fillRef>
-          <a:effectRef idx="2">
-            <a:schemeClr val="accent1"/>
-          </a:effectRef>
-          <a:fontRef idx="minor">
-            <a:schemeClr val="lt1"/>
-          </a:fontRef>
-        </p:style>
-        <p:txBody>
-          <a:bodyPr rtlCol="0" anchor="ctr"/>
-          <a:lstStyle/>
-          <a:p>
-            <a:pPr algn="ctr"/>
-            <a:endParaRPr/>
-          </a:p>
-        </p:txBody>
-      </p:sp>
-      <p:sp>
-        <p:nvSpPr>
-          <p:cNvPr id="19" name="Rectangle 18"/>
-          <p:cNvSpPr/>
-          <p:nvPr/>
-        </p:nvSpPr>
-        <p:spPr>
-          <a:xfrm>
-            <a:off x="4343400" y="3703320"/>
-            <a:ext cx="3474720" cy="384048"/>
-          </a:xfrm>
-          <a:prstGeom prst="rect">
-            <a:avLst/>
-          </a:prstGeom>
-          <a:solidFill>
-            <a:srgbClr val="0F172A"/>
-          </a:solidFill>
-          <a:ln>
-            <a:noFill/>
-          </a:ln>
-        </p:spPr>
-        <p:style>
-          <a:lnRef idx="1">
-            <a:schemeClr val="accent1"/>
-          </a:lnRef>
-          <a:fillRef idx="3">
-            <a:schemeClr val="accent1"/>
-          </a:fillRef>
-          <a:effectRef idx="2">
-            <a:schemeClr val="accent1"/>
-          </a:effectRef>
-          <a:fontRef idx="minor">
-            <a:schemeClr val="lt1"/>
-          </a:fontRef>
-        </p:style>
-        <p:txBody>
-          <a:bodyPr rtlCol="0" anchor="ctr"/>
-          <a:lstStyle/>
-          <a:p>
-            <a:pPr algn="ctr">
-              <a:defRPr sz="1200" b="1">
-                <a:solidFill>
-                  <a:srgbClr val="FFFFFF"/>
-                </a:solidFill>
-              </a:defRPr>
-            </a:pPr>
-            <a:r>
-              <a:t>StockInPayload | Inbound DTO</a:t>
-            </a:r>
-          </a:p>
-        </p:txBody>
-      </p:sp>
-      <p:sp>
-        <p:nvSpPr>
-          <p:cNvPr id="20" name="TextBox 19"/>
-          <p:cNvSpPr txBox="1"/>
-          <p:nvPr/>
-        </p:nvSpPr>
-        <p:spPr>
-          <a:xfrm>
-            <a:off x="4434840" y="4160520"/>
-            <a:ext cx="3291840" cy="1691640"/>
-          </a:xfrm>
-          <a:prstGeom prst="rect">
-            <a:avLst/>
-          </a:prstGeom>
-          <a:noFill/>
-        </p:spPr>
-        <p:txBody>
-          <a:bodyPr wrap="square">
-            <a:spAutoFit/>
-          </a:bodyPr>
-          <a:lstStyle/>
-          <a:p>
-            <a:pPr>
-              <a:spcBef>
-                <a:spcPts val="0"/>
-              </a:spcBef>
-              <a:defRPr sz="950">
-                <a:solidFill>
-                  <a:srgbClr val="0F172A"/>
-                </a:solidFill>
-              </a:defRPr>
-            </a:pPr>
-            <a:r>
-              <a:t>+ itemId: int</a:t>
-            </a:r>
-            <a:br/>
-            <a:r>
-              <a:t>+ quantity: float</a:t>
-            </a:r>
-            <a:br/>
-            <a:r>
-              <a:t>+ purchaseDate: Date</a:t>
-            </a:r>
-            <a:br/>
-            <a:r>
-              <a:t>+ expirationDate: Date</a:t>
-            </a:r>
-            <a:br/>
-            <a:r>
-              <a:t>+ reason: string</a:t>
-            </a:r>
-          </a:p>
-        </p:txBody>
-      </p:sp>
-      <p:sp>
-        <p:nvSpPr>
-          <p:cNvPr id="21" name="Rounded Rectangle 20"/>
-          <p:cNvSpPr/>
-          <p:nvPr/>
-        </p:nvSpPr>
-        <p:spPr>
-          <a:xfrm>
-            <a:off x="7955280" y="3703320"/>
-            <a:ext cx="3474720" cy="2240280"/>
-          </a:xfrm>
-          <a:prstGeom prst="roundRect">
-            <a:avLst/>
-          </a:prstGeom>
-          <a:solidFill>
-            <a:srgbClr val="FFFFFF"/>
-          </a:solidFill>
-          <a:ln w="12700">
-            <a:solidFill>
-              <a:srgbClr val="CBD5E1"/>
-            </a:solidFill>
-          </a:ln>
-        </p:spPr>
-        <p:style>
-          <a:lnRef idx="1">
-            <a:schemeClr val="accent1"/>
-          </a:lnRef>
-          <a:fillRef idx="3">
-            <a:schemeClr val="accent1"/>
-          </a:fillRef>
-          <a:effectRef idx="2">
-            <a:schemeClr val="accent1"/>
-          </a:effectRef>
-          <a:fontRef idx="minor">
-            <a:schemeClr val="lt1"/>
-          </a:fontRef>
-        </p:style>
-        <p:txBody>
-          <a:bodyPr rtlCol="0" anchor="ctr"/>
-          <a:lstStyle/>
-          <a:p>
-            <a:pPr algn="ctr"/>
-            <a:endParaRPr/>
-          </a:p>
-        </p:txBody>
-      </p:sp>
-      <p:sp>
-        <p:nvSpPr>
-          <p:cNvPr id="22" name="Rectangle 21"/>
-          <p:cNvSpPr/>
-          <p:nvPr/>
-        </p:nvSpPr>
-        <p:spPr>
-          <a:xfrm>
-            <a:off x="7955280" y="3703320"/>
-            <a:ext cx="3474720" cy="384048"/>
-          </a:xfrm>
-          <a:prstGeom prst="rect">
-            <a:avLst/>
-          </a:prstGeom>
-          <a:solidFill>
-            <a:srgbClr val="0F172A"/>
-          </a:solidFill>
-          <a:ln>
-            <a:noFill/>
-          </a:ln>
-        </p:spPr>
-        <p:style>
-          <a:lnRef idx="1">
-            <a:schemeClr val="accent1"/>
-          </a:lnRef>
-          <a:fillRef idx="3">
-            <a:schemeClr val="accent1"/>
-          </a:fillRef>
-          <a:effectRef idx="2">
-            <a:schemeClr val="accent1"/>
-          </a:effectRef>
-          <a:fontRef idx="minor">
-            <a:schemeClr val="lt1"/>
-          </a:fontRef>
-        </p:style>
-        <p:txBody>
-          <a:bodyPr rtlCol="0" anchor="ctr"/>
-          <a:lstStyle/>
-          <a:p>
-            <a:pPr algn="ctr">
-              <a:defRPr sz="1200" b="1">
-                <a:solidFill>
-                  <a:srgbClr val="FFFFFF"/>
-                </a:solidFill>
-              </a:defRPr>
-            </a:pPr>
-            <a:r>
-              <a:t>StockOutPayload | Outbound DTO</a:t>
-            </a:r>
-          </a:p>
-        </p:txBody>
-      </p:sp>
-      <p:sp>
-        <p:nvSpPr>
-          <p:cNvPr id="23" name="TextBox 22"/>
-          <p:cNvSpPr txBox="1"/>
-          <p:nvPr/>
-        </p:nvSpPr>
-        <p:spPr>
-          <a:xfrm>
-            <a:off x="8046720" y="4160520"/>
-            <a:ext cx="3291840" cy="1691640"/>
-          </a:xfrm>
-          <a:prstGeom prst="rect">
-            <a:avLst/>
-          </a:prstGeom>
-          <a:noFill/>
-        </p:spPr>
-        <p:txBody>
-          <a:bodyPr wrap="square">
-            <a:spAutoFit/>
-          </a:bodyPr>
-          <a:lstStyle/>
-          <a:p>
-            <a:pPr>
-              <a:spcBef>
-                <a:spcPts val="0"/>
-              </a:spcBef>
-              <a:defRPr sz="950">
-                <a:solidFill>
-                  <a:srgbClr val="0F172A"/>
-                </a:solidFill>
-              </a:defRPr>
-            </a:pPr>
-            <a:r>
-              <a:t>+ itemId: int</a:t>
-            </a:r>
-            <a:br/>
-            <a:r>
-              <a:t>+ quantity: float</a:t>
-            </a:r>
-            <a:br/>
-            <a:r>
-              <a:t>+ reason: 'Used/Consumed'|'Spoiled/Expired'|'Transferred'</a:t>
+              <a:defRPr sz="900">
+                <a:solidFill>
+                  <a:srgbClr val="64748B"/>
+                </a:solidFill>
+              </a:defRPr>
+            </a:pPr>
+            <a:r>
+              <a:t>Refrigerator &amp; Pantry Inventory Subsystem (RIMS)   |   Slide 4 of 11</a:t>
             </a:r>
           </a:p>
         </p:txBody>
@@ -8287,9 +7320,7 @@
             <a:srgbClr val="0F172A"/>
           </a:solidFill>
           <a:ln>
-            <a:solidFill>
-              <a:srgbClr val="2563EB"/>
-            </a:solidFill>
+            <a:noFill/>
           </a:ln>
         </p:spPr>
         <p:style>
@@ -8311,57 +7342,12 @@
           <a:lstStyle/>
           <a:p>
             <a:pPr algn="ctr"/>
-            <a:endParaRPr/>
-          </a:p>
-        </p:txBody>
-      </p:sp>
-      <p:sp>
-        <p:nvSpPr>
-          <p:cNvPr id="3" name="Rectangle 2"/>
-          <p:cNvSpPr/>
-          <p:nvPr/>
-        </p:nvSpPr>
-        <p:spPr>
-          <a:xfrm>
-            <a:off x="0" y="1033271"/>
-            <a:ext cx="12191695" cy="36576"/>
-          </a:xfrm>
-          <a:prstGeom prst="rect">
-            <a:avLst/>
-          </a:prstGeom>
-          <a:solidFill>
-            <a:srgbClr val="2563EB"/>
-          </a:solidFill>
-          <a:ln>
-            <a:noFill/>
-          </a:ln>
-        </p:spPr>
-        <p:style>
-          <a:lnRef idx="1">
-            <a:schemeClr val="accent1"/>
-          </a:lnRef>
-          <a:fillRef idx="3">
-            <a:schemeClr val="accent1"/>
-          </a:fillRef>
-          <a:effectRef idx="2">
-            <a:schemeClr val="accent1"/>
-          </a:effectRef>
-          <a:fontRef idx="minor">
-            <a:schemeClr val="lt1"/>
-          </a:fontRef>
-        </p:style>
-        <p:txBody>
-          <a:bodyPr rtlCol="0" anchor="ctr"/>
-          <a:lstStyle/>
-          <a:p>
-            <a:pPr algn="ctr"/>
-            <a:endParaRPr/>
-          </a:p>
-        </p:txBody>
-      </p:sp>
-      <p:sp>
-        <p:nvSpPr>
-          <p:cNvPr id="4" name="TextBox 3"/>
+          </a:p>
+        </p:txBody>
+      </p:sp>
+      <p:sp>
+        <p:nvSpPr>
+          <p:cNvPr id="3" name="TextBox 2"/>
           <p:cNvSpPr txBox="1"/>
           <p:nvPr/>
         </p:nvSpPr>
@@ -8382,11 +7368,10 @@
           <a:lstStyle/>
           <a:p>
             <a:pPr>
-              <a:defRPr sz="1000" b="1">
+              <a:defRPr sz="950" b="1">
                 <a:solidFill>
                   <a:srgbClr val="0EA5E9"/>
                 </a:solidFill>
-                <a:latin typeface="Arial"/>
               </a:defRPr>
             </a:pPr>
             <a:r>
@@ -8397,7 +7382,7 @@
       </p:sp>
       <p:sp>
         <p:nvSpPr>
-          <p:cNvPr id="5" name="TextBox 4"/>
+          <p:cNvPr id="4" name="TextBox 3"/>
           <p:cNvSpPr txBox="1"/>
           <p:nvPr/>
         </p:nvSpPr>
@@ -8418,127 +7403,52 @@
           <a:lstStyle/>
           <a:p>
             <a:pPr>
-              <a:defRPr sz="2200" b="1">
+              <a:defRPr sz="2000" b="1">
                 <a:solidFill>
                   <a:srgbClr val="FFFFFF"/>
                 </a:solidFill>
-                <a:latin typeface="Arial"/>
-              </a:defRPr>
-            </a:pPr>
-            <a:r>
-              <a:t>6. Class-Responsibility-Collaborator (CRC) Cards</a:t>
-            </a:r>
-          </a:p>
-        </p:txBody>
-      </p:sp>
-      <p:sp>
-        <p:nvSpPr>
-          <p:cNvPr id="6" name="Rounded Rectangle 5"/>
-          <p:cNvSpPr/>
-          <p:nvPr/>
-        </p:nvSpPr>
-        <p:spPr>
-          <a:xfrm>
-            <a:off x="731520" y="1280160"/>
-            <a:ext cx="3474720" cy="4892040"/>
-          </a:xfrm>
-          <a:prstGeom prst="roundRect">
-            <a:avLst/>
-          </a:prstGeom>
-          <a:solidFill>
-            <a:srgbClr val="FFFFFF"/>
-          </a:solidFill>
-          <a:ln w="12700">
-            <a:solidFill>
-              <a:srgbClr val="CBD5E1"/>
-            </a:solidFill>
-          </a:ln>
-        </p:spPr>
-        <p:style>
-          <a:lnRef idx="1">
-            <a:schemeClr val="accent1"/>
-          </a:lnRef>
-          <a:fillRef idx="3">
-            <a:schemeClr val="accent1"/>
-          </a:fillRef>
-          <a:effectRef idx="2">
-            <a:schemeClr val="accent1"/>
-          </a:effectRef>
-          <a:fontRef idx="minor">
-            <a:schemeClr val="lt1"/>
-          </a:fontRef>
-        </p:style>
-        <p:txBody>
-          <a:bodyPr rtlCol="0" anchor="ctr"/>
-          <a:lstStyle/>
-          <a:p>
-            <a:pPr algn="ctr"/>
-            <a:endParaRPr/>
-          </a:p>
-        </p:txBody>
-      </p:sp>
-      <p:sp>
-        <p:nvSpPr>
-          <p:cNvPr id="7" name="Rectangle 6"/>
-          <p:cNvSpPr/>
-          <p:nvPr/>
-        </p:nvSpPr>
-        <p:spPr>
-          <a:xfrm>
-            <a:off x="731520" y="1280160"/>
-            <a:ext cx="3474720" cy="384048"/>
+              </a:defRPr>
+            </a:pPr>
+            <a:r>
+              <a:t>4. Class-Responsibility-Collaborator (CRC) Cards</a:t>
+            </a:r>
+          </a:p>
+        </p:txBody>
+      </p:sp>
+      <p:pic>
+        <p:nvPicPr>
+          <p:cNvPr id="5" name="Picture 4" descr="crc_cards_diagram.png"/>
+          <p:cNvPicPr>
+            <a:picLocks noChangeAspect="1"/>
+          </p:cNvPicPr>
+          <p:nvPr/>
+        </p:nvPicPr>
+        <p:blipFill>
+          <a:blip r:embed="rId2"/>
+          <a:stretch>
+            <a:fillRect/>
+          </a:stretch>
+        </p:blipFill>
+        <p:spPr>
+          <a:xfrm>
+            <a:off x="731520" y="1188720"/>
+            <a:ext cx="10728655" cy="5120640"/>
           </a:xfrm>
           <a:prstGeom prst="rect">
             <a:avLst/>
           </a:prstGeom>
-          <a:solidFill>
-            <a:srgbClr val="2563EB"/>
-          </a:solidFill>
-          <a:ln>
-            <a:noFill/>
-          </a:ln>
-        </p:spPr>
-        <p:style>
-          <a:lnRef idx="1">
-            <a:schemeClr val="accent1"/>
-          </a:lnRef>
-          <a:fillRef idx="3">
-            <a:schemeClr val="accent1"/>
-          </a:fillRef>
-          <a:effectRef idx="2">
-            <a:schemeClr val="accent1"/>
-          </a:effectRef>
-          <a:fontRef idx="minor">
-            <a:schemeClr val="lt1"/>
-          </a:fontRef>
-        </p:style>
-        <p:txBody>
-          <a:bodyPr rtlCol="0" anchor="ctr"/>
-          <a:lstStyle/>
-          <a:p>
-            <a:pPr algn="ctr">
-              <a:defRPr sz="1200" b="1">
-                <a:solidFill>
-                  <a:srgbClr val="FFFFFF"/>
-                </a:solidFill>
-              </a:defRPr>
-            </a:pPr>
-            <a:r>
-              <a:t>InventoryItem</a:t>
-            </a:r>
-          </a:p>
-        </p:txBody>
-      </p:sp>
-      <p:sp>
-        <p:nvSpPr>
-          <p:cNvPr id="8" name="TextBox 7"/>
+        </p:spPr>
+      </p:pic>
+      <p:sp>
+        <p:nvSpPr>
+          <p:cNvPr id="6" name="TextBox 5"/>
           <p:cNvSpPr txBox="1"/>
           <p:nvPr/>
         </p:nvSpPr>
         <p:spPr>
           <a:xfrm>
-            <a:off x="868680" y="1783080"/>
-            <a:ext cx="3200400" cy="4206240"/>
+            <a:off x="731520" y="6446520"/>
+            <a:ext cx="10728655" cy="320040"/>
           </a:xfrm>
           <a:prstGeom prst="rect">
             <a:avLst/>
@@ -8546,556 +7456,20 @@
           <a:noFill/>
         </p:spPr>
         <p:txBody>
-          <a:bodyPr wrap="square">
+          <a:bodyPr wrap="none">
             <a:spAutoFit/>
           </a:bodyPr>
           <a:lstStyle/>
           <a:p>
             <a:pPr>
-              <a:defRPr sz="1000" b="1">
-                <a:solidFill>
-                  <a:srgbClr val="0F172A"/>
-                </a:solidFill>
-              </a:defRPr>
-            </a:pPr>
-            <a:r>
-              <a:t>RESPONSIBILITIES (What it Does):</a:t>
-            </a:r>
-          </a:p>
-          <a:p>
-            <a:pPr>
-              <a:spcBef>
-                <a:spcPts val="300"/>
-              </a:spcBef>
-              <a:defRPr sz="950">
-                <a:solidFill>
-                  <a:srgbClr val="0F172A"/>
-                </a:solidFill>
-              </a:defRPr>
-            </a:pPr>
-            <a:r>
-              <a:t>• Maintains item name, category, unit, and min threshold</a:t>
-            </a:r>
-          </a:p>
-          <a:p>
-            <a:pPr>
-              <a:spcBef>
-                <a:spcPts val="300"/>
-              </a:spcBef>
-              <a:defRPr sz="950">
-                <a:solidFill>
-                  <a:srgbClr val="0F172A"/>
-                </a:solidFill>
-              </a:defRPr>
-            </a:pPr>
-            <a:r>
-              <a:t>• Aggregates total stock balance from transactions</a:t>
-            </a:r>
-          </a:p>
-          <a:p>
-            <a:pPr>
-              <a:spcBef>
-                <a:spcPts val="300"/>
-              </a:spcBef>
-              <a:defRPr sz="950">
-                <a:solidFill>
-                  <a:srgbClr val="0F172A"/>
-                </a:solidFill>
-              </a:defRPr>
-            </a:pPr>
-            <a:r>
-              <a:t>• Evaluates health status (Sufficient, Low, Expiring)</a:t>
-            </a:r>
-          </a:p>
-          <a:p>
-            <a:pPr>
-              <a:spcBef>
-                <a:spcPts val="1400"/>
-              </a:spcBef>
-              <a:defRPr sz="1000" b="1">
-                <a:solidFill>
-                  <a:srgbClr val="2563EB"/>
-                </a:solidFill>
-              </a:defRPr>
-            </a:pPr>
-            <a:r>
-              <a:t>COLLABORATORS (Interacts With):</a:t>
-            </a:r>
-          </a:p>
-          <a:p>
-            <a:pPr>
-              <a:spcBef>
-                <a:spcPts val="300"/>
-              </a:spcBef>
-              <a:defRPr sz="950">
-                <a:solidFill>
-                  <a:srgbClr val="0F172A"/>
-                </a:solidFill>
-              </a:defRPr>
-            </a:pPr>
-            <a:r>
-              <a:t>• Category</a:t>
-            </a:r>
-          </a:p>
-          <a:p>
-            <a:pPr>
-              <a:spcBef>
-                <a:spcPts val="300"/>
-              </a:spcBef>
-              <a:defRPr sz="950">
-                <a:solidFill>
-                  <a:srgbClr val="0F172A"/>
-                </a:solidFill>
-              </a:defRPr>
-            </a:pPr>
-            <a:r>
-              <a:t>• InventoryTransaction</a:t>
-            </a:r>
-          </a:p>
-          <a:p>
-            <a:pPr>
-              <a:spcBef>
-                <a:spcPts val="300"/>
-              </a:spcBef>
-              <a:defRPr sz="950">
-                <a:solidFill>
-                  <a:srgbClr val="0F172A"/>
-                </a:solidFill>
-              </a:defRPr>
-            </a:pPr>
-            <a:r>
-              <a:t>• AlertEngine</a:t>
-            </a:r>
-          </a:p>
-        </p:txBody>
-      </p:sp>
-      <p:sp>
-        <p:nvSpPr>
-          <p:cNvPr id="9" name="Rounded Rectangle 8"/>
-          <p:cNvSpPr/>
-          <p:nvPr/>
-        </p:nvSpPr>
-        <p:spPr>
-          <a:xfrm>
-            <a:off x="4343400" y="1280160"/>
-            <a:ext cx="3474720" cy="4892040"/>
-          </a:xfrm>
-          <a:prstGeom prst="roundRect">
-            <a:avLst/>
-          </a:prstGeom>
-          <a:solidFill>
-            <a:srgbClr val="FFFFFF"/>
-          </a:solidFill>
-          <a:ln w="12700">
-            <a:solidFill>
-              <a:srgbClr val="CBD5E1"/>
-            </a:solidFill>
-          </a:ln>
-        </p:spPr>
-        <p:style>
-          <a:lnRef idx="1">
-            <a:schemeClr val="accent1"/>
-          </a:lnRef>
-          <a:fillRef idx="3">
-            <a:schemeClr val="accent1"/>
-          </a:fillRef>
-          <a:effectRef idx="2">
-            <a:schemeClr val="accent1"/>
-          </a:effectRef>
-          <a:fontRef idx="minor">
-            <a:schemeClr val="lt1"/>
-          </a:fontRef>
-        </p:style>
-        <p:txBody>
-          <a:bodyPr rtlCol="0" anchor="ctr"/>
-          <a:lstStyle/>
-          <a:p>
-            <a:pPr algn="ctr"/>
-            <a:endParaRPr/>
-          </a:p>
-        </p:txBody>
-      </p:sp>
-      <p:sp>
-        <p:nvSpPr>
-          <p:cNvPr id="10" name="Rectangle 9"/>
-          <p:cNvSpPr/>
-          <p:nvPr/>
-        </p:nvSpPr>
-        <p:spPr>
-          <a:xfrm>
-            <a:off x="4343400" y="1280160"/>
-            <a:ext cx="3474720" cy="384048"/>
-          </a:xfrm>
-          <a:prstGeom prst="rect">
-            <a:avLst/>
-          </a:prstGeom>
-          <a:solidFill>
-            <a:srgbClr val="1E40AF"/>
-          </a:solidFill>
-          <a:ln>
-            <a:noFill/>
-          </a:ln>
-        </p:spPr>
-        <p:style>
-          <a:lnRef idx="1">
-            <a:schemeClr val="accent1"/>
-          </a:lnRef>
-          <a:fillRef idx="3">
-            <a:schemeClr val="accent1"/>
-          </a:fillRef>
-          <a:effectRef idx="2">
-            <a:schemeClr val="accent1"/>
-          </a:effectRef>
-          <a:fontRef idx="minor">
-            <a:schemeClr val="lt1"/>
-          </a:fontRef>
-        </p:style>
-        <p:txBody>
-          <a:bodyPr rtlCol="0" anchor="ctr"/>
-          <a:lstStyle/>
-          <a:p>
-            <a:pPr algn="ctr">
-              <a:defRPr sz="1200" b="1">
-                <a:solidFill>
-                  <a:srgbClr val="FFFFFF"/>
-                </a:solidFill>
-              </a:defRPr>
-            </a:pPr>
-            <a:r>
-              <a:t>InventoryTransaction</a:t>
-            </a:r>
-          </a:p>
-        </p:txBody>
-      </p:sp>
-      <p:sp>
-        <p:nvSpPr>
-          <p:cNvPr id="11" name="TextBox 10"/>
-          <p:cNvSpPr txBox="1"/>
-          <p:nvPr/>
-        </p:nvSpPr>
-        <p:spPr>
-          <a:xfrm>
-            <a:off x="4480560" y="1783080"/>
-            <a:ext cx="3200400" cy="4206240"/>
-          </a:xfrm>
-          <a:prstGeom prst="rect">
-            <a:avLst/>
-          </a:prstGeom>
-          <a:noFill/>
-        </p:spPr>
-        <p:txBody>
-          <a:bodyPr wrap="square">
-            <a:spAutoFit/>
-          </a:bodyPr>
-          <a:lstStyle/>
-          <a:p>
-            <a:pPr>
-              <a:defRPr sz="1000" b="1">
-                <a:solidFill>
-                  <a:srgbClr val="0F172A"/>
-                </a:solidFill>
-              </a:defRPr>
-            </a:pPr>
-            <a:r>
-              <a:t>RESPONSIBILITIES (What it Does):</a:t>
-            </a:r>
-          </a:p>
-          <a:p>
-            <a:pPr>
-              <a:spcBef>
-                <a:spcPts val="300"/>
-              </a:spcBef>
-              <a:defRPr sz="950">
-                <a:solidFill>
-                  <a:srgbClr val="0F172A"/>
-                </a:solidFill>
-              </a:defRPr>
-            </a:pPr>
-            <a:r>
-              <a:t>• Records individual batch inflow and consumption outflow</a:t>
-            </a:r>
-          </a:p>
-          <a:p>
-            <a:pPr>
-              <a:spcBef>
-                <a:spcPts val="300"/>
-              </a:spcBef>
-              <a:defRPr sz="950">
-                <a:solidFill>
-                  <a:srgbClr val="0F172A"/>
-                </a:solidFill>
-              </a:defRPr>
-            </a:pPr>
-            <a:r>
-              <a:t>• Tracks specific purchase and expiration dates</a:t>
-            </a:r>
-          </a:p>
-          <a:p>
-            <a:pPr>
-              <a:spcBef>
-                <a:spcPts val="300"/>
-              </a:spcBef>
-              <a:defRPr sz="950">
-                <a:solidFill>
-                  <a:srgbClr val="0F172A"/>
-                </a:solidFill>
-              </a:defRPr>
-            </a:pPr>
-            <a:r>
-              <a:t>• Logs reason classification</a:t>
-            </a:r>
-          </a:p>
-          <a:p>
-            <a:pPr>
-              <a:spcBef>
-                <a:spcPts val="1400"/>
-              </a:spcBef>
-              <a:defRPr sz="1000" b="1">
-                <a:solidFill>
-                  <a:srgbClr val="2563EB"/>
-                </a:solidFill>
-              </a:defRPr>
-            </a:pPr>
-            <a:r>
-              <a:t>COLLABORATORS (Interacts With):</a:t>
-            </a:r>
-          </a:p>
-          <a:p>
-            <a:pPr>
-              <a:spcBef>
-                <a:spcPts val="300"/>
-              </a:spcBef>
-              <a:defRPr sz="950">
-                <a:solidFill>
-                  <a:srgbClr val="0F172A"/>
-                </a:solidFill>
-              </a:defRPr>
-            </a:pPr>
-            <a:r>
-              <a:t>• InventoryItem</a:t>
-            </a:r>
-          </a:p>
-        </p:txBody>
-      </p:sp>
-      <p:sp>
-        <p:nvSpPr>
-          <p:cNvPr id="12" name="Rounded Rectangle 11"/>
-          <p:cNvSpPr/>
-          <p:nvPr/>
-        </p:nvSpPr>
-        <p:spPr>
-          <a:xfrm>
-            <a:off x="7955280" y="1280160"/>
-            <a:ext cx="3474720" cy="4892040"/>
-          </a:xfrm>
-          <a:prstGeom prst="roundRect">
-            <a:avLst/>
-          </a:prstGeom>
-          <a:solidFill>
-            <a:srgbClr val="FFFFFF"/>
-          </a:solidFill>
-          <a:ln w="12700">
-            <a:solidFill>
-              <a:srgbClr val="CBD5E1"/>
-            </a:solidFill>
-          </a:ln>
-        </p:spPr>
-        <p:style>
-          <a:lnRef idx="1">
-            <a:schemeClr val="accent1"/>
-          </a:lnRef>
-          <a:fillRef idx="3">
-            <a:schemeClr val="accent1"/>
-          </a:fillRef>
-          <a:effectRef idx="2">
-            <a:schemeClr val="accent1"/>
-          </a:effectRef>
-          <a:fontRef idx="minor">
-            <a:schemeClr val="lt1"/>
-          </a:fontRef>
-        </p:style>
-        <p:txBody>
-          <a:bodyPr rtlCol="0" anchor="ctr"/>
-          <a:lstStyle/>
-          <a:p>
-            <a:pPr algn="ctr"/>
-            <a:endParaRPr/>
-          </a:p>
-        </p:txBody>
-      </p:sp>
-      <p:sp>
-        <p:nvSpPr>
-          <p:cNvPr id="13" name="Rectangle 12"/>
-          <p:cNvSpPr/>
-          <p:nvPr/>
-        </p:nvSpPr>
-        <p:spPr>
-          <a:xfrm>
-            <a:off x="7955280" y="1280160"/>
-            <a:ext cx="3474720" cy="384048"/>
-          </a:xfrm>
-          <a:prstGeom prst="rect">
-            <a:avLst/>
-          </a:prstGeom>
-          <a:solidFill>
-            <a:srgbClr val="10B981"/>
-          </a:solidFill>
-          <a:ln>
-            <a:noFill/>
-          </a:ln>
-        </p:spPr>
-        <p:style>
-          <a:lnRef idx="1">
-            <a:schemeClr val="accent1"/>
-          </a:lnRef>
-          <a:fillRef idx="3">
-            <a:schemeClr val="accent1"/>
-          </a:fillRef>
-          <a:effectRef idx="2">
-            <a:schemeClr val="accent1"/>
-          </a:effectRef>
-          <a:fontRef idx="minor">
-            <a:schemeClr val="lt1"/>
-          </a:fontRef>
-        </p:style>
-        <p:txBody>
-          <a:bodyPr rtlCol="0" anchor="ctr"/>
-          <a:lstStyle/>
-          <a:p>
-            <a:pPr algn="ctr">
-              <a:defRPr sz="1200" b="1">
-                <a:solidFill>
-                  <a:srgbClr val="FFFFFF"/>
-                </a:solidFill>
-              </a:defRPr>
-            </a:pPr>
-            <a:r>
-              <a:t>AlertEngine</a:t>
-            </a:r>
-          </a:p>
-        </p:txBody>
-      </p:sp>
-      <p:sp>
-        <p:nvSpPr>
-          <p:cNvPr id="14" name="TextBox 13"/>
-          <p:cNvSpPr txBox="1"/>
-          <p:nvPr/>
-        </p:nvSpPr>
-        <p:spPr>
-          <a:xfrm>
-            <a:off x="8092440" y="1783080"/>
-            <a:ext cx="3200400" cy="4206240"/>
-          </a:xfrm>
-          <a:prstGeom prst="rect">
-            <a:avLst/>
-          </a:prstGeom>
-          <a:noFill/>
-        </p:spPr>
-        <p:txBody>
-          <a:bodyPr wrap="square">
-            <a:spAutoFit/>
-          </a:bodyPr>
-          <a:lstStyle/>
-          <a:p>
-            <a:pPr>
-              <a:defRPr sz="1000" b="1">
-                <a:solidFill>
-                  <a:srgbClr val="0F172A"/>
-                </a:solidFill>
-              </a:defRPr>
-            </a:pPr>
-            <a:r>
-              <a:t>RESPONSIBILITIES (What it Does):</a:t>
-            </a:r>
-          </a:p>
-          <a:p>
-            <a:pPr>
-              <a:spcBef>
-                <a:spcPts val="300"/>
-              </a:spcBef>
-              <a:defRPr sz="950">
-                <a:solidFill>
-                  <a:srgbClr val="0F172A"/>
-                </a:solidFill>
-              </a:defRPr>
-            </a:pPr>
-            <a:r>
-              <a:t>• Scans batch expiration dates against today's date</a:t>
-            </a:r>
-          </a:p>
-          <a:p>
-            <a:pPr>
-              <a:spcBef>
-                <a:spcPts val="300"/>
-              </a:spcBef>
-              <a:defRPr sz="950">
-                <a:solidFill>
-                  <a:srgbClr val="0F172A"/>
-                </a:solidFill>
-              </a:defRPr>
-            </a:pPr>
-            <a:r>
-              <a:t>• Emits 3-day lookahead Expiring Soon alerts</a:t>
-            </a:r>
-          </a:p>
-          <a:p>
-            <a:pPr>
-              <a:spcBef>
-                <a:spcPts val="300"/>
-              </a:spcBef>
-              <a:defRPr sz="950">
-                <a:solidFill>
-                  <a:srgbClr val="0F172A"/>
-                </a:solidFill>
-              </a:defRPr>
-            </a:pPr>
-            <a:r>
-              <a:t>• Compiles Low Stock items into Shopping List</a:t>
-            </a:r>
-          </a:p>
-          <a:p>
-            <a:pPr>
-              <a:spcBef>
-                <a:spcPts val="1400"/>
-              </a:spcBef>
-              <a:defRPr sz="1000" b="1">
-                <a:solidFill>
-                  <a:srgbClr val="2563EB"/>
-                </a:solidFill>
-              </a:defRPr>
-            </a:pPr>
-            <a:r>
-              <a:t>COLLABORATORS (Interacts With):</a:t>
-            </a:r>
-          </a:p>
-          <a:p>
-            <a:pPr>
-              <a:spcBef>
-                <a:spcPts val="300"/>
-              </a:spcBef>
-              <a:defRPr sz="950">
-                <a:solidFill>
-                  <a:srgbClr val="0F172A"/>
-                </a:solidFill>
-              </a:defRPr>
-            </a:pPr>
-            <a:r>
-              <a:t>• InventoryItem</a:t>
-            </a:r>
-          </a:p>
-          <a:p>
-            <a:pPr>
-              <a:spcBef>
-                <a:spcPts val="300"/>
-              </a:spcBef>
-              <a:defRPr sz="950">
-                <a:solidFill>
-                  <a:srgbClr val="0F172A"/>
-                </a:solidFill>
-              </a:defRPr>
-            </a:pPr>
-            <a:r>
-              <a:t>• InventoryTransaction</a:t>
+              <a:defRPr sz="900">
+                <a:solidFill>
+                  <a:srgbClr val="64748B"/>
+                </a:solidFill>
+              </a:defRPr>
+            </a:pPr>
+            <a:r>
+              <a:t>Refrigerator &amp; Pantry Inventory Subsystem (RIMS)   |   Slide 5 of 11</a:t>
             </a:r>
           </a:p>
         </p:txBody>
